--- a/detector/Lung_ICRP/angle calculation [Autosaved].pptx
+++ b/detector/Lung_ICRP/angle calculation [Autosaved].pptx
@@ -5,14 +5,15 @@
     <p:sldMasterId id="2147483648" r:id="rId1"/>
   </p:sldMasterIdLst>
   <p:sldIdLst>
-    <p:sldId id="256" r:id="rId2"/>
+    <p:sldId id="271" r:id="rId2"/>
     <p:sldId id="264" r:id="rId3"/>
     <p:sldId id="257" r:id="rId4"/>
-    <p:sldId id="263" r:id="rId5"/>
-    <p:sldId id="259" r:id="rId6"/>
-    <p:sldId id="260" r:id="rId7"/>
-    <p:sldId id="261" r:id="rId8"/>
-    <p:sldId id="262" r:id="rId9"/>
+    <p:sldId id="265" r:id="rId5"/>
+    <p:sldId id="266" r:id="rId6"/>
+    <p:sldId id="267" r:id="rId7"/>
+    <p:sldId id="263" r:id="rId8"/>
+    <p:sldId id="268" r:id="rId9"/>
+    <p:sldId id="269" r:id="rId10"/>
   </p:sldIdLst>
   <p:sldSz cx="12192000" cy="6858000"/>
   <p:notesSz cx="6858000" cy="9144000"/>
@@ -117,6 +118,7870 @@
     </p:ext>
   </p:extLst>
 </p:presentation>
+</file>
+
+<file path=ppt/charts/chart1.xml><?xml version="1.0" encoding="utf-8"?>
+<c:chartSpace xmlns:c="http://schemas.openxmlformats.org/drawingml/2006/chart" xmlns:a="http://schemas.openxmlformats.org/drawingml/2006/main" xmlns:r="http://schemas.openxmlformats.org/officeDocument/2006/relationships" xmlns:c16r2="http://schemas.microsoft.com/office/drawing/2015/06/chart">
+  <c:date1904 val="0"/>
+  <c:lang val="en-US"/>
+  <c:roundedCorners val="0"/>
+  <mc:AlternateContent xmlns:mc="http://schemas.openxmlformats.org/markup-compatibility/2006">
+    <mc:Choice xmlns:c14="http://schemas.microsoft.com/office/drawing/2007/8/2/chart" Requires="c14">
+      <c14:style val="102"/>
+    </mc:Choice>
+    <mc:Fallback>
+      <c:style val="2"/>
+    </mc:Fallback>
+  </mc:AlternateContent>
+  <c:chart>
+    <c:title>
+      <c:tx>
+        <c:rich>
+          <a:bodyPr rot="0" spcFirstLastPara="1" vertOverflow="ellipsis" vert="horz" wrap="square" anchor="ctr" anchorCtr="1"/>
+          <a:lstStyle/>
+          <a:p>
+            <a:pPr>
+              <a:defRPr sz="1400" b="0" i="0" u="none" strike="noStrike" kern="1200" spc="0" baseline="0">
+                <a:solidFill>
+                  <a:schemeClr val="tx1">
+                    <a:lumMod val="65000"/>
+                    <a:lumOff val="35000"/>
+                  </a:schemeClr>
+                </a:solidFill>
+                <a:latin typeface="+mn-lt"/>
+                <a:ea typeface="+mn-ea"/>
+                <a:cs typeface="+mn-cs"/>
+              </a:defRPr>
+            </a:pPr>
+            <a:r>
+              <a:rPr lang="en-US"/>
+              <a:t>Volume 3:Tumor</a:t>
+            </a:r>
+          </a:p>
+        </c:rich>
+      </c:tx>
+      <c:overlay val="0"/>
+      <c:spPr>
+        <a:noFill/>
+        <a:ln>
+          <a:noFill/>
+        </a:ln>
+        <a:effectLst/>
+      </c:spPr>
+      <c:txPr>
+        <a:bodyPr rot="0" spcFirstLastPara="1" vertOverflow="ellipsis" vert="horz" wrap="square" anchor="ctr" anchorCtr="1"/>
+        <a:lstStyle/>
+        <a:p>
+          <a:pPr>
+            <a:defRPr sz="1400" b="0" i="0" u="none" strike="noStrike" kern="1200" spc="0" baseline="0">
+              <a:solidFill>
+                <a:schemeClr val="tx1">
+                  <a:lumMod val="65000"/>
+                  <a:lumOff val="35000"/>
+                </a:schemeClr>
+              </a:solidFill>
+              <a:latin typeface="+mn-lt"/>
+              <a:ea typeface="+mn-ea"/>
+              <a:cs typeface="+mn-cs"/>
+            </a:defRPr>
+          </a:pPr>
+          <a:endParaRPr lang="en-US"/>
+        </a:p>
+      </c:txPr>
+    </c:title>
+    <c:autoTitleDeleted val="0"/>
+    <c:plotArea>
+      <c:layout/>
+      <c:scatterChart>
+        <c:scatterStyle val="lineMarker"/>
+        <c:varyColors val="0"/>
+        <c:ser>
+          <c:idx val="0"/>
+          <c:order val="0"/>
+          <c:tx>
+            <c:strRef>
+              <c:f>Scatter_Volume_3!$H$1</c:f>
+              <c:strCache>
+                <c:ptCount val="1"/>
+                <c:pt idx="0">
+                  <c:v>scatter_k_keV</c:v>
+                </c:pt>
+              </c:strCache>
+            </c:strRef>
+          </c:tx>
+          <c:spPr>
+            <a:ln w="28575" cap="rnd">
+              <a:noFill/>
+              <a:round/>
+            </a:ln>
+            <a:effectLst/>
+          </c:spPr>
+          <c:marker>
+            <c:symbol val="circle"/>
+            <c:size val="5"/>
+            <c:spPr>
+              <a:solidFill>
+                <a:schemeClr val="accent1"/>
+              </a:solidFill>
+              <a:ln w="9525">
+                <a:solidFill>
+                  <a:schemeClr val="accent1"/>
+                </a:solidFill>
+              </a:ln>
+              <a:effectLst/>
+            </c:spPr>
+          </c:marker>
+          <c:xVal>
+            <c:numRef>
+              <c:f>Scatter_Volume_3!$G$2:$G$131</c:f>
+              <c:numCache>
+                <c:formatCode>General</c:formatCode>
+                <c:ptCount val="130"/>
+                <c:pt idx="0">
+                  <c:v>85.271925041978449</c:v>
+                </c:pt>
+                <c:pt idx="1">
+                  <c:v>40.113801646415872</c:v>
+                </c:pt>
+                <c:pt idx="2">
+                  <c:v>34.510091760395397</c:v>
+                </c:pt>
+                <c:pt idx="3">
+                  <c:v>29.73951499270169</c:v>
+                </c:pt>
+                <c:pt idx="4">
+                  <c:v>25.214725510142941</c:v>
+                </c:pt>
+                <c:pt idx="5">
+                  <c:v>23.038510252414898</c:v>
+                </c:pt>
+                <c:pt idx="6">
+                  <c:v>26.90230281151435</c:v>
+                </c:pt>
+                <c:pt idx="7">
+                  <c:v>25.704911755947698</c:v>
+                </c:pt>
+                <c:pt idx="8">
+                  <c:v>36.319635914666662</c:v>
+                </c:pt>
+                <c:pt idx="9">
+                  <c:v>34.589757190105878</c:v>
+                </c:pt>
+                <c:pt idx="10">
+                  <c:v>37.955047501562717</c:v>
+                </c:pt>
+                <c:pt idx="11">
+                  <c:v>20.803735999154121</c:v>
+                </c:pt>
+                <c:pt idx="12">
+                  <c:v>22.23281636437731</c:v>
+                </c:pt>
+                <c:pt idx="13">
+                  <c:v>19.76997252216254</c:v>
+                </c:pt>
+                <c:pt idx="14">
+                  <c:v>18.679865703706291</c:v>
+                </c:pt>
+                <c:pt idx="15">
+                  <c:v>22.1221353678024</c:v>
+                </c:pt>
+                <c:pt idx="16">
+                  <c:v>24.538279555362131</c:v>
+                </c:pt>
+                <c:pt idx="17">
+                  <c:v>38.19229930694997</c:v>
+                </c:pt>
+                <c:pt idx="18">
+                  <c:v>40.15061130973811</c:v>
+                </c:pt>
+                <c:pt idx="19">
+                  <c:v>26.657481623661329</c:v>
+                </c:pt>
+                <c:pt idx="20">
+                  <c:v>22.280227236310179</c:v>
+                </c:pt>
+                <c:pt idx="21">
+                  <c:v>32.774631231013018</c:v>
+                </c:pt>
+                <c:pt idx="22">
+                  <c:v>19.670277347808341</c:v>
+                </c:pt>
+                <c:pt idx="23">
+                  <c:v>27.686943852388641</c:v>
+                </c:pt>
+                <c:pt idx="24">
+                  <c:v>161.19653891102311</c:v>
+                </c:pt>
+                <c:pt idx="25">
+                  <c:v>18.135795108694172</c:v>
+                </c:pt>
+                <c:pt idx="26">
+                  <c:v>39.157344880337988</c:v>
+                </c:pt>
+                <c:pt idx="27">
+                  <c:v>27.063004459834509</c:v>
+                </c:pt>
+                <c:pt idx="28">
+                  <c:v>27.42341666809434</c:v>
+                </c:pt>
+                <c:pt idx="29">
+                  <c:v>33.005655181510953</c:v>
+                </c:pt>
+                <c:pt idx="30">
+                  <c:v>36.907180475570428</c:v>
+                </c:pt>
+                <c:pt idx="31">
+                  <c:v>29.778588370569281</c:v>
+                </c:pt>
+                <c:pt idx="32">
+                  <c:v>38.756064732300523</c:v>
+                </c:pt>
+                <c:pt idx="33">
+                  <c:v>36.445566699663921</c:v>
+                </c:pt>
+                <c:pt idx="34">
+                  <c:v>33.268451819972597</c:v>
+                </c:pt>
+                <c:pt idx="35">
+                  <c:v>37.656896824645642</c:v>
+                </c:pt>
+                <c:pt idx="36">
+                  <c:v>39.048238581033168</c:v>
+                </c:pt>
+                <c:pt idx="37">
+                  <c:v>27.483703168003021</c:v>
+                </c:pt>
+                <c:pt idx="38">
+                  <c:v>33.625002281693853</c:v>
+                </c:pt>
+                <c:pt idx="39">
+                  <c:v>35.444167918262359</c:v>
+                </c:pt>
+                <c:pt idx="40">
+                  <c:v>34.846434905788747</c:v>
+                </c:pt>
+                <c:pt idx="41">
+                  <c:v>28.519721175301392</c:v>
+                </c:pt>
+                <c:pt idx="42">
+                  <c:v>41.011444199575728</c:v>
+                </c:pt>
+                <c:pt idx="43">
+                  <c:v>33.596924940002069</c:v>
+                </c:pt>
+                <c:pt idx="44">
+                  <c:v>26.609302588432168</c:v>
+                </c:pt>
+                <c:pt idx="45">
+                  <c:v>30.12635164384508</c:v>
+                </c:pt>
+                <c:pt idx="46">
+                  <c:v>28.412048641459091</c:v>
+                </c:pt>
+                <c:pt idx="47">
+                  <c:v>21.368077109398619</c:v>
+                </c:pt>
+                <c:pt idx="48">
+                  <c:v>33.579930200495653</c:v>
+                </c:pt>
+                <c:pt idx="49">
+                  <c:v>25.846882605295601</c:v>
+                </c:pt>
+                <c:pt idx="50">
+                  <c:v>31.03675005453232</c:v>
+                </c:pt>
+                <c:pt idx="51">
+                  <c:v>40.345854075791912</c:v>
+                </c:pt>
+                <c:pt idx="52">
+                  <c:v>26.083067540464292</c:v>
+                </c:pt>
+                <c:pt idx="53">
+                  <c:v>23.595522705782312</c:v>
+                </c:pt>
+                <c:pt idx="54">
+                  <c:v>29.885499263251969</c:v>
+                </c:pt>
+                <c:pt idx="55">
+                  <c:v>34.272756438621897</c:v>
+                </c:pt>
+                <c:pt idx="56">
+                  <c:v>37.860553610543121</c:v>
+                </c:pt>
+                <c:pt idx="57">
+                  <c:v>25.39052981694326</c:v>
+                </c:pt>
+                <c:pt idx="58">
+                  <c:v>25.19329048282659</c:v>
+                </c:pt>
+                <c:pt idx="59">
+                  <c:v>31.13743914566858</c:v>
+                </c:pt>
+                <c:pt idx="60">
+                  <c:v>39.517471399918861</c:v>
+                </c:pt>
+                <c:pt idx="61">
+                  <c:v>28.172670302105541</c:v>
+                </c:pt>
+                <c:pt idx="62">
+                  <c:v>23.509253223739549</c:v>
+                </c:pt>
+                <c:pt idx="63">
+                  <c:v>39.590712229903559</c:v>
+                </c:pt>
+                <c:pt idx="64">
+                  <c:v>34.142328458577481</c:v>
+                </c:pt>
+                <c:pt idx="65">
+                  <c:v>27.63099444532633</c:v>
+                </c:pt>
+                <c:pt idx="66">
+                  <c:v>22.824480006289409</c:v>
+                </c:pt>
+                <c:pt idx="67">
+                  <c:v>39.527846148805217</c:v>
+                </c:pt>
+                <c:pt idx="68">
+                  <c:v>27.65838576169136</c:v>
+                </c:pt>
+                <c:pt idx="69">
+                  <c:v>26.115515152060588</c:v>
+                </c:pt>
+                <c:pt idx="70">
+                  <c:v>26.573229755810289</c:v>
+                </c:pt>
+                <c:pt idx="71">
+                  <c:v>21.498115585860909</c:v>
+                </c:pt>
+                <c:pt idx="72">
+                  <c:v>31.36297747542746</c:v>
+                </c:pt>
+                <c:pt idx="73">
+                  <c:v>32.325348693621883</c:v>
+                </c:pt>
+                <c:pt idx="74">
+                  <c:v>25.50591503832953</c:v>
+                </c:pt>
+                <c:pt idx="75">
+                  <c:v>33.449794901117329</c:v>
+                </c:pt>
+                <c:pt idx="76">
+                  <c:v>26.97537140940435</c:v>
+                </c:pt>
+                <c:pt idx="77">
+                  <c:v>31.45824518663073</c:v>
+                </c:pt>
+                <c:pt idx="78">
+                  <c:v>127.26176888017839</c:v>
+                </c:pt>
+                <c:pt idx="79">
+                  <c:v>29.960227664197419</c:v>
+                </c:pt>
+                <c:pt idx="80">
+                  <c:v>25.804201405217899</c:v>
+                </c:pt>
+                <c:pt idx="81">
+                  <c:v>29.532357193363751</c:v>
+                </c:pt>
+                <c:pt idx="82">
+                  <c:v>37.877317563658828</c:v>
+                </c:pt>
+                <c:pt idx="83">
+                  <c:v>20.288802203686359</c:v>
+                </c:pt>
+                <c:pt idx="84">
+                  <c:v>21.69602997307209</c:v>
+                </c:pt>
+                <c:pt idx="85">
+                  <c:v>32.193966412460803</c:v>
+                </c:pt>
+                <c:pt idx="86">
+                  <c:v>24.485470718059581</c:v>
+                </c:pt>
+                <c:pt idx="87">
+                  <c:v>19.54220962985837</c:v>
+                </c:pt>
+                <c:pt idx="88">
+                  <c:v>40.621998030946372</c:v>
+                </c:pt>
+                <c:pt idx="89">
+                  <c:v>23.04429730110758</c:v>
+                </c:pt>
+                <c:pt idx="90">
+                  <c:v>33.826255036635558</c:v>
+                </c:pt>
+                <c:pt idx="91">
+                  <c:v>26.98949102355423</c:v>
+                </c:pt>
+                <c:pt idx="92">
+                  <c:v>28.95189597293092</c:v>
+                </c:pt>
+                <c:pt idx="93">
+                  <c:v>31.627043775729181</c:v>
+                </c:pt>
+                <c:pt idx="94">
+                  <c:v>24.718886694821709</c:v>
+                </c:pt>
+                <c:pt idx="95">
+                  <c:v>32.143638268890612</c:v>
+                </c:pt>
+                <c:pt idx="96">
+                  <c:v>31.900581479560529</c:v>
+                </c:pt>
+                <c:pt idx="97">
+                  <c:v>24.230919688461238</c:v>
+                </c:pt>
+                <c:pt idx="98">
+                  <c:v>25.271024233694561</c:v>
+                </c:pt>
+                <c:pt idx="99">
+                  <c:v>28.938347705634332</c:v>
+                </c:pt>
+                <c:pt idx="100">
+                  <c:v>26.570474610181542</c:v>
+                </c:pt>
+                <c:pt idx="101">
+                  <c:v>22.372698617138351</c:v>
+                </c:pt>
+                <c:pt idx="102">
+                  <c:v>39.772523313064333</c:v>
+                </c:pt>
+                <c:pt idx="103">
+                  <c:v>32.085712845885261</c:v>
+                </c:pt>
+                <c:pt idx="104">
+                  <c:v>24.62806519368872</c:v>
+                </c:pt>
+                <c:pt idx="105">
+                  <c:v>24.25332070650153</c:v>
+                </c:pt>
+                <c:pt idx="106">
+                  <c:v>18.83519776676382</c:v>
+                </c:pt>
+                <c:pt idx="107">
+                  <c:v>39.057561447114992</c:v>
+                </c:pt>
+                <c:pt idx="108">
+                  <c:v>122.03214876758661</c:v>
+                </c:pt>
+                <c:pt idx="109">
+                  <c:v>30.048941980505251</c:v>
+                </c:pt>
+                <c:pt idx="110">
+                  <c:v>30.898326844651471</c:v>
+                </c:pt>
+                <c:pt idx="111">
+                  <c:v>32.429932298872878</c:v>
+                </c:pt>
+                <c:pt idx="112">
+                  <c:v>43.550184316118951</c:v>
+                </c:pt>
+                <c:pt idx="113">
+                  <c:v>28.13458983622041</c:v>
+                </c:pt>
+                <c:pt idx="114">
+                  <c:v>36.475284509600911</c:v>
+                </c:pt>
+                <c:pt idx="115">
+                  <c:v>23.562781122051881</c:v>
+                </c:pt>
+                <c:pt idx="116">
+                  <c:v>32.048305923728442</c:v>
+                </c:pt>
+                <c:pt idx="117">
+                  <c:v>24.170193118832621</c:v>
+                </c:pt>
+                <c:pt idx="118">
+                  <c:v>32.978762861378961</c:v>
+                </c:pt>
+                <c:pt idx="119">
+                  <c:v>56.773398189593067</c:v>
+                </c:pt>
+                <c:pt idx="120">
+                  <c:v>29.207694211572331</c:v>
+                </c:pt>
+                <c:pt idx="121">
+                  <c:v>26.126045757779419</c:v>
+                </c:pt>
+                <c:pt idx="122">
+                  <c:v>32.608941642894692</c:v>
+                </c:pt>
+                <c:pt idx="123">
+                  <c:v>18.449662959810151</c:v>
+                </c:pt>
+                <c:pt idx="124">
+                  <c:v>19.670512035485238</c:v>
+                </c:pt>
+                <c:pt idx="125">
+                  <c:v>23.538270443896149</c:v>
+                </c:pt>
+                <c:pt idx="126">
+                  <c:v>36.998162786984473</c:v>
+                </c:pt>
+                <c:pt idx="127">
+                  <c:v>18.01303108739264</c:v>
+                </c:pt>
+                <c:pt idx="128">
+                  <c:v>27.94013016601756</c:v>
+                </c:pt>
+                <c:pt idx="129">
+                  <c:v>35.967323676734203</c:v>
+                </c:pt>
+              </c:numCache>
+            </c:numRef>
+          </c:xVal>
+          <c:yVal>
+            <c:numRef>
+              <c:f>Scatter_Volume_3!$H$2:$H$131</c:f>
+              <c:numCache>
+                <c:formatCode>General</c:formatCode>
+                <c:ptCount val="130"/>
+                <c:pt idx="0">
+                  <c:v>302.46020975326809</c:v>
+                </c:pt>
+                <c:pt idx="1">
+                  <c:v>170.03615060456031</c:v>
+                </c:pt>
+                <c:pt idx="2">
+                  <c:v>539.09931940693525</c:v>
+                </c:pt>
+                <c:pt idx="3">
+                  <c:v>565.506954640868</c:v>
+                </c:pt>
+                <c:pt idx="4">
+                  <c:v>589.26232613535615</c:v>
+                </c:pt>
+                <c:pt idx="5">
+                  <c:v>600.00366091629667</c:v>
+                </c:pt>
+                <c:pt idx="6">
+                  <c:v>580.59986828176432</c:v>
+                </c:pt>
+                <c:pt idx="7">
+                  <c:v>586.77380225755871</c:v>
+                </c:pt>
+                <c:pt idx="8">
+                  <c:v>528.88783689176171</c:v>
+                </c:pt>
+                <c:pt idx="9">
+                  <c:v>538.65121232621641</c:v>
+                </c:pt>
+                <c:pt idx="10">
+                  <c:v>519.62038029860423</c:v>
+                </c:pt>
+                <c:pt idx="11">
+                  <c:v>610.44011999530971</c:v>
+                </c:pt>
+                <c:pt idx="12">
+                  <c:v>603.84085901427204</c:v>
+                </c:pt>
+                <c:pt idx="13">
+                  <c:v>615.03628872225204</c:v>
+                </c:pt>
+                <c:pt idx="14">
+                  <c:v>619.70901460535379</c:v>
+                </c:pt>
+                <c:pt idx="15">
+                  <c:v>604.36162187277569</c:v>
+                </c:pt>
+                <c:pt idx="16">
+                  <c:v>592.65650589872985</c:v>
+                </c:pt>
+                <c:pt idx="17">
+                  <c:v>518.27461748981193</c:v>
+                </c:pt>
+                <c:pt idx="18">
+                  <c:v>507.17000445498093</c:v>
+                </c:pt>
+                <c:pt idx="19">
+                  <c:v>581.87269039983209</c:v>
+                </c:pt>
+                <c:pt idx="20">
+                  <c:v>603.61730797467908</c:v>
+                </c:pt>
+                <c:pt idx="21">
+                  <c:v>548.8148287800343</c:v>
+                </c:pt>
+                <c:pt idx="22">
+                  <c:v>615.47121776952054</c:v>
+                </c:pt>
+                <c:pt idx="23">
+                  <c:v>576.48654225598216</c:v>
+                </c:pt>
+                <c:pt idx="24">
+                  <c:v>187.9687309251434</c:v>
+                </c:pt>
+                <c:pt idx="25">
+                  <c:v>621.97080147470979</c:v>
+                </c:pt>
+                <c:pt idx="26">
+                  <c:v>512.80044229378143</c:v>
+                </c:pt>
+                <c:pt idx="27">
+                  <c:v>579.76158159901615</c:v>
+                </c:pt>
+                <c:pt idx="28">
+                  <c:v>577.87365776822867</c:v>
+                </c:pt>
+                <c:pt idx="29">
+                  <c:v>547.52726273839301</c:v>
+                </c:pt>
+                <c:pt idx="30">
+                  <c:v>525.56101211885834</c:v>
+                </c:pt>
+                <c:pt idx="31">
+                  <c:v>565.29519518463246</c:v>
+                </c:pt>
+                <c:pt idx="32">
+                  <c:v>515.0765382785213</c:v>
+                </c:pt>
+                <c:pt idx="33">
+                  <c:v>528.17512636823926</c:v>
+                </c:pt>
+                <c:pt idx="34">
+                  <c:v>546.06027183932622</c:v>
+                </c:pt>
+                <c:pt idx="35">
+                  <c:v>521.31132346505831</c:v>
+                </c:pt>
+                <c:pt idx="36">
+                  <c:v>513.41925597516388</c:v>
+                </c:pt>
+                <c:pt idx="37">
+                  <c:v>577.55682230506966</c:v>
+                </c:pt>
+                <c:pt idx="38">
+                  <c:v>546.93522461942518</c:v>
+                </c:pt>
+                <c:pt idx="39">
+                  <c:v>533.83605509470124</c:v>
+                </c:pt>
+                <c:pt idx="40">
+                  <c:v>537.20637954115591</c:v>
+                </c:pt>
+                <c:pt idx="41">
+                  <c:v>572.06780368525312</c:v>
+                </c:pt>
+                <c:pt idx="42">
+                  <c:v>502.2975334198938</c:v>
+                </c:pt>
+                <c:pt idx="43">
+                  <c:v>544.22334420987022</c:v>
+                </c:pt>
+                <c:pt idx="44">
+                  <c:v>582.12255651740634</c:v>
+                </c:pt>
+                <c:pt idx="45">
+                  <c:v>563.40640848012674</c:v>
+                </c:pt>
+                <c:pt idx="46">
+                  <c:v>572.64202497417864</c:v>
+                </c:pt>
+                <c:pt idx="47">
+                  <c:v>607.86693731705429</c:v>
+                </c:pt>
+                <c:pt idx="48">
+                  <c:v>544.31847094938576</c:v>
+                </c:pt>
+                <c:pt idx="49">
+                  <c:v>586.04869429608254</c:v>
+                </c:pt>
+                <c:pt idx="50">
+                  <c:v>558.42914369776975</c:v>
+                </c:pt>
+                <c:pt idx="51">
+                  <c:v>506.06416694342659</c:v>
+                </c:pt>
+                <c:pt idx="52">
+                  <c:v>584.83816333390132</c:v>
+                </c:pt>
+                <c:pt idx="53">
+                  <c:v>597.30488776864672</c:v>
+                </c:pt>
+                <c:pt idx="54">
+                  <c:v>564.71531053954686</c:v>
+                </c:pt>
+                <c:pt idx="55">
+                  <c:v>540.43332761006218</c:v>
+                </c:pt>
+                <c:pt idx="56">
+                  <c:v>520.15633383182364</c:v>
+                </c:pt>
+                <c:pt idx="57">
+                  <c:v>588.3725481767525</c:v>
+                </c:pt>
+                <c:pt idx="58">
+                  <c:v>589.3706010044026</c:v>
+                </c:pt>
+                <c:pt idx="59">
+                  <c:v>557.87594440395628</c:v>
+                </c:pt>
+                <c:pt idx="60">
+                  <c:v>510.75829649135449</c:v>
+                </c:pt>
+                <c:pt idx="61">
+                  <c:v>573.91560064322016</c:v>
+                </c:pt>
+                <c:pt idx="62">
+                  <c:v>597.72525031083183</c:v>
+                </c:pt>
+                <c:pt idx="63">
+                  <c:v>510.34305982830898</c:v>
+                </c:pt>
+                <c:pt idx="64">
+                  <c:v>541.16579008697033</c:v>
+                </c:pt>
+                <c:pt idx="65">
+                  <c:v>576.78150411902743</c:v>
+                </c:pt>
+                <c:pt idx="66">
+                  <c:v>601.03081503284113</c:v>
+                </c:pt>
+                <c:pt idx="67">
+                  <c:v>510.69947519118591</c:v>
+                </c:pt>
+                <c:pt idx="68">
+                  <c:v>576.63712973296526</c:v>
+                </c:pt>
+                <c:pt idx="69">
+                  <c:v>584.67145036671434</c:v>
+                </c:pt>
+                <c:pt idx="70">
+                  <c:v>582.30950335471107</c:v>
+                </c:pt>
+                <c:pt idx="71">
+                  <c:v>607.26783114484704</c:v>
+                </c:pt>
+                <c:pt idx="72">
+                  <c:v>556.6349615768878</c:v>
+                </c:pt>
+                <c:pt idx="73">
+                  <c:v>551.31293310341266</c:v>
+                </c:pt>
+                <c:pt idx="74">
+                  <c:v>587.7868951710966</c:v>
+                </c:pt>
+                <c:pt idx="75">
+                  <c:v>545.04658391404666</c:v>
+                </c:pt>
+                <c:pt idx="76">
+                  <c:v>580.21898431728403</c:v>
+                </c:pt>
+                <c:pt idx="77">
+                  <c:v>556.11001903552517</c:v>
+                </c:pt>
+                <c:pt idx="78">
+                  <c:v>214.94392584596659</c:v>
+                </c:pt>
+                <c:pt idx="79">
+                  <c:v>119.0314625684169</c:v>
+                </c:pt>
+                <c:pt idx="80">
+                  <c:v>586.26688852467953</c:v>
+                </c:pt>
+                <c:pt idx="81">
+                  <c:v>566.6280678335479</c:v>
+                </c:pt>
+                <c:pt idx="82">
+                  <c:v>520.06125373060502</c:v>
+                </c:pt>
+                <c:pt idx="83">
+                  <c:v>612.74896699089663</c:v>
+                </c:pt>
+                <c:pt idx="84">
+                  <c:v>606.35165679599493</c:v>
+                </c:pt>
+                <c:pt idx="85">
+                  <c:v>552.04190024500576</c:v>
+                </c:pt>
+                <c:pt idx="86">
+                  <c:v>592.91946436965736</c:v>
+                </c:pt>
+                <c:pt idx="87">
+                  <c:v>616.02772099683807</c:v>
+                </c:pt>
+                <c:pt idx="88">
+                  <c:v>504.50079728319838</c:v>
+                </c:pt>
+                <c:pt idx="89">
+                  <c:v>599.9758113272336</c:v>
+                </c:pt>
+                <c:pt idx="90">
+                  <c:v>542.93879978263578</c:v>
+                </c:pt>
+                <c:pt idx="91">
+                  <c:v>580.14533066894808</c:v>
+                </c:pt>
+                <c:pt idx="92">
+                  <c:v>569.75472689902347</c:v>
+                </c:pt>
+                <c:pt idx="93">
+                  <c:v>555.17884294430428</c:v>
+                </c:pt>
+                <c:pt idx="94">
+                  <c:v>591.75494232270546</c:v>
+                </c:pt>
+                <c:pt idx="95">
+                  <c:v>552.32095054543913</c:v>
+                </c:pt>
+                <c:pt idx="96">
+                  <c:v>553.66706760122065</c:v>
+                </c:pt>
+                <c:pt idx="97">
+                  <c:v>594.18276956789214</c:v>
+                </c:pt>
+                <c:pt idx="98">
+                  <c:v>588.97772412387053</c:v>
+                </c:pt>
+                <c:pt idx="99">
+                  <c:v>569.82743660601841</c:v>
+                </c:pt>
+                <c:pt idx="100">
+                  <c:v>582.32377711629238</c:v>
+                </c:pt>
+                <c:pt idx="101">
+                  <c:v>603.18046635790074</c:v>
+                </c:pt>
+                <c:pt idx="102">
+                  <c:v>509.31243831342891</c:v>
+                </c:pt>
+                <c:pt idx="103">
+                  <c:v>552.64199092148738</c:v>
+                </c:pt>
+                <c:pt idx="104">
+                  <c:v>592.20874129199615</c:v>
+                </c:pt>
+                <c:pt idx="105">
+                  <c:v>594.07187858875704</c:v>
+                </c:pt>
+                <c:pt idx="106">
+                  <c:v>619.05452548925757</c:v>
+                </c:pt>
+                <c:pt idx="107">
+                  <c:v>513.36637823161198</c:v>
+                </c:pt>
+                <c:pt idx="108">
+                  <c:v>221.95180588541149</c:v>
+                </c:pt>
+                <c:pt idx="109">
+                  <c:v>563.82746385351663</c:v>
+                </c:pt>
+                <c:pt idx="110">
+                  <c:v>559.18880905332844</c:v>
+                </c:pt>
+                <c:pt idx="111">
+                  <c:v>550.73214621781199</c:v>
+                </c:pt>
+                <c:pt idx="112">
+                  <c:v>487.99926038876328</c:v>
+                </c:pt>
+                <c:pt idx="113">
+                  <c:v>574.11780989294527</c:v>
+                </c:pt>
+                <c:pt idx="114">
+                  <c:v>528.00690790583621</c:v>
+                </c:pt>
+                <c:pt idx="115">
+                  <c:v>597.46452793156971</c:v>
+                </c:pt>
+                <c:pt idx="116">
+                  <c:v>552.84923467633769</c:v>
+                </c:pt>
+                <c:pt idx="117">
+                  <c:v>594.48310557304603</c:v>
+                </c:pt>
+                <c:pt idx="118">
+                  <c:v>547.67724293601657</c:v>
+                </c:pt>
+                <c:pt idx="119">
+                  <c:v>417.49982036177562</c:v>
+                </c:pt>
+                <c:pt idx="120">
+                  <c:v>568.37960373296141</c:v>
+                </c:pt>
+                <c:pt idx="121">
+                  <c:v>584.61732406901933</c:v>
+                </c:pt>
+                <c:pt idx="122">
+                  <c:v>549.73702489573952</c:v>
+                </c:pt>
+                <c:pt idx="123">
+                  <c:v>620.67186392192059</c:v>
+                </c:pt>
+                <c:pt idx="124">
+                  <c:v>615.47019568255223</c:v>
+                </c:pt>
+                <c:pt idx="125">
+                  <c:v>597.58395511346805</c:v>
+                </c:pt>
+                <c:pt idx="126">
+                  <c:v>525.04552126954422</c:v>
+                </c:pt>
+                <c:pt idx="127">
+                  <c:v>622.47445795868759</c:v>
+                </c:pt>
+                <c:pt idx="128">
+                  <c:v>575.14869282842892</c:v>
+                </c:pt>
+                <c:pt idx="129">
+                  <c:v>530.88060390056057</c:v>
+                </c:pt>
+              </c:numCache>
+            </c:numRef>
+          </c:yVal>
+          <c:smooth val="0"/>
+          <c:extLst>
+            <c:ext xmlns:c16="http://schemas.microsoft.com/office/drawing/2014/chart" uri="{C3380CC4-5D6E-409C-BE32-E72D297353CC}">
+              <c16:uniqueId val="{00000000-E23E-4D92-BE6A-6459749ABCBE}"/>
+            </c:ext>
+          </c:extLst>
+        </c:ser>
+        <c:ser>
+          <c:idx val="1"/>
+          <c:order val="1"/>
+          <c:tx>
+            <c:strRef>
+              <c:f>Scatter_Volume_3!$I$1</c:f>
+              <c:strCache>
+                <c:ptCount val="1"/>
+                <c:pt idx="0">
+                  <c:v>scatter_energy_loss_keV</c:v>
+                </c:pt>
+              </c:strCache>
+            </c:strRef>
+          </c:tx>
+          <c:spPr>
+            <a:ln w="28575" cap="rnd">
+              <a:noFill/>
+              <a:round/>
+            </a:ln>
+            <a:effectLst/>
+          </c:spPr>
+          <c:marker>
+            <c:symbol val="circle"/>
+            <c:size val="5"/>
+            <c:spPr>
+              <a:solidFill>
+                <a:schemeClr val="accent2"/>
+              </a:solidFill>
+              <a:ln w="9525">
+                <a:solidFill>
+                  <a:schemeClr val="accent2"/>
+                </a:solidFill>
+              </a:ln>
+              <a:effectLst/>
+            </c:spPr>
+          </c:marker>
+          <c:xVal>
+            <c:numRef>
+              <c:f>Scatter_Volume_3!$G$2:$G$131</c:f>
+              <c:numCache>
+                <c:formatCode>General</c:formatCode>
+                <c:ptCount val="130"/>
+                <c:pt idx="0">
+                  <c:v>85.271925041978449</c:v>
+                </c:pt>
+                <c:pt idx="1">
+                  <c:v>40.113801646415872</c:v>
+                </c:pt>
+                <c:pt idx="2">
+                  <c:v>34.510091760395397</c:v>
+                </c:pt>
+                <c:pt idx="3">
+                  <c:v>29.73951499270169</c:v>
+                </c:pt>
+                <c:pt idx="4">
+                  <c:v>25.214725510142941</c:v>
+                </c:pt>
+                <c:pt idx="5">
+                  <c:v>23.038510252414898</c:v>
+                </c:pt>
+                <c:pt idx="6">
+                  <c:v>26.90230281151435</c:v>
+                </c:pt>
+                <c:pt idx="7">
+                  <c:v>25.704911755947698</c:v>
+                </c:pt>
+                <c:pt idx="8">
+                  <c:v>36.319635914666662</c:v>
+                </c:pt>
+                <c:pt idx="9">
+                  <c:v>34.589757190105878</c:v>
+                </c:pt>
+                <c:pt idx="10">
+                  <c:v>37.955047501562717</c:v>
+                </c:pt>
+                <c:pt idx="11">
+                  <c:v>20.803735999154121</c:v>
+                </c:pt>
+                <c:pt idx="12">
+                  <c:v>22.23281636437731</c:v>
+                </c:pt>
+                <c:pt idx="13">
+                  <c:v>19.76997252216254</c:v>
+                </c:pt>
+                <c:pt idx="14">
+                  <c:v>18.679865703706291</c:v>
+                </c:pt>
+                <c:pt idx="15">
+                  <c:v>22.1221353678024</c:v>
+                </c:pt>
+                <c:pt idx="16">
+                  <c:v>24.538279555362131</c:v>
+                </c:pt>
+                <c:pt idx="17">
+                  <c:v>38.19229930694997</c:v>
+                </c:pt>
+                <c:pt idx="18">
+                  <c:v>40.15061130973811</c:v>
+                </c:pt>
+                <c:pt idx="19">
+                  <c:v>26.657481623661329</c:v>
+                </c:pt>
+                <c:pt idx="20">
+                  <c:v>22.280227236310179</c:v>
+                </c:pt>
+                <c:pt idx="21">
+                  <c:v>32.774631231013018</c:v>
+                </c:pt>
+                <c:pt idx="22">
+                  <c:v>19.670277347808341</c:v>
+                </c:pt>
+                <c:pt idx="23">
+                  <c:v>27.686943852388641</c:v>
+                </c:pt>
+                <c:pt idx="24">
+                  <c:v>161.19653891102311</c:v>
+                </c:pt>
+                <c:pt idx="25">
+                  <c:v>18.135795108694172</c:v>
+                </c:pt>
+                <c:pt idx="26">
+                  <c:v>39.157344880337988</c:v>
+                </c:pt>
+                <c:pt idx="27">
+                  <c:v>27.063004459834509</c:v>
+                </c:pt>
+                <c:pt idx="28">
+                  <c:v>27.42341666809434</c:v>
+                </c:pt>
+                <c:pt idx="29">
+                  <c:v>33.005655181510953</c:v>
+                </c:pt>
+                <c:pt idx="30">
+                  <c:v>36.907180475570428</c:v>
+                </c:pt>
+                <c:pt idx="31">
+                  <c:v>29.778588370569281</c:v>
+                </c:pt>
+                <c:pt idx="32">
+                  <c:v>38.756064732300523</c:v>
+                </c:pt>
+                <c:pt idx="33">
+                  <c:v>36.445566699663921</c:v>
+                </c:pt>
+                <c:pt idx="34">
+                  <c:v>33.268451819972597</c:v>
+                </c:pt>
+                <c:pt idx="35">
+                  <c:v>37.656896824645642</c:v>
+                </c:pt>
+                <c:pt idx="36">
+                  <c:v>39.048238581033168</c:v>
+                </c:pt>
+                <c:pt idx="37">
+                  <c:v>27.483703168003021</c:v>
+                </c:pt>
+                <c:pt idx="38">
+                  <c:v>33.625002281693853</c:v>
+                </c:pt>
+                <c:pt idx="39">
+                  <c:v>35.444167918262359</c:v>
+                </c:pt>
+                <c:pt idx="40">
+                  <c:v>34.846434905788747</c:v>
+                </c:pt>
+                <c:pt idx="41">
+                  <c:v>28.519721175301392</c:v>
+                </c:pt>
+                <c:pt idx="42">
+                  <c:v>41.011444199575728</c:v>
+                </c:pt>
+                <c:pt idx="43">
+                  <c:v>33.596924940002069</c:v>
+                </c:pt>
+                <c:pt idx="44">
+                  <c:v>26.609302588432168</c:v>
+                </c:pt>
+                <c:pt idx="45">
+                  <c:v>30.12635164384508</c:v>
+                </c:pt>
+                <c:pt idx="46">
+                  <c:v>28.412048641459091</c:v>
+                </c:pt>
+                <c:pt idx="47">
+                  <c:v>21.368077109398619</c:v>
+                </c:pt>
+                <c:pt idx="48">
+                  <c:v>33.579930200495653</c:v>
+                </c:pt>
+                <c:pt idx="49">
+                  <c:v>25.846882605295601</c:v>
+                </c:pt>
+                <c:pt idx="50">
+                  <c:v>31.03675005453232</c:v>
+                </c:pt>
+                <c:pt idx="51">
+                  <c:v>40.345854075791912</c:v>
+                </c:pt>
+                <c:pt idx="52">
+                  <c:v>26.083067540464292</c:v>
+                </c:pt>
+                <c:pt idx="53">
+                  <c:v>23.595522705782312</c:v>
+                </c:pt>
+                <c:pt idx="54">
+                  <c:v>29.885499263251969</c:v>
+                </c:pt>
+                <c:pt idx="55">
+                  <c:v>34.272756438621897</c:v>
+                </c:pt>
+                <c:pt idx="56">
+                  <c:v>37.860553610543121</c:v>
+                </c:pt>
+                <c:pt idx="57">
+                  <c:v>25.39052981694326</c:v>
+                </c:pt>
+                <c:pt idx="58">
+                  <c:v>25.19329048282659</c:v>
+                </c:pt>
+                <c:pt idx="59">
+                  <c:v>31.13743914566858</c:v>
+                </c:pt>
+                <c:pt idx="60">
+                  <c:v>39.517471399918861</c:v>
+                </c:pt>
+                <c:pt idx="61">
+                  <c:v>28.172670302105541</c:v>
+                </c:pt>
+                <c:pt idx="62">
+                  <c:v>23.509253223739549</c:v>
+                </c:pt>
+                <c:pt idx="63">
+                  <c:v>39.590712229903559</c:v>
+                </c:pt>
+                <c:pt idx="64">
+                  <c:v>34.142328458577481</c:v>
+                </c:pt>
+                <c:pt idx="65">
+                  <c:v>27.63099444532633</c:v>
+                </c:pt>
+                <c:pt idx="66">
+                  <c:v>22.824480006289409</c:v>
+                </c:pt>
+                <c:pt idx="67">
+                  <c:v>39.527846148805217</c:v>
+                </c:pt>
+                <c:pt idx="68">
+                  <c:v>27.65838576169136</c:v>
+                </c:pt>
+                <c:pt idx="69">
+                  <c:v>26.115515152060588</c:v>
+                </c:pt>
+                <c:pt idx="70">
+                  <c:v>26.573229755810289</c:v>
+                </c:pt>
+                <c:pt idx="71">
+                  <c:v>21.498115585860909</c:v>
+                </c:pt>
+                <c:pt idx="72">
+                  <c:v>31.36297747542746</c:v>
+                </c:pt>
+                <c:pt idx="73">
+                  <c:v>32.325348693621883</c:v>
+                </c:pt>
+                <c:pt idx="74">
+                  <c:v>25.50591503832953</c:v>
+                </c:pt>
+                <c:pt idx="75">
+                  <c:v>33.449794901117329</c:v>
+                </c:pt>
+                <c:pt idx="76">
+                  <c:v>26.97537140940435</c:v>
+                </c:pt>
+                <c:pt idx="77">
+                  <c:v>31.45824518663073</c:v>
+                </c:pt>
+                <c:pt idx="78">
+                  <c:v>127.26176888017839</c:v>
+                </c:pt>
+                <c:pt idx="79">
+                  <c:v>29.960227664197419</c:v>
+                </c:pt>
+                <c:pt idx="80">
+                  <c:v>25.804201405217899</c:v>
+                </c:pt>
+                <c:pt idx="81">
+                  <c:v>29.532357193363751</c:v>
+                </c:pt>
+                <c:pt idx="82">
+                  <c:v>37.877317563658828</c:v>
+                </c:pt>
+                <c:pt idx="83">
+                  <c:v>20.288802203686359</c:v>
+                </c:pt>
+                <c:pt idx="84">
+                  <c:v>21.69602997307209</c:v>
+                </c:pt>
+                <c:pt idx="85">
+                  <c:v>32.193966412460803</c:v>
+                </c:pt>
+                <c:pt idx="86">
+                  <c:v>24.485470718059581</c:v>
+                </c:pt>
+                <c:pt idx="87">
+                  <c:v>19.54220962985837</c:v>
+                </c:pt>
+                <c:pt idx="88">
+                  <c:v>40.621998030946372</c:v>
+                </c:pt>
+                <c:pt idx="89">
+                  <c:v>23.04429730110758</c:v>
+                </c:pt>
+                <c:pt idx="90">
+                  <c:v>33.826255036635558</c:v>
+                </c:pt>
+                <c:pt idx="91">
+                  <c:v>26.98949102355423</c:v>
+                </c:pt>
+                <c:pt idx="92">
+                  <c:v>28.95189597293092</c:v>
+                </c:pt>
+                <c:pt idx="93">
+                  <c:v>31.627043775729181</c:v>
+                </c:pt>
+                <c:pt idx="94">
+                  <c:v>24.718886694821709</c:v>
+                </c:pt>
+                <c:pt idx="95">
+                  <c:v>32.143638268890612</c:v>
+                </c:pt>
+                <c:pt idx="96">
+                  <c:v>31.900581479560529</c:v>
+                </c:pt>
+                <c:pt idx="97">
+                  <c:v>24.230919688461238</c:v>
+                </c:pt>
+                <c:pt idx="98">
+                  <c:v>25.271024233694561</c:v>
+                </c:pt>
+                <c:pt idx="99">
+                  <c:v>28.938347705634332</c:v>
+                </c:pt>
+                <c:pt idx="100">
+                  <c:v>26.570474610181542</c:v>
+                </c:pt>
+                <c:pt idx="101">
+                  <c:v>22.372698617138351</c:v>
+                </c:pt>
+                <c:pt idx="102">
+                  <c:v>39.772523313064333</c:v>
+                </c:pt>
+                <c:pt idx="103">
+                  <c:v>32.085712845885261</c:v>
+                </c:pt>
+                <c:pt idx="104">
+                  <c:v>24.62806519368872</c:v>
+                </c:pt>
+                <c:pt idx="105">
+                  <c:v>24.25332070650153</c:v>
+                </c:pt>
+                <c:pt idx="106">
+                  <c:v>18.83519776676382</c:v>
+                </c:pt>
+                <c:pt idx="107">
+                  <c:v>39.057561447114992</c:v>
+                </c:pt>
+                <c:pt idx="108">
+                  <c:v>122.03214876758661</c:v>
+                </c:pt>
+                <c:pt idx="109">
+                  <c:v>30.048941980505251</c:v>
+                </c:pt>
+                <c:pt idx="110">
+                  <c:v>30.898326844651471</c:v>
+                </c:pt>
+                <c:pt idx="111">
+                  <c:v>32.429932298872878</c:v>
+                </c:pt>
+                <c:pt idx="112">
+                  <c:v>43.550184316118951</c:v>
+                </c:pt>
+                <c:pt idx="113">
+                  <c:v>28.13458983622041</c:v>
+                </c:pt>
+                <c:pt idx="114">
+                  <c:v>36.475284509600911</c:v>
+                </c:pt>
+                <c:pt idx="115">
+                  <c:v>23.562781122051881</c:v>
+                </c:pt>
+                <c:pt idx="116">
+                  <c:v>32.048305923728442</c:v>
+                </c:pt>
+                <c:pt idx="117">
+                  <c:v>24.170193118832621</c:v>
+                </c:pt>
+                <c:pt idx="118">
+                  <c:v>32.978762861378961</c:v>
+                </c:pt>
+                <c:pt idx="119">
+                  <c:v>56.773398189593067</c:v>
+                </c:pt>
+                <c:pt idx="120">
+                  <c:v>29.207694211572331</c:v>
+                </c:pt>
+                <c:pt idx="121">
+                  <c:v>26.126045757779419</c:v>
+                </c:pt>
+                <c:pt idx="122">
+                  <c:v>32.608941642894692</c:v>
+                </c:pt>
+                <c:pt idx="123">
+                  <c:v>18.449662959810151</c:v>
+                </c:pt>
+                <c:pt idx="124">
+                  <c:v>19.670512035485238</c:v>
+                </c:pt>
+                <c:pt idx="125">
+                  <c:v>23.538270443896149</c:v>
+                </c:pt>
+                <c:pt idx="126">
+                  <c:v>36.998162786984473</c:v>
+                </c:pt>
+                <c:pt idx="127">
+                  <c:v>18.01303108739264</c:v>
+                </c:pt>
+                <c:pt idx="128">
+                  <c:v>27.94013016601756</c:v>
+                </c:pt>
+                <c:pt idx="129">
+                  <c:v>35.967323676734203</c:v>
+                </c:pt>
+              </c:numCache>
+            </c:numRef>
+          </c:xVal>
+          <c:yVal>
+            <c:numRef>
+              <c:f>Scatter_Volume_3!$I$2:$I$131</c:f>
+              <c:numCache>
+                <c:formatCode>General</c:formatCode>
+                <c:ptCount val="130"/>
+                <c:pt idx="0">
+                  <c:v>359.53979024673191</c:v>
+                </c:pt>
+                <c:pt idx="1">
+                  <c:v>491.96384939543958</c:v>
+                </c:pt>
+                <c:pt idx="2">
+                  <c:v>122.90068059306471</c:v>
+                </c:pt>
+                <c:pt idx="3">
+                  <c:v>96.493045359131997</c:v>
+                </c:pt>
+                <c:pt idx="4">
+                  <c:v>72.737673864643853</c:v>
+                </c:pt>
+                <c:pt idx="5">
+                  <c:v>61.996339083703333</c:v>
+                </c:pt>
+                <c:pt idx="6">
+                  <c:v>81.400131718235684</c:v>
+                </c:pt>
+                <c:pt idx="7">
+                  <c:v>75.226197742441286</c:v>
+                </c:pt>
+                <c:pt idx="8">
+                  <c:v>133.11216310823829</c:v>
+                </c:pt>
+                <c:pt idx="9">
+                  <c:v>123.3487876737836</c:v>
+                </c:pt>
+                <c:pt idx="10">
+                  <c:v>142.3796197013958</c:v>
+                </c:pt>
+                <c:pt idx="11">
+                  <c:v>51.559880004690292</c:v>
+                </c:pt>
+                <c:pt idx="12">
+                  <c:v>58.159140985727959</c:v>
+                </c:pt>
+                <c:pt idx="13">
+                  <c:v>46.963711277747962</c:v>
+                </c:pt>
+                <c:pt idx="14">
+                  <c:v>42.290985394646214</c:v>
+                </c:pt>
+                <c:pt idx="15">
+                  <c:v>57.638378127224307</c:v>
+                </c:pt>
+                <c:pt idx="16">
+                  <c:v>69.343494101270153</c:v>
+                </c:pt>
+                <c:pt idx="17">
+                  <c:v>143.7253825101881</c:v>
+                </c:pt>
+                <c:pt idx="18">
+                  <c:v>154.8299955450191</c:v>
+                </c:pt>
+                <c:pt idx="19">
+                  <c:v>80.127309600167905</c:v>
+                </c:pt>
+                <c:pt idx="20">
+                  <c:v>58.382692025320921</c:v>
+                </c:pt>
+                <c:pt idx="21">
+                  <c:v>113.1851712199657</c:v>
+                </c:pt>
+                <c:pt idx="22">
+                  <c:v>46.528782230479457</c:v>
+                </c:pt>
+                <c:pt idx="23">
+                  <c:v>85.513457744017842</c:v>
+                </c:pt>
+                <c:pt idx="24">
+                  <c:v>474.0312690748566</c:v>
+                </c:pt>
+                <c:pt idx="25">
+                  <c:v>40.029198525290212</c:v>
+                </c:pt>
+                <c:pt idx="26">
+                  <c:v>149.1995577062186</c:v>
+                </c:pt>
+                <c:pt idx="27">
+                  <c:v>82.238418400983846</c:v>
+                </c:pt>
+                <c:pt idx="28">
+                  <c:v>84.126342231771332</c:v>
+                </c:pt>
+                <c:pt idx="29">
+                  <c:v>114.47273726160699</c:v>
+                </c:pt>
+                <c:pt idx="30">
+                  <c:v>136.43898788114171</c:v>
+                </c:pt>
+                <c:pt idx="31">
+                  <c:v>96.704804815367538</c:v>
+                </c:pt>
+                <c:pt idx="32">
+                  <c:v>146.9234617214787</c:v>
+                </c:pt>
+                <c:pt idx="33">
+                  <c:v>133.82487363176071</c:v>
+                </c:pt>
+                <c:pt idx="34">
+                  <c:v>115.93972816067379</c:v>
+                </c:pt>
+                <c:pt idx="35">
+                  <c:v>140.68867653494169</c:v>
+                </c:pt>
+                <c:pt idx="36">
+                  <c:v>148.58074402483609</c:v>
+                </c:pt>
+                <c:pt idx="37">
+                  <c:v>84.443177694930341</c:v>
+                </c:pt>
+                <c:pt idx="38">
+                  <c:v>115.0647753805748</c:v>
+                </c:pt>
+                <c:pt idx="39">
+                  <c:v>128.16394490529879</c:v>
+                </c:pt>
+                <c:pt idx="40">
+                  <c:v>124.7936204588441</c:v>
+                </c:pt>
+                <c:pt idx="41">
+                  <c:v>89.932196314746875</c:v>
+                </c:pt>
+                <c:pt idx="42">
+                  <c:v>159.7024665801062</c:v>
+                </c:pt>
+                <c:pt idx="43">
+                  <c:v>117.77665579012979</c:v>
+                </c:pt>
+                <c:pt idx="44">
+                  <c:v>79.877443482593662</c:v>
+                </c:pt>
+                <c:pt idx="45">
+                  <c:v>98.593591519873257</c:v>
+                </c:pt>
+                <c:pt idx="46">
+                  <c:v>89.357975025821361</c:v>
+                </c:pt>
+                <c:pt idx="47">
+                  <c:v>54.133062682945713</c:v>
+                </c:pt>
+                <c:pt idx="48">
+                  <c:v>117.6815290506142</c:v>
+                </c:pt>
+                <c:pt idx="49">
+                  <c:v>75.951305703917456</c:v>
+                </c:pt>
+                <c:pt idx="50">
+                  <c:v>103.5708563022303</c:v>
+                </c:pt>
+                <c:pt idx="51">
+                  <c:v>155.93583305657339</c:v>
+                </c:pt>
+                <c:pt idx="52">
+                  <c:v>77.161836666098679</c:v>
+                </c:pt>
+                <c:pt idx="53">
+                  <c:v>64.695112231353278</c:v>
+                </c:pt>
+                <c:pt idx="54">
+                  <c:v>97.284689460453137</c:v>
+                </c:pt>
+                <c:pt idx="55">
+                  <c:v>121.56667238993781</c:v>
+                </c:pt>
+                <c:pt idx="56">
+                  <c:v>141.84366616817641</c:v>
+                </c:pt>
+                <c:pt idx="57">
+                  <c:v>73.627451823247497</c:v>
+                </c:pt>
+                <c:pt idx="58">
+                  <c:v>72.629398995597398</c:v>
+                </c:pt>
+                <c:pt idx="59">
+                  <c:v>104.1240555960437</c:v>
+                </c:pt>
+                <c:pt idx="60">
+                  <c:v>151.24170350864549</c:v>
+                </c:pt>
+                <c:pt idx="61">
+                  <c:v>88.084399356779841</c:v>
+                </c:pt>
+                <c:pt idx="62">
+                  <c:v>64.274749689168175</c:v>
+                </c:pt>
+                <c:pt idx="63">
+                  <c:v>151.65694017169099</c:v>
+                </c:pt>
+                <c:pt idx="64">
+                  <c:v>120.8342099130297</c:v>
+                </c:pt>
+                <c:pt idx="65">
+                  <c:v>85.218495880972569</c:v>
+                </c:pt>
+                <c:pt idx="66">
+                  <c:v>60.969184967158867</c:v>
+                </c:pt>
+                <c:pt idx="67">
+                  <c:v>151.30052480881409</c:v>
+                </c:pt>
+                <c:pt idx="68">
+                  <c:v>85.362870267034737</c:v>
+                </c:pt>
+                <c:pt idx="69">
+                  <c:v>77.328549633285661</c:v>
+                </c:pt>
+                <c:pt idx="70">
+                  <c:v>79.690496645288931</c:v>
+                </c:pt>
+                <c:pt idx="71">
+                  <c:v>54.732168855152963</c:v>
+                </c:pt>
+                <c:pt idx="72">
+                  <c:v>105.3650384231122</c:v>
+                </c:pt>
+                <c:pt idx="73">
+                  <c:v>110.6870668965873</c:v>
+                </c:pt>
+                <c:pt idx="74">
+                  <c:v>74.213104828903397</c:v>
+                </c:pt>
+                <c:pt idx="75">
+                  <c:v>116.95341608595329</c:v>
+                </c:pt>
+                <c:pt idx="76">
+                  <c:v>81.781015682715974</c:v>
+                </c:pt>
+                <c:pt idx="77">
+                  <c:v>105.8899809644748</c:v>
+                </c:pt>
+                <c:pt idx="78">
+                  <c:v>447.05607415403341</c:v>
+                </c:pt>
+                <c:pt idx="79">
+                  <c:v>542.96853743158306</c:v>
+                </c:pt>
+                <c:pt idx="80">
+                  <c:v>75.73311147532047</c:v>
+                </c:pt>
+                <c:pt idx="81">
+                  <c:v>95.371932166452098</c:v>
+                </c:pt>
+                <c:pt idx="82">
+                  <c:v>141.93874626939501</c:v>
+                </c:pt>
+                <c:pt idx="83">
+                  <c:v>49.251033009103367</c:v>
+                </c:pt>
+                <c:pt idx="84">
+                  <c:v>55.648343204005073</c:v>
+                </c:pt>
+                <c:pt idx="85">
+                  <c:v>109.95809975499419</c:v>
+                </c:pt>
+                <c:pt idx="86">
+                  <c:v>69.080535630342638</c:v>
+                </c:pt>
+                <c:pt idx="87">
+                  <c:v>45.97227900316193</c:v>
+                </c:pt>
+                <c:pt idx="88">
+                  <c:v>157.49920271680159</c:v>
+                </c:pt>
+                <c:pt idx="89">
+                  <c:v>62.0241886727664</c:v>
+                </c:pt>
+                <c:pt idx="90">
+                  <c:v>119.0612002173642</c:v>
+                </c:pt>
+                <c:pt idx="91">
+                  <c:v>81.854669331051923</c:v>
+                </c:pt>
+                <c:pt idx="92">
+                  <c:v>92.245273100976533</c:v>
+                </c:pt>
+                <c:pt idx="93">
+                  <c:v>106.82115705569571</c:v>
+                </c:pt>
+                <c:pt idx="94">
+                  <c:v>70.24505767729454</c:v>
+                </c:pt>
+                <c:pt idx="95">
+                  <c:v>109.6790494545609</c:v>
+                </c:pt>
+                <c:pt idx="96">
+                  <c:v>108.33293239877931</c:v>
+                </c:pt>
+                <c:pt idx="97">
+                  <c:v>67.817230432107863</c:v>
+                </c:pt>
+                <c:pt idx="98">
+                  <c:v>73.02227587612947</c:v>
+                </c:pt>
+                <c:pt idx="99">
+                  <c:v>92.172563393981591</c:v>
+                </c:pt>
+                <c:pt idx="100">
+                  <c:v>79.676222883707624</c:v>
+                </c:pt>
+                <c:pt idx="101">
+                  <c:v>58.819533642099259</c:v>
+                </c:pt>
+                <c:pt idx="102">
+                  <c:v>152.68756168657109</c:v>
+                </c:pt>
+                <c:pt idx="103">
+                  <c:v>109.35800907851259</c:v>
+                </c:pt>
+                <c:pt idx="104">
+                  <c:v>69.791258708003852</c:v>
+                </c:pt>
+                <c:pt idx="105">
+                  <c:v>67.928121411242955</c:v>
+                </c:pt>
+                <c:pt idx="106">
+                  <c:v>42.945474510742429</c:v>
+                </c:pt>
+                <c:pt idx="107">
+                  <c:v>148.633621768388</c:v>
+                </c:pt>
+                <c:pt idx="108">
+                  <c:v>440.04819411458851</c:v>
+                </c:pt>
+                <c:pt idx="109">
+                  <c:v>98.172536146483367</c:v>
+                </c:pt>
+                <c:pt idx="110">
+                  <c:v>102.8111909466716</c:v>
+                </c:pt>
+                <c:pt idx="111">
+                  <c:v>111.267853782188</c:v>
+                </c:pt>
+                <c:pt idx="112">
+                  <c:v>174.0007396112367</c:v>
+                </c:pt>
+                <c:pt idx="113">
+                  <c:v>87.882190107054726</c:v>
+                </c:pt>
+                <c:pt idx="114">
+                  <c:v>133.99309209416381</c:v>
+                </c:pt>
+                <c:pt idx="115">
+                  <c:v>64.535472068430295</c:v>
+                </c:pt>
+                <c:pt idx="116">
+                  <c:v>109.1507653236623</c:v>
+                </c:pt>
+                <c:pt idx="117">
+                  <c:v>67.516894426953968</c:v>
+                </c:pt>
+                <c:pt idx="118">
+                  <c:v>114.3227570639834</c:v>
+                </c:pt>
+                <c:pt idx="119">
+                  <c:v>244.50017963822441</c:v>
+                </c:pt>
+                <c:pt idx="120">
+                  <c:v>93.620396267038586</c:v>
+                </c:pt>
+                <c:pt idx="121">
+                  <c:v>77.382675930980668</c:v>
+                </c:pt>
+                <c:pt idx="122">
+                  <c:v>112.26297510426051</c:v>
+                </c:pt>
+                <c:pt idx="123">
+                  <c:v>41.32813607807941</c:v>
+                </c:pt>
+                <c:pt idx="124">
+                  <c:v>46.52980431744777</c:v>
+                </c:pt>
+                <c:pt idx="125">
+                  <c:v>64.416044886531949</c:v>
+                </c:pt>
+                <c:pt idx="126">
+                  <c:v>136.9544787304558</c:v>
+                </c:pt>
+                <c:pt idx="127">
+                  <c:v>39.525542041312413</c:v>
+                </c:pt>
+                <c:pt idx="128">
+                  <c:v>86.851307171571079</c:v>
+                </c:pt>
+                <c:pt idx="129">
+                  <c:v>131.1193960994394</c:v>
+                </c:pt>
+              </c:numCache>
+            </c:numRef>
+          </c:yVal>
+          <c:smooth val="0"/>
+          <c:extLst>
+            <c:ext xmlns:c16="http://schemas.microsoft.com/office/drawing/2014/chart" uri="{C3380CC4-5D6E-409C-BE32-E72D297353CC}">
+              <c16:uniqueId val="{00000001-E23E-4D92-BE6A-6459749ABCBE}"/>
+            </c:ext>
+          </c:extLst>
+        </c:ser>
+        <c:dLbls>
+          <c:showLegendKey val="0"/>
+          <c:showVal val="0"/>
+          <c:showCatName val="0"/>
+          <c:showSerName val="0"/>
+          <c:showPercent val="0"/>
+          <c:showBubbleSize val="0"/>
+        </c:dLbls>
+        <c:axId val="1412049136"/>
+        <c:axId val="1327349840"/>
+      </c:scatterChart>
+      <c:valAx>
+        <c:axId val="1412049136"/>
+        <c:scaling>
+          <c:orientation val="minMax"/>
+        </c:scaling>
+        <c:delete val="0"/>
+        <c:axPos val="b"/>
+        <c:majorGridlines>
+          <c:spPr>
+            <a:ln w="9525" cap="flat" cmpd="sng" algn="ctr">
+              <a:solidFill>
+                <a:schemeClr val="tx1">
+                  <a:lumMod val="15000"/>
+                  <a:lumOff val="85000"/>
+                </a:schemeClr>
+              </a:solidFill>
+              <a:round/>
+            </a:ln>
+            <a:effectLst/>
+          </c:spPr>
+        </c:majorGridlines>
+        <c:title>
+          <c:tx>
+            <c:rich>
+              <a:bodyPr rot="0" spcFirstLastPara="1" vertOverflow="ellipsis" vert="horz" wrap="square" anchor="ctr" anchorCtr="1"/>
+              <a:lstStyle/>
+              <a:p>
+                <a:pPr>
+                  <a:defRPr sz="1000" b="0" i="0" u="none" strike="noStrike" kern="1200" baseline="0">
+                    <a:solidFill>
+                      <a:schemeClr val="tx1">
+                        <a:lumMod val="65000"/>
+                        <a:lumOff val="35000"/>
+                      </a:schemeClr>
+                    </a:solidFill>
+                    <a:latin typeface="+mn-lt"/>
+                    <a:ea typeface="+mn-ea"/>
+                    <a:cs typeface="+mn-cs"/>
+                  </a:defRPr>
+                </a:pPr>
+                <a:r>
+                  <a:rPr lang="en-US"/>
+                  <a:t>Compton</a:t>
+                </a:r>
+                <a:r>
+                  <a:rPr lang="en-US" baseline="0"/>
+                  <a:t> Angle (</a:t>
+                </a:r>
+                <a:r>
+                  <a:rPr lang="en-US" sz="1000" b="0" i="0" u="none" strike="noStrike" baseline="0"/>
+                  <a:t>θ)</a:t>
+                </a:r>
+                <a:r>
+                  <a:rPr lang="en-US" baseline="0"/>
+                  <a:t> </a:t>
+                </a:r>
+                <a:endParaRPr lang="en-US"/>
+              </a:p>
+            </c:rich>
+          </c:tx>
+          <c:overlay val="0"/>
+          <c:spPr>
+            <a:noFill/>
+            <a:ln>
+              <a:noFill/>
+            </a:ln>
+            <a:effectLst/>
+          </c:spPr>
+          <c:txPr>
+            <a:bodyPr rot="0" spcFirstLastPara="1" vertOverflow="ellipsis" vert="horz" wrap="square" anchor="ctr" anchorCtr="1"/>
+            <a:lstStyle/>
+            <a:p>
+              <a:pPr>
+                <a:defRPr sz="1000" b="0" i="0" u="none" strike="noStrike" kern="1200" baseline="0">
+                  <a:solidFill>
+                    <a:schemeClr val="tx1">
+                      <a:lumMod val="65000"/>
+                      <a:lumOff val="35000"/>
+                    </a:schemeClr>
+                  </a:solidFill>
+                  <a:latin typeface="+mn-lt"/>
+                  <a:ea typeface="+mn-ea"/>
+                  <a:cs typeface="+mn-cs"/>
+                </a:defRPr>
+              </a:pPr>
+              <a:endParaRPr lang="en-US"/>
+            </a:p>
+          </c:txPr>
+        </c:title>
+        <c:numFmt formatCode="General" sourceLinked="1"/>
+        <c:majorTickMark val="none"/>
+        <c:minorTickMark val="none"/>
+        <c:tickLblPos val="nextTo"/>
+        <c:spPr>
+          <a:noFill/>
+          <a:ln w="9525" cap="flat" cmpd="sng" algn="ctr">
+            <a:solidFill>
+              <a:schemeClr val="tx1">
+                <a:lumMod val="25000"/>
+                <a:lumOff val="75000"/>
+              </a:schemeClr>
+            </a:solidFill>
+            <a:round/>
+          </a:ln>
+          <a:effectLst/>
+        </c:spPr>
+        <c:txPr>
+          <a:bodyPr rot="-60000000" spcFirstLastPara="1" vertOverflow="ellipsis" vert="horz" wrap="square" anchor="ctr" anchorCtr="1"/>
+          <a:lstStyle/>
+          <a:p>
+            <a:pPr>
+              <a:defRPr sz="900" b="0" i="0" u="none" strike="noStrike" kern="1200" baseline="0">
+                <a:solidFill>
+                  <a:schemeClr val="tx1">
+                    <a:lumMod val="65000"/>
+                    <a:lumOff val="35000"/>
+                  </a:schemeClr>
+                </a:solidFill>
+                <a:latin typeface="+mn-lt"/>
+                <a:ea typeface="+mn-ea"/>
+                <a:cs typeface="+mn-cs"/>
+              </a:defRPr>
+            </a:pPr>
+            <a:endParaRPr lang="en-US"/>
+          </a:p>
+        </c:txPr>
+        <c:crossAx val="1327349840"/>
+        <c:crosses val="autoZero"/>
+        <c:crossBetween val="midCat"/>
+      </c:valAx>
+      <c:valAx>
+        <c:axId val="1327349840"/>
+        <c:scaling>
+          <c:orientation val="minMax"/>
+        </c:scaling>
+        <c:delete val="0"/>
+        <c:axPos val="l"/>
+        <c:majorGridlines>
+          <c:spPr>
+            <a:ln w="9525" cap="flat" cmpd="sng" algn="ctr">
+              <a:solidFill>
+                <a:schemeClr val="tx1">
+                  <a:lumMod val="15000"/>
+                  <a:lumOff val="85000"/>
+                </a:schemeClr>
+              </a:solidFill>
+              <a:round/>
+            </a:ln>
+            <a:effectLst/>
+          </c:spPr>
+        </c:majorGridlines>
+        <c:title>
+          <c:tx>
+            <c:rich>
+              <a:bodyPr rot="-5400000" spcFirstLastPara="1" vertOverflow="ellipsis" vert="horz" wrap="square" anchor="ctr" anchorCtr="1"/>
+              <a:lstStyle/>
+              <a:p>
+                <a:pPr>
+                  <a:defRPr sz="1000" b="0" i="0" u="none" strike="noStrike" kern="1200" baseline="0">
+                    <a:solidFill>
+                      <a:schemeClr val="tx1">
+                        <a:lumMod val="65000"/>
+                        <a:lumOff val="35000"/>
+                      </a:schemeClr>
+                    </a:solidFill>
+                    <a:latin typeface="+mn-lt"/>
+                    <a:ea typeface="+mn-ea"/>
+                    <a:cs typeface="+mn-cs"/>
+                  </a:defRPr>
+                </a:pPr>
+                <a:r>
+                  <a:rPr lang="en-US"/>
+                  <a:t>E' (keV)</a:t>
+                </a:r>
+              </a:p>
+            </c:rich>
+          </c:tx>
+          <c:overlay val="0"/>
+          <c:spPr>
+            <a:noFill/>
+            <a:ln>
+              <a:noFill/>
+            </a:ln>
+            <a:effectLst/>
+          </c:spPr>
+          <c:txPr>
+            <a:bodyPr rot="-5400000" spcFirstLastPara="1" vertOverflow="ellipsis" vert="horz" wrap="square" anchor="ctr" anchorCtr="1"/>
+            <a:lstStyle/>
+            <a:p>
+              <a:pPr>
+                <a:defRPr sz="1000" b="0" i="0" u="none" strike="noStrike" kern="1200" baseline="0">
+                  <a:solidFill>
+                    <a:schemeClr val="tx1">
+                      <a:lumMod val="65000"/>
+                      <a:lumOff val="35000"/>
+                    </a:schemeClr>
+                  </a:solidFill>
+                  <a:latin typeface="+mn-lt"/>
+                  <a:ea typeface="+mn-ea"/>
+                  <a:cs typeface="+mn-cs"/>
+                </a:defRPr>
+              </a:pPr>
+              <a:endParaRPr lang="en-US"/>
+            </a:p>
+          </c:txPr>
+        </c:title>
+        <c:numFmt formatCode="General" sourceLinked="1"/>
+        <c:majorTickMark val="none"/>
+        <c:minorTickMark val="none"/>
+        <c:tickLblPos val="nextTo"/>
+        <c:spPr>
+          <a:noFill/>
+          <a:ln w="9525" cap="flat" cmpd="sng" algn="ctr">
+            <a:solidFill>
+              <a:schemeClr val="tx1">
+                <a:lumMod val="25000"/>
+                <a:lumOff val="75000"/>
+              </a:schemeClr>
+            </a:solidFill>
+            <a:round/>
+          </a:ln>
+          <a:effectLst/>
+        </c:spPr>
+        <c:txPr>
+          <a:bodyPr rot="-60000000" spcFirstLastPara="1" vertOverflow="ellipsis" vert="horz" wrap="square" anchor="ctr" anchorCtr="1"/>
+          <a:lstStyle/>
+          <a:p>
+            <a:pPr>
+              <a:defRPr sz="900" b="0" i="0" u="none" strike="noStrike" kern="1200" baseline="0">
+                <a:solidFill>
+                  <a:schemeClr val="tx1">
+                    <a:lumMod val="65000"/>
+                    <a:lumOff val="35000"/>
+                  </a:schemeClr>
+                </a:solidFill>
+                <a:latin typeface="+mn-lt"/>
+                <a:ea typeface="+mn-ea"/>
+                <a:cs typeface="+mn-cs"/>
+              </a:defRPr>
+            </a:pPr>
+            <a:endParaRPr lang="en-US"/>
+          </a:p>
+        </c:txPr>
+        <c:crossAx val="1412049136"/>
+        <c:crosses val="autoZero"/>
+        <c:crossBetween val="midCat"/>
+      </c:valAx>
+      <c:spPr>
+        <a:noFill/>
+        <a:ln>
+          <a:noFill/>
+        </a:ln>
+        <a:effectLst/>
+      </c:spPr>
+    </c:plotArea>
+    <c:legend>
+      <c:legendPos val="b"/>
+      <c:layout>
+        <c:manualLayout>
+          <c:xMode val="edge"/>
+          <c:yMode val="edge"/>
+          <c:x val="0.32526640419947506"/>
+          <c:y val="0.20891149023038783"/>
+          <c:w val="0.54391163604549431"/>
+          <c:h val="7.8125546806649182E-2"/>
+        </c:manualLayout>
+      </c:layout>
+      <c:overlay val="0"/>
+      <c:spPr>
+        <a:noFill/>
+        <a:ln>
+          <a:noFill/>
+        </a:ln>
+        <a:effectLst/>
+      </c:spPr>
+      <c:txPr>
+        <a:bodyPr rot="0" spcFirstLastPara="1" vertOverflow="ellipsis" vert="horz" wrap="square" anchor="ctr" anchorCtr="1"/>
+        <a:lstStyle/>
+        <a:p>
+          <a:pPr>
+            <a:defRPr sz="900" b="0" i="0" u="none" strike="noStrike" kern="1200" baseline="0">
+              <a:solidFill>
+                <a:schemeClr val="tx1">
+                  <a:lumMod val="65000"/>
+                  <a:lumOff val="35000"/>
+                </a:schemeClr>
+              </a:solidFill>
+              <a:latin typeface="+mn-lt"/>
+              <a:ea typeface="+mn-ea"/>
+              <a:cs typeface="+mn-cs"/>
+            </a:defRPr>
+          </a:pPr>
+          <a:endParaRPr lang="en-US"/>
+        </a:p>
+      </c:txPr>
+    </c:legend>
+    <c:plotVisOnly val="1"/>
+    <c:dispBlanksAs val="gap"/>
+    <c:showDLblsOverMax val="0"/>
+    <c:extLst>
+      <c:ext xmlns:c16r3="http://schemas.microsoft.com/office/drawing/2017/03/chart" uri="{56B9EC1D-385E-4148-901F-78D8002777C0}">
+        <c16r3:dataDisplayOptions16>
+          <c16r3:dispNaAsBlank val="1"/>
+        </c16r3:dataDisplayOptions16>
+      </c:ext>
+    </c:extLst>
+  </c:chart>
+  <c:spPr>
+    <a:noFill/>
+    <a:ln>
+      <a:noFill/>
+    </a:ln>
+    <a:effectLst/>
+  </c:spPr>
+  <c:txPr>
+    <a:bodyPr/>
+    <a:lstStyle/>
+    <a:p>
+      <a:pPr>
+        <a:defRPr/>
+      </a:pPr>
+      <a:endParaRPr lang="en-US"/>
+    </a:p>
+  </c:txPr>
+  <c:externalData r:id="rId3">
+    <c:autoUpdate val="0"/>
+  </c:externalData>
+</c:chartSpace>
+</file>
+
+<file path=ppt/charts/chart2.xml><?xml version="1.0" encoding="utf-8"?>
+<c:chartSpace xmlns:c="http://schemas.openxmlformats.org/drawingml/2006/chart" xmlns:a="http://schemas.openxmlformats.org/drawingml/2006/main" xmlns:r="http://schemas.openxmlformats.org/officeDocument/2006/relationships" xmlns:c16r2="http://schemas.microsoft.com/office/drawing/2015/06/chart">
+  <c:date1904 val="0"/>
+  <c:lang val="en-US"/>
+  <c:roundedCorners val="0"/>
+  <mc:AlternateContent xmlns:mc="http://schemas.openxmlformats.org/markup-compatibility/2006">
+    <mc:Choice xmlns:c14="http://schemas.microsoft.com/office/drawing/2007/8/2/chart" Requires="c14">
+      <c14:style val="102"/>
+    </mc:Choice>
+    <mc:Fallback>
+      <c:style val="2"/>
+    </mc:Fallback>
+  </mc:AlternateContent>
+  <c:chart>
+    <c:autoTitleDeleted val="1"/>
+    <c:plotArea>
+      <c:layout>
+        <c:manualLayout>
+          <c:layoutTarget val="inner"/>
+          <c:xMode val="edge"/>
+          <c:yMode val="edge"/>
+          <c:x val="0.12981714785651793"/>
+          <c:y val="0.16203703703703703"/>
+          <c:w val="0.81229396325459313"/>
+          <c:h val="0.63759988334791484"/>
+        </c:manualLayout>
+      </c:layout>
+      <c:scatterChart>
+        <c:scatterStyle val="lineMarker"/>
+        <c:varyColors val="0"/>
+        <c:ser>
+          <c:idx val="0"/>
+          <c:order val="0"/>
+          <c:tx>
+            <c:strRef>
+              <c:f>Scatter_Volume_3!$X$1</c:f>
+              <c:strCache>
+                <c:ptCount val="1"/>
+                <c:pt idx="0">
+                  <c:v>detector_k_keV</c:v>
+                </c:pt>
+              </c:strCache>
+            </c:strRef>
+          </c:tx>
+          <c:spPr>
+            <a:ln w="28575" cap="rnd">
+              <a:noFill/>
+              <a:round/>
+            </a:ln>
+            <a:effectLst/>
+          </c:spPr>
+          <c:marker>
+            <c:symbol val="circle"/>
+            <c:size val="5"/>
+            <c:spPr>
+              <a:solidFill>
+                <a:schemeClr val="accent1"/>
+              </a:solidFill>
+              <a:ln w="9525">
+                <a:solidFill>
+                  <a:schemeClr val="accent1"/>
+                </a:solidFill>
+              </a:ln>
+              <a:effectLst/>
+            </c:spPr>
+          </c:marker>
+          <c:xVal>
+            <c:numRef>
+              <c:f>Scatter_Volume_3!$R$2:$R$131</c:f>
+              <c:numCache>
+                <c:formatCode>General</c:formatCode>
+                <c:ptCount val="130"/>
+                <c:pt idx="0">
+                  <c:v>85.271925041978449</c:v>
+                </c:pt>
+                <c:pt idx="1">
+                  <c:v>40.113801646415872</c:v>
+                </c:pt>
+                <c:pt idx="2">
+                  <c:v>34.510091760395397</c:v>
+                </c:pt>
+                <c:pt idx="3">
+                  <c:v>29.73951499270169</c:v>
+                </c:pt>
+                <c:pt idx="4">
+                  <c:v>25.214725510142941</c:v>
+                </c:pt>
+                <c:pt idx="5">
+                  <c:v>23.038510252414898</c:v>
+                </c:pt>
+                <c:pt idx="6">
+                  <c:v>26.90230281151435</c:v>
+                </c:pt>
+                <c:pt idx="7">
+                  <c:v>25.704911755947698</c:v>
+                </c:pt>
+                <c:pt idx="8">
+                  <c:v>36.319635914666662</c:v>
+                </c:pt>
+                <c:pt idx="9">
+                  <c:v>34.589757190105878</c:v>
+                </c:pt>
+                <c:pt idx="10">
+                  <c:v>37.955047501562717</c:v>
+                </c:pt>
+                <c:pt idx="11">
+                  <c:v>20.803735999154121</c:v>
+                </c:pt>
+                <c:pt idx="12">
+                  <c:v>22.23281636437731</c:v>
+                </c:pt>
+                <c:pt idx="13">
+                  <c:v>19.76997252216254</c:v>
+                </c:pt>
+                <c:pt idx="14">
+                  <c:v>18.679865703706291</c:v>
+                </c:pt>
+                <c:pt idx="15">
+                  <c:v>22.1221353678024</c:v>
+                </c:pt>
+                <c:pt idx="16">
+                  <c:v>24.538279555362131</c:v>
+                </c:pt>
+                <c:pt idx="17">
+                  <c:v>38.19229930694997</c:v>
+                </c:pt>
+                <c:pt idx="18">
+                  <c:v>40.15061130973811</c:v>
+                </c:pt>
+                <c:pt idx="19">
+                  <c:v>26.657481623661329</c:v>
+                </c:pt>
+                <c:pt idx="20">
+                  <c:v>22.280227236310179</c:v>
+                </c:pt>
+                <c:pt idx="21">
+                  <c:v>32.774631231013018</c:v>
+                </c:pt>
+                <c:pt idx="22">
+                  <c:v>19.670277347808341</c:v>
+                </c:pt>
+                <c:pt idx="23">
+                  <c:v>27.686943852388641</c:v>
+                </c:pt>
+                <c:pt idx="24">
+                  <c:v>161.19653891102311</c:v>
+                </c:pt>
+                <c:pt idx="25">
+                  <c:v>18.135795108694172</c:v>
+                </c:pt>
+                <c:pt idx="26">
+                  <c:v>39.157344880337988</c:v>
+                </c:pt>
+                <c:pt idx="27">
+                  <c:v>27.063004459834509</c:v>
+                </c:pt>
+                <c:pt idx="28">
+                  <c:v>27.42341666809434</c:v>
+                </c:pt>
+                <c:pt idx="29">
+                  <c:v>33.005655181510953</c:v>
+                </c:pt>
+                <c:pt idx="30">
+                  <c:v>36.907180475570428</c:v>
+                </c:pt>
+                <c:pt idx="31">
+                  <c:v>29.778588370569281</c:v>
+                </c:pt>
+                <c:pt idx="32">
+                  <c:v>38.756064732300523</c:v>
+                </c:pt>
+                <c:pt idx="33">
+                  <c:v>36.445566699663921</c:v>
+                </c:pt>
+                <c:pt idx="34">
+                  <c:v>33.268451819972597</c:v>
+                </c:pt>
+                <c:pt idx="35">
+                  <c:v>37.656896824645642</c:v>
+                </c:pt>
+                <c:pt idx="36">
+                  <c:v>39.048238581033168</c:v>
+                </c:pt>
+                <c:pt idx="37">
+                  <c:v>27.483703168003021</c:v>
+                </c:pt>
+                <c:pt idx="38">
+                  <c:v>33.625002281693853</c:v>
+                </c:pt>
+                <c:pt idx="39">
+                  <c:v>35.444167918262359</c:v>
+                </c:pt>
+                <c:pt idx="40">
+                  <c:v>34.846434905788747</c:v>
+                </c:pt>
+                <c:pt idx="41">
+                  <c:v>28.519721175301392</c:v>
+                </c:pt>
+                <c:pt idx="42">
+                  <c:v>41.011444199575728</c:v>
+                </c:pt>
+                <c:pt idx="43">
+                  <c:v>33.596924940002069</c:v>
+                </c:pt>
+                <c:pt idx="44">
+                  <c:v>26.609302588432168</c:v>
+                </c:pt>
+                <c:pt idx="45">
+                  <c:v>30.12635164384508</c:v>
+                </c:pt>
+                <c:pt idx="46">
+                  <c:v>28.412048641459091</c:v>
+                </c:pt>
+                <c:pt idx="47">
+                  <c:v>21.368077109398619</c:v>
+                </c:pt>
+                <c:pt idx="48">
+                  <c:v>33.579930200495653</c:v>
+                </c:pt>
+                <c:pt idx="49">
+                  <c:v>25.846882605295601</c:v>
+                </c:pt>
+                <c:pt idx="50">
+                  <c:v>31.03675005453232</c:v>
+                </c:pt>
+                <c:pt idx="51">
+                  <c:v>40.345854075791912</c:v>
+                </c:pt>
+                <c:pt idx="52">
+                  <c:v>26.083067540464292</c:v>
+                </c:pt>
+                <c:pt idx="53">
+                  <c:v>23.595522705782312</c:v>
+                </c:pt>
+                <c:pt idx="54">
+                  <c:v>29.885499263251969</c:v>
+                </c:pt>
+                <c:pt idx="55">
+                  <c:v>34.272756438621897</c:v>
+                </c:pt>
+                <c:pt idx="56">
+                  <c:v>37.860553610543121</c:v>
+                </c:pt>
+                <c:pt idx="57">
+                  <c:v>25.39052981694326</c:v>
+                </c:pt>
+                <c:pt idx="58">
+                  <c:v>25.19329048282659</c:v>
+                </c:pt>
+                <c:pt idx="59">
+                  <c:v>31.13743914566858</c:v>
+                </c:pt>
+                <c:pt idx="60">
+                  <c:v>39.517471399918861</c:v>
+                </c:pt>
+                <c:pt idx="61">
+                  <c:v>28.172670302105541</c:v>
+                </c:pt>
+                <c:pt idx="62">
+                  <c:v>23.509253223739549</c:v>
+                </c:pt>
+                <c:pt idx="63">
+                  <c:v>39.590712229903559</c:v>
+                </c:pt>
+                <c:pt idx="64">
+                  <c:v>34.142328458577481</c:v>
+                </c:pt>
+                <c:pt idx="65">
+                  <c:v>27.63099444532633</c:v>
+                </c:pt>
+                <c:pt idx="66">
+                  <c:v>22.824480006289409</c:v>
+                </c:pt>
+                <c:pt idx="67">
+                  <c:v>39.527846148805217</c:v>
+                </c:pt>
+                <c:pt idx="68">
+                  <c:v>27.65838576169136</c:v>
+                </c:pt>
+                <c:pt idx="69">
+                  <c:v>26.115515152060588</c:v>
+                </c:pt>
+                <c:pt idx="70">
+                  <c:v>26.573229755810289</c:v>
+                </c:pt>
+                <c:pt idx="71">
+                  <c:v>21.498115585860909</c:v>
+                </c:pt>
+                <c:pt idx="72">
+                  <c:v>31.36297747542746</c:v>
+                </c:pt>
+                <c:pt idx="73">
+                  <c:v>32.325348693621883</c:v>
+                </c:pt>
+                <c:pt idx="74">
+                  <c:v>25.50591503832953</c:v>
+                </c:pt>
+                <c:pt idx="75">
+                  <c:v>33.449794901117329</c:v>
+                </c:pt>
+                <c:pt idx="76">
+                  <c:v>26.97537140940435</c:v>
+                </c:pt>
+                <c:pt idx="77">
+                  <c:v>31.45824518663073</c:v>
+                </c:pt>
+                <c:pt idx="78">
+                  <c:v>127.26176888017839</c:v>
+                </c:pt>
+                <c:pt idx="79">
+                  <c:v>29.960227664197419</c:v>
+                </c:pt>
+                <c:pt idx="80">
+                  <c:v>25.804201405217899</c:v>
+                </c:pt>
+                <c:pt idx="81">
+                  <c:v>29.532357193363751</c:v>
+                </c:pt>
+                <c:pt idx="82">
+                  <c:v>37.877317563658828</c:v>
+                </c:pt>
+                <c:pt idx="83">
+                  <c:v>20.288802203686359</c:v>
+                </c:pt>
+                <c:pt idx="84">
+                  <c:v>21.69602997307209</c:v>
+                </c:pt>
+                <c:pt idx="85">
+                  <c:v>32.193966412460803</c:v>
+                </c:pt>
+                <c:pt idx="86">
+                  <c:v>24.485470718059581</c:v>
+                </c:pt>
+                <c:pt idx="87">
+                  <c:v>19.54220962985837</c:v>
+                </c:pt>
+                <c:pt idx="88">
+                  <c:v>40.621998030946372</c:v>
+                </c:pt>
+                <c:pt idx="89">
+                  <c:v>23.04429730110758</c:v>
+                </c:pt>
+                <c:pt idx="90">
+                  <c:v>33.826255036635558</c:v>
+                </c:pt>
+                <c:pt idx="91">
+                  <c:v>26.98949102355423</c:v>
+                </c:pt>
+                <c:pt idx="92">
+                  <c:v>28.95189597293092</c:v>
+                </c:pt>
+                <c:pt idx="93">
+                  <c:v>31.627043775729181</c:v>
+                </c:pt>
+                <c:pt idx="94">
+                  <c:v>24.718886694821709</c:v>
+                </c:pt>
+                <c:pt idx="95">
+                  <c:v>32.143638268890612</c:v>
+                </c:pt>
+                <c:pt idx="96">
+                  <c:v>31.900581479560529</c:v>
+                </c:pt>
+                <c:pt idx="97">
+                  <c:v>24.230919688461238</c:v>
+                </c:pt>
+                <c:pt idx="98">
+                  <c:v>25.271024233694561</c:v>
+                </c:pt>
+                <c:pt idx="99">
+                  <c:v>28.938347705634332</c:v>
+                </c:pt>
+                <c:pt idx="100">
+                  <c:v>26.570474610181542</c:v>
+                </c:pt>
+                <c:pt idx="101">
+                  <c:v>22.372698617138351</c:v>
+                </c:pt>
+                <c:pt idx="102">
+                  <c:v>39.772523313064333</c:v>
+                </c:pt>
+                <c:pt idx="103">
+                  <c:v>32.085712845885261</c:v>
+                </c:pt>
+                <c:pt idx="104">
+                  <c:v>24.62806519368872</c:v>
+                </c:pt>
+                <c:pt idx="105">
+                  <c:v>24.25332070650153</c:v>
+                </c:pt>
+                <c:pt idx="106">
+                  <c:v>18.83519776676382</c:v>
+                </c:pt>
+                <c:pt idx="107">
+                  <c:v>39.057561447114992</c:v>
+                </c:pt>
+                <c:pt idx="108">
+                  <c:v>122.03214876758661</c:v>
+                </c:pt>
+                <c:pt idx="109">
+                  <c:v>30.048941980505251</c:v>
+                </c:pt>
+                <c:pt idx="110">
+                  <c:v>30.898326844651471</c:v>
+                </c:pt>
+                <c:pt idx="111">
+                  <c:v>32.429932298872878</c:v>
+                </c:pt>
+                <c:pt idx="112">
+                  <c:v>43.550184316118951</c:v>
+                </c:pt>
+                <c:pt idx="113">
+                  <c:v>28.13458983622041</c:v>
+                </c:pt>
+                <c:pt idx="114">
+                  <c:v>36.475284509600911</c:v>
+                </c:pt>
+                <c:pt idx="115">
+                  <c:v>23.562781122051881</c:v>
+                </c:pt>
+                <c:pt idx="116">
+                  <c:v>32.048305923728442</c:v>
+                </c:pt>
+                <c:pt idx="117">
+                  <c:v>24.170193118832621</c:v>
+                </c:pt>
+                <c:pt idx="118">
+                  <c:v>32.978762861378961</c:v>
+                </c:pt>
+                <c:pt idx="119">
+                  <c:v>56.773398189593067</c:v>
+                </c:pt>
+                <c:pt idx="120">
+                  <c:v>29.207694211572331</c:v>
+                </c:pt>
+                <c:pt idx="121">
+                  <c:v>26.126045757779419</c:v>
+                </c:pt>
+                <c:pt idx="122">
+                  <c:v>32.608941642894692</c:v>
+                </c:pt>
+                <c:pt idx="123">
+                  <c:v>18.449662959810151</c:v>
+                </c:pt>
+                <c:pt idx="124">
+                  <c:v>19.670512035485238</c:v>
+                </c:pt>
+                <c:pt idx="125">
+                  <c:v>23.538270443896149</c:v>
+                </c:pt>
+                <c:pt idx="126">
+                  <c:v>36.998162786984473</c:v>
+                </c:pt>
+                <c:pt idx="127">
+                  <c:v>18.01303108739264</c:v>
+                </c:pt>
+                <c:pt idx="128">
+                  <c:v>27.94013016601756</c:v>
+                </c:pt>
+                <c:pt idx="129">
+                  <c:v>35.967323676734203</c:v>
+                </c:pt>
+              </c:numCache>
+            </c:numRef>
+          </c:xVal>
+          <c:yVal>
+            <c:numRef>
+              <c:f>Scatter_Volume_3!$X$2:$X$131</c:f>
+              <c:numCache>
+                <c:formatCode>General</c:formatCode>
+                <c:ptCount val="130"/>
+                <c:pt idx="0">
+                  <c:v>170.03615060456031</c:v>
+                </c:pt>
+                <c:pt idx="1">
+                  <c:v>170.03615060456031</c:v>
+                </c:pt>
+                <c:pt idx="2">
+                  <c:v>442.34484028648268</c:v>
+                </c:pt>
+                <c:pt idx="3">
+                  <c:v>384.47453074144289</c:v>
+                </c:pt>
+                <c:pt idx="4">
+                  <c:v>589.26232613535615</c:v>
+                </c:pt>
+                <c:pt idx="5">
+                  <c:v>600.00366091629667</c:v>
+                </c:pt>
+                <c:pt idx="6">
+                  <c:v>580.59986828176432</c:v>
+                </c:pt>
+                <c:pt idx="7">
+                  <c:v>586.77380225755871</c:v>
+                </c:pt>
+                <c:pt idx="8">
+                  <c:v>198.74798634080591</c:v>
+                </c:pt>
+                <c:pt idx="9">
+                  <c:v>538.65121232621641</c:v>
+                </c:pt>
+                <c:pt idx="10">
+                  <c:v>519.62038029860423</c:v>
+                </c:pt>
+                <c:pt idx="11">
+                  <c:v>610.44011999530971</c:v>
+                </c:pt>
+                <c:pt idx="12">
+                  <c:v>603.84085901427204</c:v>
+                </c:pt>
+                <c:pt idx="13">
+                  <c:v>613.4453538017342</c:v>
+                </c:pt>
+                <c:pt idx="14">
+                  <c:v>619.70901460535379</c:v>
+                </c:pt>
+                <c:pt idx="15">
+                  <c:v>604.36162187277569</c:v>
+                </c:pt>
+                <c:pt idx="16">
+                  <c:v>592.65650589872985</c:v>
+                </c:pt>
+                <c:pt idx="17">
+                  <c:v>518.27461748981193</c:v>
+                </c:pt>
+                <c:pt idx="18">
+                  <c:v>186.24226241583889</c:v>
+                </c:pt>
+                <c:pt idx="19">
+                  <c:v>581.87269039983209</c:v>
+                </c:pt>
+                <c:pt idx="20">
+                  <c:v>603.61730797467908</c:v>
+                </c:pt>
+                <c:pt idx="21">
+                  <c:v>0</c:v>
+                </c:pt>
+                <c:pt idx="22">
+                  <c:v>615.47121776952054</c:v>
+                </c:pt>
+                <c:pt idx="23">
+                  <c:v>576.48654225598216</c:v>
+                </c:pt>
+                <c:pt idx="24">
+                  <c:v>0</c:v>
+                </c:pt>
+                <c:pt idx="25">
+                  <c:v>621.97080147470979</c:v>
+                </c:pt>
+                <c:pt idx="26">
+                  <c:v>512.80044229378143</c:v>
+                </c:pt>
+                <c:pt idx="27">
+                  <c:v>445.45950089518448</c:v>
+                </c:pt>
+                <c:pt idx="28">
+                  <c:v>202.04662815504969</c:v>
+                </c:pt>
+                <c:pt idx="29">
+                  <c:v>547.52726273839301</c:v>
+                </c:pt>
+                <c:pt idx="30">
+                  <c:v>525.56101211885834</c:v>
+                </c:pt>
+                <c:pt idx="31">
+                  <c:v>565.29519518463246</c:v>
+                </c:pt>
+                <c:pt idx="32">
+                  <c:v>360.62542968591782</c:v>
+                </c:pt>
+                <c:pt idx="33">
+                  <c:v>528.17512636823926</c:v>
+                </c:pt>
+                <c:pt idx="34">
+                  <c:v>546.06027183932622</c:v>
+                </c:pt>
+                <c:pt idx="35">
+                  <c:v>521.31132346505831</c:v>
+                </c:pt>
+                <c:pt idx="36">
+                  <c:v>253.36049480292439</c:v>
+                </c:pt>
+                <c:pt idx="37">
+                  <c:v>577.55682230506966</c:v>
+                </c:pt>
+                <c:pt idx="38">
+                  <c:v>546.93522461942518</c:v>
+                </c:pt>
+                <c:pt idx="39">
+                  <c:v>288.4010166698551</c:v>
+                </c:pt>
+                <c:pt idx="40">
+                  <c:v>537.20637954115591</c:v>
+                </c:pt>
+                <c:pt idx="41">
+                  <c:v>572.06780368525312</c:v>
+                </c:pt>
+                <c:pt idx="42">
+                  <c:v>502.2975334198938</c:v>
+                </c:pt>
+                <c:pt idx="43">
+                  <c:v>544.22334420987022</c:v>
+                </c:pt>
+                <c:pt idx="44">
+                  <c:v>582.12255651740634</c:v>
+                </c:pt>
+                <c:pt idx="45">
+                  <c:v>563.40640848012674</c:v>
+                </c:pt>
+                <c:pt idx="46">
+                  <c:v>0</c:v>
+                </c:pt>
+                <c:pt idx="47">
+                  <c:v>607.86693731705429</c:v>
+                </c:pt>
+                <c:pt idx="48">
+                  <c:v>544.31847094938576</c:v>
+                </c:pt>
+                <c:pt idx="49">
+                  <c:v>390.54669565891959</c:v>
+                </c:pt>
+                <c:pt idx="50">
+                  <c:v>540.31347396757735</c:v>
+                </c:pt>
+                <c:pt idx="51">
+                  <c:v>190.45576251778911</c:v>
+                </c:pt>
+                <c:pt idx="52">
+                  <c:v>584.83816333390132</c:v>
+                </c:pt>
+                <c:pt idx="53">
+                  <c:v>414.25816810859851</c:v>
+                </c:pt>
+                <c:pt idx="54">
+                  <c:v>351.88516182559079</c:v>
+                </c:pt>
+                <c:pt idx="55">
+                  <c:v>241.7293410417081</c:v>
+                </c:pt>
+                <c:pt idx="56">
+                  <c:v>520.15633383182364</c:v>
+                </c:pt>
+                <c:pt idx="57">
+                  <c:v>443.85513109675912</c:v>
+                </c:pt>
+                <c:pt idx="58">
+                  <c:v>589.3706010044026</c:v>
+                </c:pt>
+                <c:pt idx="59">
+                  <c:v>557.87594440395628</c:v>
+                </c:pt>
+                <c:pt idx="60">
+                  <c:v>510.75829649135449</c:v>
+                </c:pt>
+                <c:pt idx="61">
+                  <c:v>375.90546322968868</c:v>
+                </c:pt>
+                <c:pt idx="62">
+                  <c:v>597.72525031083183</c:v>
+                </c:pt>
+                <c:pt idx="63">
+                  <c:v>510.34305982830898</c:v>
+                </c:pt>
+                <c:pt idx="64">
+                  <c:v>541.16579008697033</c:v>
+                </c:pt>
+                <c:pt idx="65">
+                  <c:v>576.78150411902743</c:v>
+                </c:pt>
+                <c:pt idx="66">
+                  <c:v>601.03081503284113</c:v>
+                </c:pt>
+                <c:pt idx="67">
+                  <c:v>207.72705874964689</c:v>
+                </c:pt>
+                <c:pt idx="68">
+                  <c:v>576.63712973296526</c:v>
+                </c:pt>
+                <c:pt idx="69">
+                  <c:v>568.76654955887227</c:v>
+                </c:pt>
+                <c:pt idx="70">
+                  <c:v>219.0307762649237</c:v>
+                </c:pt>
+                <c:pt idx="71">
+                  <c:v>607.26783114484704</c:v>
+                </c:pt>
+                <c:pt idx="72">
+                  <c:v>556.6349615768878</c:v>
+                </c:pt>
+                <c:pt idx="73">
+                  <c:v>551.31293310341266</c:v>
+                </c:pt>
+                <c:pt idx="74">
+                  <c:v>587.7868951710966</c:v>
+                </c:pt>
+                <c:pt idx="75">
+                  <c:v>545.04658391404666</c:v>
+                </c:pt>
+                <c:pt idx="76">
+                  <c:v>580.21898431728403</c:v>
+                </c:pt>
+                <c:pt idx="77">
+                  <c:v>556.11001903552517</c:v>
+                </c:pt>
+                <c:pt idx="78">
+                  <c:v>0</c:v>
+                </c:pt>
+                <c:pt idx="79">
+                  <c:v>0</c:v>
+                </c:pt>
+                <c:pt idx="80">
+                  <c:v>586.26688852467953</c:v>
+                </c:pt>
+                <c:pt idx="81">
+                  <c:v>566.6280678335479</c:v>
+                </c:pt>
+                <c:pt idx="82">
+                  <c:v>520.06125373060502</c:v>
+                </c:pt>
+                <c:pt idx="83">
+                  <c:v>612.74896699089663</c:v>
+                </c:pt>
+                <c:pt idx="84">
+                  <c:v>606.35165679599493</c:v>
+                </c:pt>
+                <c:pt idx="85">
+                  <c:v>223.1026704794393</c:v>
+                </c:pt>
+                <c:pt idx="86">
+                  <c:v>386.91685816460091</c:v>
+                </c:pt>
+                <c:pt idx="87">
+                  <c:v>616.02772099683807</c:v>
+                </c:pt>
+                <c:pt idx="88">
+                  <c:v>504.50079728319838</c:v>
+                </c:pt>
+                <c:pt idx="89">
+                  <c:v>599.9758113272336</c:v>
+                </c:pt>
+                <c:pt idx="90">
+                  <c:v>542.93879978263578</c:v>
+                </c:pt>
+                <c:pt idx="91">
+                  <c:v>580.14533066894808</c:v>
+                </c:pt>
+                <c:pt idx="92">
+                  <c:v>287.42856402379078</c:v>
+                </c:pt>
+                <c:pt idx="93">
+                  <c:v>555.17884294430428</c:v>
+                </c:pt>
+                <c:pt idx="94">
+                  <c:v>591.75494232270546</c:v>
+                </c:pt>
+                <c:pt idx="95">
+                  <c:v>552.32095054543913</c:v>
+                </c:pt>
+                <c:pt idx="96">
+                  <c:v>553.66706760122065</c:v>
+                </c:pt>
+                <c:pt idx="97">
+                  <c:v>458.4150248519731</c:v>
+                </c:pt>
+                <c:pt idx="98">
+                  <c:v>588.97772412387053</c:v>
+                </c:pt>
+                <c:pt idx="99">
+                  <c:v>569.82743660601841</c:v>
+                </c:pt>
+                <c:pt idx="100">
+                  <c:v>582.32377711629238</c:v>
+                </c:pt>
+                <c:pt idx="101">
+                  <c:v>603.18046635790074</c:v>
+                </c:pt>
+                <c:pt idx="102">
+                  <c:v>509.31243831342891</c:v>
+                </c:pt>
+                <c:pt idx="103">
+                  <c:v>552.64199092148738</c:v>
+                </c:pt>
+                <c:pt idx="104">
+                  <c:v>241.19892224596811</c:v>
+                </c:pt>
+                <c:pt idx="105">
+                  <c:v>594.07187858875704</c:v>
+                </c:pt>
+                <c:pt idx="106">
+                  <c:v>243.06503459821221</c:v>
+                </c:pt>
+                <c:pt idx="107">
+                  <c:v>513.36637823161198</c:v>
+                </c:pt>
+                <c:pt idx="108">
+                  <c:v>132.57459865067719</c:v>
+                </c:pt>
+                <c:pt idx="109">
+                  <c:v>563.82746385351663</c:v>
+                </c:pt>
+                <c:pt idx="110">
+                  <c:v>559.18880905332844</c:v>
+                </c:pt>
+                <c:pt idx="111">
+                  <c:v>550.73214621781199</c:v>
+                </c:pt>
+                <c:pt idx="112">
+                  <c:v>257.93103850057702</c:v>
+                </c:pt>
+                <c:pt idx="113">
+                  <c:v>574.11780989294527</c:v>
+                </c:pt>
+                <c:pt idx="114">
+                  <c:v>528.00690790583621</c:v>
+                </c:pt>
+                <c:pt idx="115">
+                  <c:v>597.46452793156971</c:v>
+                </c:pt>
+                <c:pt idx="116">
+                  <c:v>489.26536637981388</c:v>
+                </c:pt>
+                <c:pt idx="117">
+                  <c:v>351.24212113186871</c:v>
+                </c:pt>
+                <c:pt idx="118">
+                  <c:v>386.67099554903729</c:v>
+                </c:pt>
+                <c:pt idx="119">
+                  <c:v>0</c:v>
+                </c:pt>
+                <c:pt idx="120">
+                  <c:v>568.37960373296141</c:v>
+                </c:pt>
+                <c:pt idx="121">
+                  <c:v>236.08564171532311</c:v>
+                </c:pt>
+                <c:pt idx="122">
+                  <c:v>549.73702489573952</c:v>
+                </c:pt>
+                <c:pt idx="123">
+                  <c:v>620.67186392192059</c:v>
+                </c:pt>
+                <c:pt idx="124">
+                  <c:v>615.47019568255223</c:v>
+                </c:pt>
+                <c:pt idx="125">
+                  <c:v>597.58395511346805</c:v>
+                </c:pt>
+                <c:pt idx="126">
+                  <c:v>226.61469486647641</c:v>
+                </c:pt>
+                <c:pt idx="127">
+                  <c:v>622.47445795868759</c:v>
+                </c:pt>
+                <c:pt idx="128">
+                  <c:v>575.14869282842892</c:v>
+                </c:pt>
+                <c:pt idx="129">
+                  <c:v>530.88060390056057</c:v>
+                </c:pt>
+              </c:numCache>
+            </c:numRef>
+          </c:yVal>
+          <c:smooth val="0"/>
+          <c:extLst>
+            <c:ext xmlns:c16="http://schemas.microsoft.com/office/drawing/2014/chart" uri="{C3380CC4-5D6E-409C-BE32-E72D297353CC}">
+              <c16:uniqueId val="{00000000-20F8-4257-9AD5-2A91FB8DC9DE}"/>
+            </c:ext>
+          </c:extLst>
+        </c:ser>
+        <c:ser>
+          <c:idx val="1"/>
+          <c:order val="1"/>
+          <c:tx>
+            <c:strRef>
+              <c:f>Scatter_Volume_3!$Y$1</c:f>
+              <c:strCache>
+                <c:ptCount val="1"/>
+                <c:pt idx="0">
+                  <c:v>Energy loss </c:v>
+                </c:pt>
+              </c:strCache>
+            </c:strRef>
+          </c:tx>
+          <c:spPr>
+            <a:ln w="28575" cap="rnd">
+              <a:noFill/>
+              <a:round/>
+            </a:ln>
+            <a:effectLst/>
+          </c:spPr>
+          <c:marker>
+            <c:symbol val="circle"/>
+            <c:size val="5"/>
+            <c:spPr>
+              <a:solidFill>
+                <a:schemeClr val="accent2"/>
+              </a:solidFill>
+              <a:ln w="9525">
+                <a:solidFill>
+                  <a:schemeClr val="accent2"/>
+                </a:solidFill>
+              </a:ln>
+              <a:effectLst/>
+            </c:spPr>
+          </c:marker>
+          <c:xVal>
+            <c:numRef>
+              <c:f>Scatter_Volume_3!$R$2:$R$131</c:f>
+              <c:numCache>
+                <c:formatCode>General</c:formatCode>
+                <c:ptCount val="130"/>
+                <c:pt idx="0">
+                  <c:v>85.271925041978449</c:v>
+                </c:pt>
+                <c:pt idx="1">
+                  <c:v>40.113801646415872</c:v>
+                </c:pt>
+                <c:pt idx="2">
+                  <c:v>34.510091760395397</c:v>
+                </c:pt>
+                <c:pt idx="3">
+                  <c:v>29.73951499270169</c:v>
+                </c:pt>
+                <c:pt idx="4">
+                  <c:v>25.214725510142941</c:v>
+                </c:pt>
+                <c:pt idx="5">
+                  <c:v>23.038510252414898</c:v>
+                </c:pt>
+                <c:pt idx="6">
+                  <c:v>26.90230281151435</c:v>
+                </c:pt>
+                <c:pt idx="7">
+                  <c:v>25.704911755947698</c:v>
+                </c:pt>
+                <c:pt idx="8">
+                  <c:v>36.319635914666662</c:v>
+                </c:pt>
+                <c:pt idx="9">
+                  <c:v>34.589757190105878</c:v>
+                </c:pt>
+                <c:pt idx="10">
+                  <c:v>37.955047501562717</c:v>
+                </c:pt>
+                <c:pt idx="11">
+                  <c:v>20.803735999154121</c:v>
+                </c:pt>
+                <c:pt idx="12">
+                  <c:v>22.23281636437731</c:v>
+                </c:pt>
+                <c:pt idx="13">
+                  <c:v>19.76997252216254</c:v>
+                </c:pt>
+                <c:pt idx="14">
+                  <c:v>18.679865703706291</c:v>
+                </c:pt>
+                <c:pt idx="15">
+                  <c:v>22.1221353678024</c:v>
+                </c:pt>
+                <c:pt idx="16">
+                  <c:v>24.538279555362131</c:v>
+                </c:pt>
+                <c:pt idx="17">
+                  <c:v>38.19229930694997</c:v>
+                </c:pt>
+                <c:pt idx="18">
+                  <c:v>40.15061130973811</c:v>
+                </c:pt>
+                <c:pt idx="19">
+                  <c:v>26.657481623661329</c:v>
+                </c:pt>
+                <c:pt idx="20">
+                  <c:v>22.280227236310179</c:v>
+                </c:pt>
+                <c:pt idx="21">
+                  <c:v>32.774631231013018</c:v>
+                </c:pt>
+                <c:pt idx="22">
+                  <c:v>19.670277347808341</c:v>
+                </c:pt>
+                <c:pt idx="23">
+                  <c:v>27.686943852388641</c:v>
+                </c:pt>
+                <c:pt idx="24">
+                  <c:v>161.19653891102311</c:v>
+                </c:pt>
+                <c:pt idx="25">
+                  <c:v>18.135795108694172</c:v>
+                </c:pt>
+                <c:pt idx="26">
+                  <c:v>39.157344880337988</c:v>
+                </c:pt>
+                <c:pt idx="27">
+                  <c:v>27.063004459834509</c:v>
+                </c:pt>
+                <c:pt idx="28">
+                  <c:v>27.42341666809434</c:v>
+                </c:pt>
+                <c:pt idx="29">
+                  <c:v>33.005655181510953</c:v>
+                </c:pt>
+                <c:pt idx="30">
+                  <c:v>36.907180475570428</c:v>
+                </c:pt>
+                <c:pt idx="31">
+                  <c:v>29.778588370569281</c:v>
+                </c:pt>
+                <c:pt idx="32">
+                  <c:v>38.756064732300523</c:v>
+                </c:pt>
+                <c:pt idx="33">
+                  <c:v>36.445566699663921</c:v>
+                </c:pt>
+                <c:pt idx="34">
+                  <c:v>33.268451819972597</c:v>
+                </c:pt>
+                <c:pt idx="35">
+                  <c:v>37.656896824645642</c:v>
+                </c:pt>
+                <c:pt idx="36">
+                  <c:v>39.048238581033168</c:v>
+                </c:pt>
+                <c:pt idx="37">
+                  <c:v>27.483703168003021</c:v>
+                </c:pt>
+                <c:pt idx="38">
+                  <c:v>33.625002281693853</c:v>
+                </c:pt>
+                <c:pt idx="39">
+                  <c:v>35.444167918262359</c:v>
+                </c:pt>
+                <c:pt idx="40">
+                  <c:v>34.846434905788747</c:v>
+                </c:pt>
+                <c:pt idx="41">
+                  <c:v>28.519721175301392</c:v>
+                </c:pt>
+                <c:pt idx="42">
+                  <c:v>41.011444199575728</c:v>
+                </c:pt>
+                <c:pt idx="43">
+                  <c:v>33.596924940002069</c:v>
+                </c:pt>
+                <c:pt idx="44">
+                  <c:v>26.609302588432168</c:v>
+                </c:pt>
+                <c:pt idx="45">
+                  <c:v>30.12635164384508</c:v>
+                </c:pt>
+                <c:pt idx="46">
+                  <c:v>28.412048641459091</c:v>
+                </c:pt>
+                <c:pt idx="47">
+                  <c:v>21.368077109398619</c:v>
+                </c:pt>
+                <c:pt idx="48">
+                  <c:v>33.579930200495653</c:v>
+                </c:pt>
+                <c:pt idx="49">
+                  <c:v>25.846882605295601</c:v>
+                </c:pt>
+                <c:pt idx="50">
+                  <c:v>31.03675005453232</c:v>
+                </c:pt>
+                <c:pt idx="51">
+                  <c:v>40.345854075791912</c:v>
+                </c:pt>
+                <c:pt idx="52">
+                  <c:v>26.083067540464292</c:v>
+                </c:pt>
+                <c:pt idx="53">
+                  <c:v>23.595522705782312</c:v>
+                </c:pt>
+                <c:pt idx="54">
+                  <c:v>29.885499263251969</c:v>
+                </c:pt>
+                <c:pt idx="55">
+                  <c:v>34.272756438621897</c:v>
+                </c:pt>
+                <c:pt idx="56">
+                  <c:v>37.860553610543121</c:v>
+                </c:pt>
+                <c:pt idx="57">
+                  <c:v>25.39052981694326</c:v>
+                </c:pt>
+                <c:pt idx="58">
+                  <c:v>25.19329048282659</c:v>
+                </c:pt>
+                <c:pt idx="59">
+                  <c:v>31.13743914566858</c:v>
+                </c:pt>
+                <c:pt idx="60">
+                  <c:v>39.517471399918861</c:v>
+                </c:pt>
+                <c:pt idx="61">
+                  <c:v>28.172670302105541</c:v>
+                </c:pt>
+                <c:pt idx="62">
+                  <c:v>23.509253223739549</c:v>
+                </c:pt>
+                <c:pt idx="63">
+                  <c:v>39.590712229903559</c:v>
+                </c:pt>
+                <c:pt idx="64">
+                  <c:v>34.142328458577481</c:v>
+                </c:pt>
+                <c:pt idx="65">
+                  <c:v>27.63099444532633</c:v>
+                </c:pt>
+                <c:pt idx="66">
+                  <c:v>22.824480006289409</c:v>
+                </c:pt>
+                <c:pt idx="67">
+                  <c:v>39.527846148805217</c:v>
+                </c:pt>
+                <c:pt idx="68">
+                  <c:v>27.65838576169136</c:v>
+                </c:pt>
+                <c:pt idx="69">
+                  <c:v>26.115515152060588</c:v>
+                </c:pt>
+                <c:pt idx="70">
+                  <c:v>26.573229755810289</c:v>
+                </c:pt>
+                <c:pt idx="71">
+                  <c:v>21.498115585860909</c:v>
+                </c:pt>
+                <c:pt idx="72">
+                  <c:v>31.36297747542746</c:v>
+                </c:pt>
+                <c:pt idx="73">
+                  <c:v>32.325348693621883</c:v>
+                </c:pt>
+                <c:pt idx="74">
+                  <c:v>25.50591503832953</c:v>
+                </c:pt>
+                <c:pt idx="75">
+                  <c:v>33.449794901117329</c:v>
+                </c:pt>
+                <c:pt idx="76">
+                  <c:v>26.97537140940435</c:v>
+                </c:pt>
+                <c:pt idx="77">
+                  <c:v>31.45824518663073</c:v>
+                </c:pt>
+                <c:pt idx="78">
+                  <c:v>127.26176888017839</c:v>
+                </c:pt>
+                <c:pt idx="79">
+                  <c:v>29.960227664197419</c:v>
+                </c:pt>
+                <c:pt idx="80">
+                  <c:v>25.804201405217899</c:v>
+                </c:pt>
+                <c:pt idx="81">
+                  <c:v>29.532357193363751</c:v>
+                </c:pt>
+                <c:pt idx="82">
+                  <c:v>37.877317563658828</c:v>
+                </c:pt>
+                <c:pt idx="83">
+                  <c:v>20.288802203686359</c:v>
+                </c:pt>
+                <c:pt idx="84">
+                  <c:v>21.69602997307209</c:v>
+                </c:pt>
+                <c:pt idx="85">
+                  <c:v>32.193966412460803</c:v>
+                </c:pt>
+                <c:pt idx="86">
+                  <c:v>24.485470718059581</c:v>
+                </c:pt>
+                <c:pt idx="87">
+                  <c:v>19.54220962985837</c:v>
+                </c:pt>
+                <c:pt idx="88">
+                  <c:v>40.621998030946372</c:v>
+                </c:pt>
+                <c:pt idx="89">
+                  <c:v>23.04429730110758</c:v>
+                </c:pt>
+                <c:pt idx="90">
+                  <c:v>33.826255036635558</c:v>
+                </c:pt>
+                <c:pt idx="91">
+                  <c:v>26.98949102355423</c:v>
+                </c:pt>
+                <c:pt idx="92">
+                  <c:v>28.95189597293092</c:v>
+                </c:pt>
+                <c:pt idx="93">
+                  <c:v>31.627043775729181</c:v>
+                </c:pt>
+                <c:pt idx="94">
+                  <c:v>24.718886694821709</c:v>
+                </c:pt>
+                <c:pt idx="95">
+                  <c:v>32.143638268890612</c:v>
+                </c:pt>
+                <c:pt idx="96">
+                  <c:v>31.900581479560529</c:v>
+                </c:pt>
+                <c:pt idx="97">
+                  <c:v>24.230919688461238</c:v>
+                </c:pt>
+                <c:pt idx="98">
+                  <c:v>25.271024233694561</c:v>
+                </c:pt>
+                <c:pt idx="99">
+                  <c:v>28.938347705634332</c:v>
+                </c:pt>
+                <c:pt idx="100">
+                  <c:v>26.570474610181542</c:v>
+                </c:pt>
+                <c:pt idx="101">
+                  <c:v>22.372698617138351</c:v>
+                </c:pt>
+                <c:pt idx="102">
+                  <c:v>39.772523313064333</c:v>
+                </c:pt>
+                <c:pt idx="103">
+                  <c:v>32.085712845885261</c:v>
+                </c:pt>
+                <c:pt idx="104">
+                  <c:v>24.62806519368872</c:v>
+                </c:pt>
+                <c:pt idx="105">
+                  <c:v>24.25332070650153</c:v>
+                </c:pt>
+                <c:pt idx="106">
+                  <c:v>18.83519776676382</c:v>
+                </c:pt>
+                <c:pt idx="107">
+                  <c:v>39.057561447114992</c:v>
+                </c:pt>
+                <c:pt idx="108">
+                  <c:v>122.03214876758661</c:v>
+                </c:pt>
+                <c:pt idx="109">
+                  <c:v>30.048941980505251</c:v>
+                </c:pt>
+                <c:pt idx="110">
+                  <c:v>30.898326844651471</c:v>
+                </c:pt>
+                <c:pt idx="111">
+                  <c:v>32.429932298872878</c:v>
+                </c:pt>
+                <c:pt idx="112">
+                  <c:v>43.550184316118951</c:v>
+                </c:pt>
+                <c:pt idx="113">
+                  <c:v>28.13458983622041</c:v>
+                </c:pt>
+                <c:pt idx="114">
+                  <c:v>36.475284509600911</c:v>
+                </c:pt>
+                <c:pt idx="115">
+                  <c:v>23.562781122051881</c:v>
+                </c:pt>
+                <c:pt idx="116">
+                  <c:v>32.048305923728442</c:v>
+                </c:pt>
+                <c:pt idx="117">
+                  <c:v>24.170193118832621</c:v>
+                </c:pt>
+                <c:pt idx="118">
+                  <c:v>32.978762861378961</c:v>
+                </c:pt>
+                <c:pt idx="119">
+                  <c:v>56.773398189593067</c:v>
+                </c:pt>
+                <c:pt idx="120">
+                  <c:v>29.207694211572331</c:v>
+                </c:pt>
+                <c:pt idx="121">
+                  <c:v>26.126045757779419</c:v>
+                </c:pt>
+                <c:pt idx="122">
+                  <c:v>32.608941642894692</c:v>
+                </c:pt>
+                <c:pt idx="123">
+                  <c:v>18.449662959810151</c:v>
+                </c:pt>
+                <c:pt idx="124">
+                  <c:v>19.670512035485238</c:v>
+                </c:pt>
+                <c:pt idx="125">
+                  <c:v>23.538270443896149</c:v>
+                </c:pt>
+                <c:pt idx="126">
+                  <c:v>36.998162786984473</c:v>
+                </c:pt>
+                <c:pt idx="127">
+                  <c:v>18.01303108739264</c:v>
+                </c:pt>
+                <c:pt idx="128">
+                  <c:v>27.94013016601756</c:v>
+                </c:pt>
+                <c:pt idx="129">
+                  <c:v>35.967323676734203</c:v>
+                </c:pt>
+              </c:numCache>
+            </c:numRef>
+          </c:xVal>
+          <c:yVal>
+            <c:numRef>
+              <c:f>Scatter_Volume_3!$Y$2:$Y$131</c:f>
+              <c:numCache>
+                <c:formatCode>General</c:formatCode>
+                <c:ptCount val="130"/>
+                <c:pt idx="0">
+                  <c:v>491.96384939543969</c:v>
+                </c:pt>
+                <c:pt idx="1">
+                  <c:v>491.96384939543969</c:v>
+                </c:pt>
+                <c:pt idx="2">
+                  <c:v>219.65515971351732</c:v>
+                </c:pt>
+                <c:pt idx="3">
+                  <c:v>277.52546925855711</c:v>
+                </c:pt>
+                <c:pt idx="4">
+                  <c:v>72.737673864643853</c:v>
+                </c:pt>
+                <c:pt idx="5">
+                  <c:v>61.996339083703333</c:v>
+                </c:pt>
+                <c:pt idx="6">
+                  <c:v>81.400131718235684</c:v>
+                </c:pt>
+                <c:pt idx="7">
+                  <c:v>75.226197742441286</c:v>
+                </c:pt>
+                <c:pt idx="8">
+                  <c:v>463.25201365919406</c:v>
+                </c:pt>
+                <c:pt idx="9">
+                  <c:v>123.34878767378359</c:v>
+                </c:pt>
+                <c:pt idx="10">
+                  <c:v>142.37961970139577</c:v>
+                </c:pt>
+                <c:pt idx="11">
+                  <c:v>51.559880004690285</c:v>
+                </c:pt>
+                <c:pt idx="12">
+                  <c:v>58.159140985727959</c:v>
+                </c:pt>
+                <c:pt idx="13">
+                  <c:v>48.5546461982658</c:v>
+                </c:pt>
+                <c:pt idx="14">
+                  <c:v>42.290985394646214</c:v>
+                </c:pt>
+                <c:pt idx="15">
+                  <c:v>57.638378127224314</c:v>
+                </c:pt>
+                <c:pt idx="16">
+                  <c:v>69.343494101270153</c:v>
+                </c:pt>
+                <c:pt idx="17">
+                  <c:v>143.72538251018807</c:v>
+                </c:pt>
+                <c:pt idx="18">
+                  <c:v>475.75773758416108</c:v>
+                </c:pt>
+                <c:pt idx="19">
+                  <c:v>80.127309600167905</c:v>
+                </c:pt>
+                <c:pt idx="20">
+                  <c:v>58.382692025320921</c:v>
+                </c:pt>
+                <c:pt idx="21">
+                  <c:v>662</c:v>
+                </c:pt>
+                <c:pt idx="22">
+                  <c:v>46.528782230479464</c:v>
+                </c:pt>
+                <c:pt idx="23">
+                  <c:v>85.513457744017842</c:v>
+                </c:pt>
+                <c:pt idx="24">
+                  <c:v>662</c:v>
+                </c:pt>
+                <c:pt idx="25">
+                  <c:v>40.029198525290212</c:v>
+                </c:pt>
+                <c:pt idx="26">
+                  <c:v>149.19955770621857</c:v>
+                </c:pt>
+                <c:pt idx="27">
+                  <c:v>216.54049910481552</c:v>
+                </c:pt>
+                <c:pt idx="28">
+                  <c:v>459.95337184495031</c:v>
+                </c:pt>
+                <c:pt idx="29">
+                  <c:v>114.47273726160699</c:v>
+                </c:pt>
+                <c:pt idx="30">
+                  <c:v>136.43898788114166</c:v>
+                </c:pt>
+                <c:pt idx="31">
+                  <c:v>96.704804815367538</c:v>
+                </c:pt>
+                <c:pt idx="32">
+                  <c:v>301.37457031408218</c:v>
+                </c:pt>
+                <c:pt idx="33">
+                  <c:v>133.82487363176074</c:v>
+                </c:pt>
+                <c:pt idx="34">
+                  <c:v>115.93972816067378</c:v>
+                </c:pt>
+                <c:pt idx="35">
+                  <c:v>140.68867653494169</c:v>
+                </c:pt>
+                <c:pt idx="36">
+                  <c:v>408.63950519707561</c:v>
+                </c:pt>
+                <c:pt idx="37">
+                  <c:v>84.443177694930341</c:v>
+                </c:pt>
+                <c:pt idx="38">
+                  <c:v>115.06477538057482</c:v>
+                </c:pt>
+                <c:pt idx="39">
+                  <c:v>373.5989833301449</c:v>
+                </c:pt>
+                <c:pt idx="40">
+                  <c:v>124.79362045884409</c:v>
+                </c:pt>
+                <c:pt idx="41">
+                  <c:v>89.932196314746875</c:v>
+                </c:pt>
+                <c:pt idx="42">
+                  <c:v>159.7024665801062</c:v>
+                </c:pt>
+                <c:pt idx="43">
+                  <c:v>117.77665579012978</c:v>
+                </c:pt>
+                <c:pt idx="44">
+                  <c:v>79.877443482593662</c:v>
+                </c:pt>
+                <c:pt idx="45">
+                  <c:v>98.593591519873257</c:v>
+                </c:pt>
+                <c:pt idx="46">
+                  <c:v>662</c:v>
+                </c:pt>
+                <c:pt idx="47">
+                  <c:v>54.133062682945706</c:v>
+                </c:pt>
+                <c:pt idx="48">
+                  <c:v>117.68152905061424</c:v>
+                </c:pt>
+                <c:pt idx="49">
+                  <c:v>271.45330434108041</c:v>
+                </c:pt>
+                <c:pt idx="50">
+                  <c:v>121.68652603242265</c:v>
+                </c:pt>
+                <c:pt idx="51">
+                  <c:v>471.54423748221086</c:v>
+                </c:pt>
+                <c:pt idx="52">
+                  <c:v>77.161836666098679</c:v>
+                </c:pt>
+                <c:pt idx="53">
+                  <c:v>247.74183189140149</c:v>
+                </c:pt>
+                <c:pt idx="54">
+                  <c:v>310.11483817440921</c:v>
+                </c:pt>
+                <c:pt idx="55">
+                  <c:v>420.2706589582919</c:v>
+                </c:pt>
+                <c:pt idx="56">
+                  <c:v>141.84366616817636</c:v>
+                </c:pt>
+                <c:pt idx="57">
+                  <c:v>218.14486890324088</c:v>
+                </c:pt>
+                <c:pt idx="58">
+                  <c:v>72.629398995597398</c:v>
+                </c:pt>
+                <c:pt idx="59">
+                  <c:v>104.12405559604372</c:v>
+                </c:pt>
+                <c:pt idx="60">
+                  <c:v>151.24170350864551</c:v>
+                </c:pt>
+                <c:pt idx="61">
+                  <c:v>286.09453677031132</c:v>
+                </c:pt>
+                <c:pt idx="62">
+                  <c:v>64.274749689168175</c:v>
+                </c:pt>
+                <c:pt idx="63">
+                  <c:v>151.65694017169102</c:v>
+                </c:pt>
+                <c:pt idx="64">
+                  <c:v>120.83420991302967</c:v>
+                </c:pt>
+                <c:pt idx="65">
+                  <c:v>85.218495880972569</c:v>
+                </c:pt>
+                <c:pt idx="66">
+                  <c:v>60.969184967158867</c:v>
+                </c:pt>
+                <c:pt idx="67">
+                  <c:v>454.27294125035314</c:v>
+                </c:pt>
+                <c:pt idx="68">
+                  <c:v>85.362870267034737</c:v>
+                </c:pt>
+                <c:pt idx="69">
+                  <c:v>93.233450441127729</c:v>
+                </c:pt>
+                <c:pt idx="70">
+                  <c:v>442.9692237350763</c:v>
+                </c:pt>
+                <c:pt idx="71">
+                  <c:v>54.732168855152963</c:v>
+                </c:pt>
+                <c:pt idx="72">
+                  <c:v>105.3650384231122</c:v>
+                </c:pt>
+                <c:pt idx="73">
+                  <c:v>110.68706689658734</c:v>
+                </c:pt>
+                <c:pt idx="74">
+                  <c:v>74.213104828903397</c:v>
+                </c:pt>
+                <c:pt idx="75">
+                  <c:v>116.95341608595334</c:v>
+                </c:pt>
+                <c:pt idx="76">
+                  <c:v>81.781015682715974</c:v>
+                </c:pt>
+                <c:pt idx="77">
+                  <c:v>105.88998096447483</c:v>
+                </c:pt>
+                <c:pt idx="78">
+                  <c:v>662</c:v>
+                </c:pt>
+                <c:pt idx="79">
+                  <c:v>662</c:v>
+                </c:pt>
+                <c:pt idx="80">
+                  <c:v>75.73311147532047</c:v>
+                </c:pt>
+                <c:pt idx="81">
+                  <c:v>95.371932166452098</c:v>
+                </c:pt>
+                <c:pt idx="82">
+                  <c:v>141.93874626939498</c:v>
+                </c:pt>
+                <c:pt idx="83">
+                  <c:v>49.251033009103367</c:v>
+                </c:pt>
+                <c:pt idx="84">
+                  <c:v>55.648343204005073</c:v>
+                </c:pt>
+                <c:pt idx="85">
+                  <c:v>438.89732952056067</c:v>
+                </c:pt>
+                <c:pt idx="86">
+                  <c:v>275.08314183539909</c:v>
+                </c:pt>
+                <c:pt idx="87">
+                  <c:v>45.97227900316193</c:v>
+                </c:pt>
+                <c:pt idx="88">
+                  <c:v>157.49920271680162</c:v>
+                </c:pt>
+                <c:pt idx="89">
+                  <c:v>62.0241886727664</c:v>
+                </c:pt>
+                <c:pt idx="90">
+                  <c:v>119.06120021736422</c:v>
+                </c:pt>
+                <c:pt idx="91">
+                  <c:v>81.854669331051923</c:v>
+                </c:pt>
+                <c:pt idx="92">
+                  <c:v>374.57143597620922</c:v>
+                </c:pt>
+                <c:pt idx="93">
+                  <c:v>106.82115705569572</c:v>
+                </c:pt>
+                <c:pt idx="94">
+                  <c:v>70.24505767729454</c:v>
+                </c:pt>
+                <c:pt idx="95">
+                  <c:v>109.67904945456087</c:v>
+                </c:pt>
+                <c:pt idx="96">
+                  <c:v>108.33293239877935</c:v>
+                </c:pt>
+                <c:pt idx="97">
+                  <c:v>203.5849751480269</c:v>
+                </c:pt>
+                <c:pt idx="98">
+                  <c:v>73.02227587612947</c:v>
+                </c:pt>
+                <c:pt idx="99">
+                  <c:v>92.172563393981591</c:v>
+                </c:pt>
+                <c:pt idx="100">
+                  <c:v>79.676222883707624</c:v>
+                </c:pt>
+                <c:pt idx="101">
+                  <c:v>58.819533642099259</c:v>
+                </c:pt>
+                <c:pt idx="102">
+                  <c:v>152.68756168657109</c:v>
+                </c:pt>
+                <c:pt idx="103">
+                  <c:v>109.35800907851262</c:v>
+                </c:pt>
+                <c:pt idx="104">
+                  <c:v>420.80107775403189</c:v>
+                </c:pt>
+                <c:pt idx="105">
+                  <c:v>67.928121411242955</c:v>
+                </c:pt>
+                <c:pt idx="106">
+                  <c:v>418.93496540178779</c:v>
+                </c:pt>
+                <c:pt idx="107">
+                  <c:v>148.63362176838802</c:v>
+                </c:pt>
+                <c:pt idx="108">
+                  <c:v>529.42540134932278</c:v>
+                </c:pt>
+                <c:pt idx="109">
+                  <c:v>98.172536146483367</c:v>
+                </c:pt>
+                <c:pt idx="110">
+                  <c:v>102.81119094667156</c:v>
+                </c:pt>
+                <c:pt idx="111">
+                  <c:v>111.26785378218801</c:v>
+                </c:pt>
+                <c:pt idx="112">
+                  <c:v>404.06896149942298</c:v>
+                </c:pt>
+                <c:pt idx="113">
+                  <c:v>87.882190107054726</c:v>
+                </c:pt>
+                <c:pt idx="114">
+                  <c:v>133.99309209416379</c:v>
+                </c:pt>
+                <c:pt idx="115">
+                  <c:v>64.535472068430295</c:v>
+                </c:pt>
+                <c:pt idx="116">
+                  <c:v>172.73463362018612</c:v>
+                </c:pt>
+                <c:pt idx="117">
+                  <c:v>310.75787886813129</c:v>
+                </c:pt>
+                <c:pt idx="118">
+                  <c:v>275.32900445096271</c:v>
+                </c:pt>
+                <c:pt idx="119">
+                  <c:v>662</c:v>
+                </c:pt>
+                <c:pt idx="120">
+                  <c:v>93.620396267038586</c:v>
+                </c:pt>
+                <c:pt idx="121">
+                  <c:v>425.91435828467689</c:v>
+                </c:pt>
+                <c:pt idx="122">
+                  <c:v>112.26297510426048</c:v>
+                </c:pt>
+                <c:pt idx="123">
+                  <c:v>41.32813607807941</c:v>
+                </c:pt>
+                <c:pt idx="124">
+                  <c:v>46.52980431744777</c:v>
+                </c:pt>
+                <c:pt idx="125">
+                  <c:v>64.416044886531949</c:v>
+                </c:pt>
+                <c:pt idx="126">
+                  <c:v>435.38530513352362</c:v>
+                </c:pt>
+                <c:pt idx="127">
+                  <c:v>39.525542041312406</c:v>
+                </c:pt>
+                <c:pt idx="128">
+                  <c:v>86.851307171571079</c:v>
+                </c:pt>
+                <c:pt idx="129">
+                  <c:v>131.11939609943943</c:v>
+                </c:pt>
+              </c:numCache>
+            </c:numRef>
+          </c:yVal>
+          <c:smooth val="0"/>
+          <c:extLst>
+            <c:ext xmlns:c16="http://schemas.microsoft.com/office/drawing/2014/chart" uri="{C3380CC4-5D6E-409C-BE32-E72D297353CC}">
+              <c16:uniqueId val="{00000001-20F8-4257-9AD5-2A91FB8DC9DE}"/>
+            </c:ext>
+          </c:extLst>
+        </c:ser>
+        <c:dLbls>
+          <c:showLegendKey val="0"/>
+          <c:showVal val="0"/>
+          <c:showCatName val="0"/>
+          <c:showSerName val="0"/>
+          <c:showPercent val="0"/>
+          <c:showBubbleSize val="0"/>
+        </c:dLbls>
+        <c:axId val="1452050416"/>
+        <c:axId val="1327441520"/>
+      </c:scatterChart>
+      <c:valAx>
+        <c:axId val="1452050416"/>
+        <c:scaling>
+          <c:orientation val="minMax"/>
+        </c:scaling>
+        <c:delete val="0"/>
+        <c:axPos val="b"/>
+        <c:majorGridlines>
+          <c:spPr>
+            <a:ln w="9525" cap="flat" cmpd="sng" algn="ctr">
+              <a:solidFill>
+                <a:schemeClr val="tx1">
+                  <a:lumMod val="15000"/>
+                  <a:lumOff val="85000"/>
+                </a:schemeClr>
+              </a:solidFill>
+              <a:round/>
+            </a:ln>
+            <a:effectLst/>
+          </c:spPr>
+        </c:majorGridlines>
+        <c:title>
+          <c:tx>
+            <c:rich>
+              <a:bodyPr rot="0" spcFirstLastPara="1" vertOverflow="ellipsis" vert="horz" wrap="square" anchor="ctr" anchorCtr="1"/>
+              <a:lstStyle/>
+              <a:p>
+                <a:pPr>
+                  <a:defRPr sz="1000" b="0" i="0" u="none" strike="noStrike" kern="1200" baseline="0">
+                    <a:solidFill>
+                      <a:schemeClr val="tx1">
+                        <a:lumMod val="65000"/>
+                        <a:lumOff val="35000"/>
+                      </a:schemeClr>
+                    </a:solidFill>
+                    <a:latin typeface="+mn-lt"/>
+                    <a:ea typeface="+mn-ea"/>
+                    <a:cs typeface="+mn-cs"/>
+                  </a:defRPr>
+                </a:pPr>
+                <a:r>
+                  <a:rPr lang="en-US" sz="1000" b="0" i="0" u="none" strike="noStrike" kern="1200" baseline="0">
+                    <a:solidFill>
+                      <a:sysClr val="windowText" lastClr="000000">
+                        <a:lumMod val="65000"/>
+                        <a:lumOff val="35000"/>
+                      </a:sysClr>
+                    </a:solidFill>
+                  </a:rPr>
+                  <a:t>Compton Angle (θ) </a:t>
+                </a:r>
+              </a:p>
+            </c:rich>
+          </c:tx>
+          <c:overlay val="0"/>
+          <c:spPr>
+            <a:noFill/>
+            <a:ln>
+              <a:noFill/>
+            </a:ln>
+            <a:effectLst/>
+          </c:spPr>
+          <c:txPr>
+            <a:bodyPr rot="0" spcFirstLastPara="1" vertOverflow="ellipsis" vert="horz" wrap="square" anchor="ctr" anchorCtr="1"/>
+            <a:lstStyle/>
+            <a:p>
+              <a:pPr>
+                <a:defRPr sz="1000" b="0" i="0" u="none" strike="noStrike" kern="1200" baseline="0">
+                  <a:solidFill>
+                    <a:schemeClr val="tx1">
+                      <a:lumMod val="65000"/>
+                      <a:lumOff val="35000"/>
+                    </a:schemeClr>
+                  </a:solidFill>
+                  <a:latin typeface="+mn-lt"/>
+                  <a:ea typeface="+mn-ea"/>
+                  <a:cs typeface="+mn-cs"/>
+                </a:defRPr>
+              </a:pPr>
+              <a:endParaRPr lang="en-US"/>
+            </a:p>
+          </c:txPr>
+        </c:title>
+        <c:numFmt formatCode="General" sourceLinked="1"/>
+        <c:majorTickMark val="none"/>
+        <c:minorTickMark val="none"/>
+        <c:tickLblPos val="nextTo"/>
+        <c:spPr>
+          <a:noFill/>
+          <a:ln w="9525" cap="flat" cmpd="sng" algn="ctr">
+            <a:solidFill>
+              <a:schemeClr val="tx1">
+                <a:lumMod val="25000"/>
+                <a:lumOff val="75000"/>
+              </a:schemeClr>
+            </a:solidFill>
+            <a:round/>
+          </a:ln>
+          <a:effectLst/>
+        </c:spPr>
+        <c:txPr>
+          <a:bodyPr rot="-60000000" spcFirstLastPara="1" vertOverflow="ellipsis" vert="horz" wrap="square" anchor="ctr" anchorCtr="1"/>
+          <a:lstStyle/>
+          <a:p>
+            <a:pPr>
+              <a:defRPr sz="900" b="0" i="0" u="none" strike="noStrike" kern="1200" baseline="0">
+                <a:solidFill>
+                  <a:schemeClr val="tx1">
+                    <a:lumMod val="65000"/>
+                    <a:lumOff val="35000"/>
+                  </a:schemeClr>
+                </a:solidFill>
+                <a:latin typeface="+mn-lt"/>
+                <a:ea typeface="+mn-ea"/>
+                <a:cs typeface="+mn-cs"/>
+              </a:defRPr>
+            </a:pPr>
+            <a:endParaRPr lang="en-US"/>
+          </a:p>
+        </c:txPr>
+        <c:crossAx val="1327441520"/>
+        <c:crosses val="autoZero"/>
+        <c:crossBetween val="midCat"/>
+      </c:valAx>
+      <c:valAx>
+        <c:axId val="1327441520"/>
+        <c:scaling>
+          <c:orientation val="minMax"/>
+        </c:scaling>
+        <c:delete val="0"/>
+        <c:axPos val="l"/>
+        <c:majorGridlines>
+          <c:spPr>
+            <a:ln w="9525" cap="flat" cmpd="sng" algn="ctr">
+              <a:solidFill>
+                <a:schemeClr val="tx1">
+                  <a:lumMod val="15000"/>
+                  <a:lumOff val="85000"/>
+                </a:schemeClr>
+              </a:solidFill>
+              <a:round/>
+            </a:ln>
+            <a:effectLst/>
+          </c:spPr>
+        </c:majorGridlines>
+        <c:title>
+          <c:tx>
+            <c:rich>
+              <a:bodyPr rot="-5400000" spcFirstLastPara="1" vertOverflow="ellipsis" vert="horz" wrap="square" anchor="ctr" anchorCtr="1"/>
+              <a:lstStyle/>
+              <a:p>
+                <a:pPr>
+                  <a:defRPr sz="1000" b="0" i="0" u="none" strike="noStrike" kern="1200" baseline="0">
+                    <a:solidFill>
+                      <a:schemeClr val="tx1">
+                        <a:lumMod val="65000"/>
+                        <a:lumOff val="35000"/>
+                      </a:schemeClr>
+                    </a:solidFill>
+                    <a:latin typeface="+mn-lt"/>
+                    <a:ea typeface="+mn-ea"/>
+                    <a:cs typeface="+mn-cs"/>
+                  </a:defRPr>
+                </a:pPr>
+                <a:r>
+                  <a:rPr lang="en-US"/>
+                  <a:t>E (keV)</a:t>
+                </a:r>
+              </a:p>
+            </c:rich>
+          </c:tx>
+          <c:overlay val="0"/>
+          <c:spPr>
+            <a:noFill/>
+            <a:ln>
+              <a:noFill/>
+            </a:ln>
+            <a:effectLst/>
+          </c:spPr>
+          <c:txPr>
+            <a:bodyPr rot="-5400000" spcFirstLastPara="1" vertOverflow="ellipsis" vert="horz" wrap="square" anchor="ctr" anchorCtr="1"/>
+            <a:lstStyle/>
+            <a:p>
+              <a:pPr>
+                <a:defRPr sz="1000" b="0" i="0" u="none" strike="noStrike" kern="1200" baseline="0">
+                  <a:solidFill>
+                    <a:schemeClr val="tx1">
+                      <a:lumMod val="65000"/>
+                      <a:lumOff val="35000"/>
+                    </a:schemeClr>
+                  </a:solidFill>
+                  <a:latin typeface="+mn-lt"/>
+                  <a:ea typeface="+mn-ea"/>
+                  <a:cs typeface="+mn-cs"/>
+                </a:defRPr>
+              </a:pPr>
+              <a:endParaRPr lang="en-US"/>
+            </a:p>
+          </c:txPr>
+        </c:title>
+        <c:numFmt formatCode="General" sourceLinked="1"/>
+        <c:majorTickMark val="none"/>
+        <c:minorTickMark val="none"/>
+        <c:tickLblPos val="nextTo"/>
+        <c:spPr>
+          <a:noFill/>
+          <a:ln w="9525" cap="flat" cmpd="sng" algn="ctr">
+            <a:solidFill>
+              <a:schemeClr val="tx1">
+                <a:lumMod val="25000"/>
+                <a:lumOff val="75000"/>
+              </a:schemeClr>
+            </a:solidFill>
+            <a:round/>
+          </a:ln>
+          <a:effectLst/>
+        </c:spPr>
+        <c:txPr>
+          <a:bodyPr rot="-60000000" spcFirstLastPara="1" vertOverflow="ellipsis" vert="horz" wrap="square" anchor="ctr" anchorCtr="1"/>
+          <a:lstStyle/>
+          <a:p>
+            <a:pPr>
+              <a:defRPr sz="900" b="0" i="0" u="none" strike="noStrike" kern="1200" baseline="0">
+                <a:solidFill>
+                  <a:schemeClr val="tx1">
+                    <a:lumMod val="65000"/>
+                    <a:lumOff val="35000"/>
+                  </a:schemeClr>
+                </a:solidFill>
+                <a:latin typeface="+mn-lt"/>
+                <a:ea typeface="+mn-ea"/>
+                <a:cs typeface="+mn-cs"/>
+              </a:defRPr>
+            </a:pPr>
+            <a:endParaRPr lang="en-US"/>
+          </a:p>
+        </c:txPr>
+        <c:crossAx val="1452050416"/>
+        <c:crosses val="autoZero"/>
+        <c:crossBetween val="midCat"/>
+      </c:valAx>
+      <c:spPr>
+        <a:noFill/>
+        <a:ln>
+          <a:noFill/>
+        </a:ln>
+        <a:effectLst/>
+      </c:spPr>
+    </c:plotArea>
+    <c:legend>
+      <c:legendPos val="b"/>
+      <c:layout>
+        <c:manualLayout>
+          <c:xMode val="edge"/>
+          <c:yMode val="edge"/>
+          <c:x val="0.39574956255468069"/>
+          <c:y val="7.9281860600758258E-2"/>
+          <c:w val="0.40294510061242345"/>
+          <c:h val="7.8125546806649182E-2"/>
+        </c:manualLayout>
+      </c:layout>
+      <c:overlay val="0"/>
+      <c:spPr>
+        <a:noFill/>
+        <a:ln>
+          <a:noFill/>
+        </a:ln>
+        <a:effectLst/>
+      </c:spPr>
+      <c:txPr>
+        <a:bodyPr rot="0" spcFirstLastPara="1" vertOverflow="ellipsis" vert="horz" wrap="square" anchor="ctr" anchorCtr="1"/>
+        <a:lstStyle/>
+        <a:p>
+          <a:pPr>
+            <a:defRPr sz="900" b="0" i="0" u="none" strike="noStrike" kern="1200" baseline="0">
+              <a:solidFill>
+                <a:schemeClr val="tx1">
+                  <a:lumMod val="65000"/>
+                  <a:lumOff val="35000"/>
+                </a:schemeClr>
+              </a:solidFill>
+              <a:latin typeface="+mn-lt"/>
+              <a:ea typeface="+mn-ea"/>
+              <a:cs typeface="+mn-cs"/>
+            </a:defRPr>
+          </a:pPr>
+          <a:endParaRPr lang="en-US"/>
+        </a:p>
+      </c:txPr>
+    </c:legend>
+    <c:plotVisOnly val="1"/>
+    <c:dispBlanksAs val="gap"/>
+    <c:showDLblsOverMax val="0"/>
+    <c:extLst>
+      <c:ext xmlns:c16r3="http://schemas.microsoft.com/office/drawing/2017/03/chart" uri="{56B9EC1D-385E-4148-901F-78D8002777C0}">
+        <c16r3:dataDisplayOptions16>
+          <c16r3:dispNaAsBlank val="1"/>
+        </c16r3:dataDisplayOptions16>
+      </c:ext>
+    </c:extLst>
+  </c:chart>
+  <c:spPr>
+    <a:noFill/>
+    <a:ln>
+      <a:noFill/>
+    </a:ln>
+    <a:effectLst/>
+  </c:spPr>
+  <c:txPr>
+    <a:bodyPr/>
+    <a:lstStyle/>
+    <a:p>
+      <a:pPr>
+        <a:defRPr/>
+      </a:pPr>
+      <a:endParaRPr lang="en-US"/>
+    </a:p>
+  </c:txPr>
+  <c:externalData r:id="rId3">
+    <c:autoUpdate val="0"/>
+  </c:externalData>
+</c:chartSpace>
+</file>
+
+<file path=ppt/charts/chart3.xml><?xml version="1.0" encoding="utf-8"?>
+<c:chartSpace xmlns:c="http://schemas.openxmlformats.org/drawingml/2006/chart" xmlns:a="http://schemas.openxmlformats.org/drawingml/2006/main" xmlns:r="http://schemas.openxmlformats.org/officeDocument/2006/relationships" xmlns:c16r2="http://schemas.microsoft.com/office/drawing/2015/06/chart">
+  <c:date1904 val="0"/>
+  <c:lang val="en-US"/>
+  <c:roundedCorners val="0"/>
+  <mc:AlternateContent xmlns:mc="http://schemas.openxmlformats.org/markup-compatibility/2006">
+    <mc:Choice xmlns:c14="http://schemas.microsoft.com/office/drawing/2007/8/2/chart" Requires="c14">
+      <c14:style val="102"/>
+    </mc:Choice>
+    <mc:Fallback>
+      <c:style val="2"/>
+    </mc:Fallback>
+  </mc:AlternateContent>
+  <c:chart>
+    <c:autoTitleDeleted val="1"/>
+    <c:plotArea>
+      <c:layout>
+        <c:manualLayout>
+          <c:layoutTarget val="inner"/>
+          <c:xMode val="edge"/>
+          <c:yMode val="edge"/>
+          <c:x val="0.12703937007874017"/>
+          <c:y val="0.17129629629629628"/>
+          <c:w val="0.81229396325459313"/>
+          <c:h val="0.63759988334791484"/>
+        </c:manualLayout>
+      </c:layout>
+      <c:scatterChart>
+        <c:scatterStyle val="lineMarker"/>
+        <c:varyColors val="0"/>
+        <c:ser>
+          <c:idx val="0"/>
+          <c:order val="0"/>
+          <c:tx>
+            <c:strRef>
+              <c:f>Scatter_Volume_3!$Y$1</c:f>
+              <c:strCache>
+                <c:ptCount val="1"/>
+                <c:pt idx="0">
+                  <c:v>Energy loss </c:v>
+                </c:pt>
+              </c:strCache>
+            </c:strRef>
+          </c:tx>
+          <c:spPr>
+            <a:ln w="28575" cap="rnd">
+              <a:noFill/>
+              <a:round/>
+            </a:ln>
+            <a:effectLst/>
+          </c:spPr>
+          <c:marker>
+            <c:symbol val="circle"/>
+            <c:size val="5"/>
+            <c:spPr>
+              <a:solidFill>
+                <a:schemeClr val="accent1"/>
+              </a:solidFill>
+              <a:ln w="9525">
+                <a:solidFill>
+                  <a:schemeClr val="accent1"/>
+                </a:solidFill>
+              </a:ln>
+              <a:effectLst/>
+            </c:spPr>
+          </c:marker>
+          <c:xVal>
+            <c:numRef>
+              <c:f>Scatter_Volume_3!$R$2:$R$131</c:f>
+              <c:numCache>
+                <c:formatCode>General</c:formatCode>
+                <c:ptCount val="130"/>
+                <c:pt idx="0">
+                  <c:v>85.271925041978449</c:v>
+                </c:pt>
+                <c:pt idx="1">
+                  <c:v>40.113801646415872</c:v>
+                </c:pt>
+                <c:pt idx="2">
+                  <c:v>34.510091760395397</c:v>
+                </c:pt>
+                <c:pt idx="3">
+                  <c:v>29.73951499270169</c:v>
+                </c:pt>
+                <c:pt idx="4">
+                  <c:v>25.214725510142941</c:v>
+                </c:pt>
+                <c:pt idx="5">
+                  <c:v>23.038510252414898</c:v>
+                </c:pt>
+                <c:pt idx="6">
+                  <c:v>26.90230281151435</c:v>
+                </c:pt>
+                <c:pt idx="7">
+                  <c:v>25.704911755947698</c:v>
+                </c:pt>
+                <c:pt idx="8">
+                  <c:v>36.319635914666662</c:v>
+                </c:pt>
+                <c:pt idx="9">
+                  <c:v>34.589757190105878</c:v>
+                </c:pt>
+                <c:pt idx="10">
+                  <c:v>37.955047501562717</c:v>
+                </c:pt>
+                <c:pt idx="11">
+                  <c:v>20.803735999154121</c:v>
+                </c:pt>
+                <c:pt idx="12">
+                  <c:v>22.23281636437731</c:v>
+                </c:pt>
+                <c:pt idx="13">
+                  <c:v>19.76997252216254</c:v>
+                </c:pt>
+                <c:pt idx="14">
+                  <c:v>18.679865703706291</c:v>
+                </c:pt>
+                <c:pt idx="15">
+                  <c:v>22.1221353678024</c:v>
+                </c:pt>
+                <c:pt idx="16">
+                  <c:v>24.538279555362131</c:v>
+                </c:pt>
+                <c:pt idx="17">
+                  <c:v>38.19229930694997</c:v>
+                </c:pt>
+                <c:pt idx="18">
+                  <c:v>40.15061130973811</c:v>
+                </c:pt>
+                <c:pt idx="19">
+                  <c:v>26.657481623661329</c:v>
+                </c:pt>
+                <c:pt idx="20">
+                  <c:v>22.280227236310179</c:v>
+                </c:pt>
+                <c:pt idx="21">
+                  <c:v>32.774631231013018</c:v>
+                </c:pt>
+                <c:pt idx="22">
+                  <c:v>19.670277347808341</c:v>
+                </c:pt>
+                <c:pt idx="23">
+                  <c:v>27.686943852388641</c:v>
+                </c:pt>
+                <c:pt idx="24">
+                  <c:v>161.19653891102311</c:v>
+                </c:pt>
+                <c:pt idx="25">
+                  <c:v>18.135795108694172</c:v>
+                </c:pt>
+                <c:pt idx="26">
+                  <c:v>39.157344880337988</c:v>
+                </c:pt>
+                <c:pt idx="27">
+                  <c:v>27.063004459834509</c:v>
+                </c:pt>
+                <c:pt idx="28">
+                  <c:v>27.42341666809434</c:v>
+                </c:pt>
+                <c:pt idx="29">
+                  <c:v>33.005655181510953</c:v>
+                </c:pt>
+                <c:pt idx="30">
+                  <c:v>36.907180475570428</c:v>
+                </c:pt>
+                <c:pt idx="31">
+                  <c:v>29.778588370569281</c:v>
+                </c:pt>
+                <c:pt idx="32">
+                  <c:v>38.756064732300523</c:v>
+                </c:pt>
+                <c:pt idx="33">
+                  <c:v>36.445566699663921</c:v>
+                </c:pt>
+                <c:pt idx="34">
+                  <c:v>33.268451819972597</c:v>
+                </c:pt>
+                <c:pt idx="35">
+                  <c:v>37.656896824645642</c:v>
+                </c:pt>
+                <c:pt idx="36">
+                  <c:v>39.048238581033168</c:v>
+                </c:pt>
+                <c:pt idx="37">
+                  <c:v>27.483703168003021</c:v>
+                </c:pt>
+                <c:pt idx="38">
+                  <c:v>33.625002281693853</c:v>
+                </c:pt>
+                <c:pt idx="39">
+                  <c:v>35.444167918262359</c:v>
+                </c:pt>
+                <c:pt idx="40">
+                  <c:v>34.846434905788747</c:v>
+                </c:pt>
+                <c:pt idx="41">
+                  <c:v>28.519721175301392</c:v>
+                </c:pt>
+                <c:pt idx="42">
+                  <c:v>41.011444199575728</c:v>
+                </c:pt>
+                <c:pt idx="43">
+                  <c:v>33.596924940002069</c:v>
+                </c:pt>
+                <c:pt idx="44">
+                  <c:v>26.609302588432168</c:v>
+                </c:pt>
+                <c:pt idx="45">
+                  <c:v>30.12635164384508</c:v>
+                </c:pt>
+                <c:pt idx="46">
+                  <c:v>28.412048641459091</c:v>
+                </c:pt>
+                <c:pt idx="47">
+                  <c:v>21.368077109398619</c:v>
+                </c:pt>
+                <c:pt idx="48">
+                  <c:v>33.579930200495653</c:v>
+                </c:pt>
+                <c:pt idx="49">
+                  <c:v>25.846882605295601</c:v>
+                </c:pt>
+                <c:pt idx="50">
+                  <c:v>31.03675005453232</c:v>
+                </c:pt>
+                <c:pt idx="51">
+                  <c:v>40.345854075791912</c:v>
+                </c:pt>
+                <c:pt idx="52">
+                  <c:v>26.083067540464292</c:v>
+                </c:pt>
+                <c:pt idx="53">
+                  <c:v>23.595522705782312</c:v>
+                </c:pt>
+                <c:pt idx="54">
+                  <c:v>29.885499263251969</c:v>
+                </c:pt>
+                <c:pt idx="55">
+                  <c:v>34.272756438621897</c:v>
+                </c:pt>
+                <c:pt idx="56">
+                  <c:v>37.860553610543121</c:v>
+                </c:pt>
+                <c:pt idx="57">
+                  <c:v>25.39052981694326</c:v>
+                </c:pt>
+                <c:pt idx="58">
+                  <c:v>25.19329048282659</c:v>
+                </c:pt>
+                <c:pt idx="59">
+                  <c:v>31.13743914566858</c:v>
+                </c:pt>
+                <c:pt idx="60">
+                  <c:v>39.517471399918861</c:v>
+                </c:pt>
+                <c:pt idx="61">
+                  <c:v>28.172670302105541</c:v>
+                </c:pt>
+                <c:pt idx="62">
+                  <c:v>23.509253223739549</c:v>
+                </c:pt>
+                <c:pt idx="63">
+                  <c:v>39.590712229903559</c:v>
+                </c:pt>
+                <c:pt idx="64">
+                  <c:v>34.142328458577481</c:v>
+                </c:pt>
+                <c:pt idx="65">
+                  <c:v>27.63099444532633</c:v>
+                </c:pt>
+                <c:pt idx="66">
+                  <c:v>22.824480006289409</c:v>
+                </c:pt>
+                <c:pt idx="67">
+                  <c:v>39.527846148805217</c:v>
+                </c:pt>
+                <c:pt idx="68">
+                  <c:v>27.65838576169136</c:v>
+                </c:pt>
+                <c:pt idx="69">
+                  <c:v>26.115515152060588</c:v>
+                </c:pt>
+                <c:pt idx="70">
+                  <c:v>26.573229755810289</c:v>
+                </c:pt>
+                <c:pt idx="71">
+                  <c:v>21.498115585860909</c:v>
+                </c:pt>
+                <c:pt idx="72">
+                  <c:v>31.36297747542746</c:v>
+                </c:pt>
+                <c:pt idx="73">
+                  <c:v>32.325348693621883</c:v>
+                </c:pt>
+                <c:pt idx="74">
+                  <c:v>25.50591503832953</c:v>
+                </c:pt>
+                <c:pt idx="75">
+                  <c:v>33.449794901117329</c:v>
+                </c:pt>
+                <c:pt idx="76">
+                  <c:v>26.97537140940435</c:v>
+                </c:pt>
+                <c:pt idx="77">
+                  <c:v>31.45824518663073</c:v>
+                </c:pt>
+                <c:pt idx="78">
+                  <c:v>127.26176888017839</c:v>
+                </c:pt>
+                <c:pt idx="79">
+                  <c:v>29.960227664197419</c:v>
+                </c:pt>
+                <c:pt idx="80">
+                  <c:v>25.804201405217899</c:v>
+                </c:pt>
+                <c:pt idx="81">
+                  <c:v>29.532357193363751</c:v>
+                </c:pt>
+                <c:pt idx="82">
+                  <c:v>37.877317563658828</c:v>
+                </c:pt>
+                <c:pt idx="83">
+                  <c:v>20.288802203686359</c:v>
+                </c:pt>
+                <c:pt idx="84">
+                  <c:v>21.69602997307209</c:v>
+                </c:pt>
+                <c:pt idx="85">
+                  <c:v>32.193966412460803</c:v>
+                </c:pt>
+                <c:pt idx="86">
+                  <c:v>24.485470718059581</c:v>
+                </c:pt>
+                <c:pt idx="87">
+                  <c:v>19.54220962985837</c:v>
+                </c:pt>
+                <c:pt idx="88">
+                  <c:v>40.621998030946372</c:v>
+                </c:pt>
+                <c:pt idx="89">
+                  <c:v>23.04429730110758</c:v>
+                </c:pt>
+                <c:pt idx="90">
+                  <c:v>33.826255036635558</c:v>
+                </c:pt>
+                <c:pt idx="91">
+                  <c:v>26.98949102355423</c:v>
+                </c:pt>
+                <c:pt idx="92">
+                  <c:v>28.95189597293092</c:v>
+                </c:pt>
+                <c:pt idx="93">
+                  <c:v>31.627043775729181</c:v>
+                </c:pt>
+                <c:pt idx="94">
+                  <c:v>24.718886694821709</c:v>
+                </c:pt>
+                <c:pt idx="95">
+                  <c:v>32.143638268890612</c:v>
+                </c:pt>
+                <c:pt idx="96">
+                  <c:v>31.900581479560529</c:v>
+                </c:pt>
+                <c:pt idx="97">
+                  <c:v>24.230919688461238</c:v>
+                </c:pt>
+                <c:pt idx="98">
+                  <c:v>25.271024233694561</c:v>
+                </c:pt>
+                <c:pt idx="99">
+                  <c:v>28.938347705634332</c:v>
+                </c:pt>
+                <c:pt idx="100">
+                  <c:v>26.570474610181542</c:v>
+                </c:pt>
+                <c:pt idx="101">
+                  <c:v>22.372698617138351</c:v>
+                </c:pt>
+                <c:pt idx="102">
+                  <c:v>39.772523313064333</c:v>
+                </c:pt>
+                <c:pt idx="103">
+                  <c:v>32.085712845885261</c:v>
+                </c:pt>
+                <c:pt idx="104">
+                  <c:v>24.62806519368872</c:v>
+                </c:pt>
+                <c:pt idx="105">
+                  <c:v>24.25332070650153</c:v>
+                </c:pt>
+                <c:pt idx="106">
+                  <c:v>18.83519776676382</c:v>
+                </c:pt>
+                <c:pt idx="107">
+                  <c:v>39.057561447114992</c:v>
+                </c:pt>
+                <c:pt idx="108">
+                  <c:v>122.03214876758661</c:v>
+                </c:pt>
+                <c:pt idx="109">
+                  <c:v>30.048941980505251</c:v>
+                </c:pt>
+                <c:pt idx="110">
+                  <c:v>30.898326844651471</c:v>
+                </c:pt>
+                <c:pt idx="111">
+                  <c:v>32.429932298872878</c:v>
+                </c:pt>
+                <c:pt idx="112">
+                  <c:v>43.550184316118951</c:v>
+                </c:pt>
+                <c:pt idx="113">
+                  <c:v>28.13458983622041</c:v>
+                </c:pt>
+                <c:pt idx="114">
+                  <c:v>36.475284509600911</c:v>
+                </c:pt>
+                <c:pt idx="115">
+                  <c:v>23.562781122051881</c:v>
+                </c:pt>
+                <c:pt idx="116">
+                  <c:v>32.048305923728442</c:v>
+                </c:pt>
+                <c:pt idx="117">
+                  <c:v>24.170193118832621</c:v>
+                </c:pt>
+                <c:pt idx="118">
+                  <c:v>32.978762861378961</c:v>
+                </c:pt>
+                <c:pt idx="119">
+                  <c:v>56.773398189593067</c:v>
+                </c:pt>
+                <c:pt idx="120">
+                  <c:v>29.207694211572331</c:v>
+                </c:pt>
+                <c:pt idx="121">
+                  <c:v>26.126045757779419</c:v>
+                </c:pt>
+                <c:pt idx="122">
+                  <c:v>32.608941642894692</c:v>
+                </c:pt>
+                <c:pt idx="123">
+                  <c:v>18.449662959810151</c:v>
+                </c:pt>
+                <c:pt idx="124">
+                  <c:v>19.670512035485238</c:v>
+                </c:pt>
+                <c:pt idx="125">
+                  <c:v>23.538270443896149</c:v>
+                </c:pt>
+                <c:pt idx="126">
+                  <c:v>36.998162786984473</c:v>
+                </c:pt>
+                <c:pt idx="127">
+                  <c:v>18.01303108739264</c:v>
+                </c:pt>
+                <c:pt idx="128">
+                  <c:v>27.94013016601756</c:v>
+                </c:pt>
+                <c:pt idx="129">
+                  <c:v>35.967323676734203</c:v>
+                </c:pt>
+              </c:numCache>
+            </c:numRef>
+          </c:xVal>
+          <c:yVal>
+            <c:numRef>
+              <c:f>Scatter_Volume_3!$Y$2:$Y$131</c:f>
+              <c:numCache>
+                <c:formatCode>General</c:formatCode>
+                <c:ptCount val="130"/>
+                <c:pt idx="0">
+                  <c:v>491.96384939543969</c:v>
+                </c:pt>
+                <c:pt idx="1">
+                  <c:v>491.96384939543969</c:v>
+                </c:pt>
+                <c:pt idx="2">
+                  <c:v>219.65515971351732</c:v>
+                </c:pt>
+                <c:pt idx="3">
+                  <c:v>277.52546925855711</c:v>
+                </c:pt>
+                <c:pt idx="4">
+                  <c:v>72.737673864643853</c:v>
+                </c:pt>
+                <c:pt idx="5">
+                  <c:v>61.996339083703333</c:v>
+                </c:pt>
+                <c:pt idx="6">
+                  <c:v>81.400131718235684</c:v>
+                </c:pt>
+                <c:pt idx="7">
+                  <c:v>75.226197742441286</c:v>
+                </c:pt>
+                <c:pt idx="8">
+                  <c:v>463.25201365919406</c:v>
+                </c:pt>
+                <c:pt idx="9">
+                  <c:v>123.34878767378359</c:v>
+                </c:pt>
+                <c:pt idx="10">
+                  <c:v>142.37961970139577</c:v>
+                </c:pt>
+                <c:pt idx="11">
+                  <c:v>51.559880004690285</c:v>
+                </c:pt>
+                <c:pt idx="12">
+                  <c:v>58.159140985727959</c:v>
+                </c:pt>
+                <c:pt idx="13">
+                  <c:v>48.5546461982658</c:v>
+                </c:pt>
+                <c:pt idx="14">
+                  <c:v>42.290985394646214</c:v>
+                </c:pt>
+                <c:pt idx="15">
+                  <c:v>57.638378127224314</c:v>
+                </c:pt>
+                <c:pt idx="16">
+                  <c:v>69.343494101270153</c:v>
+                </c:pt>
+                <c:pt idx="17">
+                  <c:v>143.72538251018807</c:v>
+                </c:pt>
+                <c:pt idx="18">
+                  <c:v>475.75773758416108</c:v>
+                </c:pt>
+                <c:pt idx="19">
+                  <c:v>80.127309600167905</c:v>
+                </c:pt>
+                <c:pt idx="20">
+                  <c:v>58.382692025320921</c:v>
+                </c:pt>
+                <c:pt idx="21">
+                  <c:v>662</c:v>
+                </c:pt>
+                <c:pt idx="22">
+                  <c:v>46.528782230479464</c:v>
+                </c:pt>
+                <c:pt idx="23">
+                  <c:v>85.513457744017842</c:v>
+                </c:pt>
+                <c:pt idx="24">
+                  <c:v>662</c:v>
+                </c:pt>
+                <c:pt idx="25">
+                  <c:v>40.029198525290212</c:v>
+                </c:pt>
+                <c:pt idx="26">
+                  <c:v>149.19955770621857</c:v>
+                </c:pt>
+                <c:pt idx="27">
+                  <c:v>216.54049910481552</c:v>
+                </c:pt>
+                <c:pt idx="28">
+                  <c:v>459.95337184495031</c:v>
+                </c:pt>
+                <c:pt idx="29">
+                  <c:v>114.47273726160699</c:v>
+                </c:pt>
+                <c:pt idx="30">
+                  <c:v>136.43898788114166</c:v>
+                </c:pt>
+                <c:pt idx="31">
+                  <c:v>96.704804815367538</c:v>
+                </c:pt>
+                <c:pt idx="32">
+                  <c:v>301.37457031408218</c:v>
+                </c:pt>
+                <c:pt idx="33">
+                  <c:v>133.82487363176074</c:v>
+                </c:pt>
+                <c:pt idx="34">
+                  <c:v>115.93972816067378</c:v>
+                </c:pt>
+                <c:pt idx="35">
+                  <c:v>140.68867653494169</c:v>
+                </c:pt>
+                <c:pt idx="36">
+                  <c:v>408.63950519707561</c:v>
+                </c:pt>
+                <c:pt idx="37">
+                  <c:v>84.443177694930341</c:v>
+                </c:pt>
+                <c:pt idx="38">
+                  <c:v>115.06477538057482</c:v>
+                </c:pt>
+                <c:pt idx="39">
+                  <c:v>373.5989833301449</c:v>
+                </c:pt>
+                <c:pt idx="40">
+                  <c:v>124.79362045884409</c:v>
+                </c:pt>
+                <c:pt idx="41">
+                  <c:v>89.932196314746875</c:v>
+                </c:pt>
+                <c:pt idx="42">
+                  <c:v>159.7024665801062</c:v>
+                </c:pt>
+                <c:pt idx="43">
+                  <c:v>117.77665579012978</c:v>
+                </c:pt>
+                <c:pt idx="44">
+                  <c:v>79.877443482593662</c:v>
+                </c:pt>
+                <c:pt idx="45">
+                  <c:v>98.593591519873257</c:v>
+                </c:pt>
+                <c:pt idx="46">
+                  <c:v>662</c:v>
+                </c:pt>
+                <c:pt idx="47">
+                  <c:v>54.133062682945706</c:v>
+                </c:pt>
+                <c:pt idx="48">
+                  <c:v>117.68152905061424</c:v>
+                </c:pt>
+                <c:pt idx="49">
+                  <c:v>271.45330434108041</c:v>
+                </c:pt>
+                <c:pt idx="50">
+                  <c:v>121.68652603242265</c:v>
+                </c:pt>
+                <c:pt idx="51">
+                  <c:v>471.54423748221086</c:v>
+                </c:pt>
+                <c:pt idx="52">
+                  <c:v>77.161836666098679</c:v>
+                </c:pt>
+                <c:pt idx="53">
+                  <c:v>247.74183189140149</c:v>
+                </c:pt>
+                <c:pt idx="54">
+                  <c:v>310.11483817440921</c:v>
+                </c:pt>
+                <c:pt idx="55">
+                  <c:v>420.2706589582919</c:v>
+                </c:pt>
+                <c:pt idx="56">
+                  <c:v>141.84366616817636</c:v>
+                </c:pt>
+                <c:pt idx="57">
+                  <c:v>218.14486890324088</c:v>
+                </c:pt>
+                <c:pt idx="58">
+                  <c:v>72.629398995597398</c:v>
+                </c:pt>
+                <c:pt idx="59">
+                  <c:v>104.12405559604372</c:v>
+                </c:pt>
+                <c:pt idx="60">
+                  <c:v>151.24170350864551</c:v>
+                </c:pt>
+                <c:pt idx="61">
+                  <c:v>286.09453677031132</c:v>
+                </c:pt>
+                <c:pt idx="62">
+                  <c:v>64.274749689168175</c:v>
+                </c:pt>
+                <c:pt idx="63">
+                  <c:v>151.65694017169102</c:v>
+                </c:pt>
+                <c:pt idx="64">
+                  <c:v>120.83420991302967</c:v>
+                </c:pt>
+                <c:pt idx="65">
+                  <c:v>85.218495880972569</c:v>
+                </c:pt>
+                <c:pt idx="66">
+                  <c:v>60.969184967158867</c:v>
+                </c:pt>
+                <c:pt idx="67">
+                  <c:v>454.27294125035314</c:v>
+                </c:pt>
+                <c:pt idx="68">
+                  <c:v>85.362870267034737</c:v>
+                </c:pt>
+                <c:pt idx="69">
+                  <c:v>93.233450441127729</c:v>
+                </c:pt>
+                <c:pt idx="70">
+                  <c:v>442.9692237350763</c:v>
+                </c:pt>
+                <c:pt idx="71">
+                  <c:v>54.732168855152963</c:v>
+                </c:pt>
+                <c:pt idx="72">
+                  <c:v>105.3650384231122</c:v>
+                </c:pt>
+                <c:pt idx="73">
+                  <c:v>110.68706689658734</c:v>
+                </c:pt>
+                <c:pt idx="74">
+                  <c:v>74.213104828903397</c:v>
+                </c:pt>
+                <c:pt idx="75">
+                  <c:v>116.95341608595334</c:v>
+                </c:pt>
+                <c:pt idx="76">
+                  <c:v>81.781015682715974</c:v>
+                </c:pt>
+                <c:pt idx="77">
+                  <c:v>105.88998096447483</c:v>
+                </c:pt>
+                <c:pt idx="78">
+                  <c:v>662</c:v>
+                </c:pt>
+                <c:pt idx="79">
+                  <c:v>662</c:v>
+                </c:pt>
+                <c:pt idx="80">
+                  <c:v>75.73311147532047</c:v>
+                </c:pt>
+                <c:pt idx="81">
+                  <c:v>95.371932166452098</c:v>
+                </c:pt>
+                <c:pt idx="82">
+                  <c:v>141.93874626939498</c:v>
+                </c:pt>
+                <c:pt idx="83">
+                  <c:v>49.251033009103367</c:v>
+                </c:pt>
+                <c:pt idx="84">
+                  <c:v>55.648343204005073</c:v>
+                </c:pt>
+                <c:pt idx="85">
+                  <c:v>438.89732952056067</c:v>
+                </c:pt>
+                <c:pt idx="86">
+                  <c:v>275.08314183539909</c:v>
+                </c:pt>
+                <c:pt idx="87">
+                  <c:v>45.97227900316193</c:v>
+                </c:pt>
+                <c:pt idx="88">
+                  <c:v>157.49920271680162</c:v>
+                </c:pt>
+                <c:pt idx="89">
+                  <c:v>62.0241886727664</c:v>
+                </c:pt>
+                <c:pt idx="90">
+                  <c:v>119.06120021736422</c:v>
+                </c:pt>
+                <c:pt idx="91">
+                  <c:v>81.854669331051923</c:v>
+                </c:pt>
+                <c:pt idx="92">
+                  <c:v>374.57143597620922</c:v>
+                </c:pt>
+                <c:pt idx="93">
+                  <c:v>106.82115705569572</c:v>
+                </c:pt>
+                <c:pt idx="94">
+                  <c:v>70.24505767729454</c:v>
+                </c:pt>
+                <c:pt idx="95">
+                  <c:v>109.67904945456087</c:v>
+                </c:pt>
+                <c:pt idx="96">
+                  <c:v>108.33293239877935</c:v>
+                </c:pt>
+                <c:pt idx="97">
+                  <c:v>203.5849751480269</c:v>
+                </c:pt>
+                <c:pt idx="98">
+                  <c:v>73.02227587612947</c:v>
+                </c:pt>
+                <c:pt idx="99">
+                  <c:v>92.172563393981591</c:v>
+                </c:pt>
+                <c:pt idx="100">
+                  <c:v>79.676222883707624</c:v>
+                </c:pt>
+                <c:pt idx="101">
+                  <c:v>58.819533642099259</c:v>
+                </c:pt>
+                <c:pt idx="102">
+                  <c:v>152.68756168657109</c:v>
+                </c:pt>
+                <c:pt idx="103">
+                  <c:v>109.35800907851262</c:v>
+                </c:pt>
+                <c:pt idx="104">
+                  <c:v>420.80107775403189</c:v>
+                </c:pt>
+                <c:pt idx="105">
+                  <c:v>67.928121411242955</c:v>
+                </c:pt>
+                <c:pt idx="106">
+                  <c:v>418.93496540178779</c:v>
+                </c:pt>
+                <c:pt idx="107">
+                  <c:v>148.63362176838802</c:v>
+                </c:pt>
+                <c:pt idx="108">
+                  <c:v>529.42540134932278</c:v>
+                </c:pt>
+                <c:pt idx="109">
+                  <c:v>98.172536146483367</c:v>
+                </c:pt>
+                <c:pt idx="110">
+                  <c:v>102.81119094667156</c:v>
+                </c:pt>
+                <c:pt idx="111">
+                  <c:v>111.26785378218801</c:v>
+                </c:pt>
+                <c:pt idx="112">
+                  <c:v>404.06896149942298</c:v>
+                </c:pt>
+                <c:pt idx="113">
+                  <c:v>87.882190107054726</c:v>
+                </c:pt>
+                <c:pt idx="114">
+                  <c:v>133.99309209416379</c:v>
+                </c:pt>
+                <c:pt idx="115">
+                  <c:v>64.535472068430295</c:v>
+                </c:pt>
+                <c:pt idx="116">
+                  <c:v>172.73463362018612</c:v>
+                </c:pt>
+                <c:pt idx="117">
+                  <c:v>310.75787886813129</c:v>
+                </c:pt>
+                <c:pt idx="118">
+                  <c:v>275.32900445096271</c:v>
+                </c:pt>
+                <c:pt idx="119">
+                  <c:v>662</c:v>
+                </c:pt>
+                <c:pt idx="120">
+                  <c:v>93.620396267038586</c:v>
+                </c:pt>
+                <c:pt idx="121">
+                  <c:v>425.91435828467689</c:v>
+                </c:pt>
+                <c:pt idx="122">
+                  <c:v>112.26297510426048</c:v>
+                </c:pt>
+                <c:pt idx="123">
+                  <c:v>41.32813607807941</c:v>
+                </c:pt>
+                <c:pt idx="124">
+                  <c:v>46.52980431744777</c:v>
+                </c:pt>
+                <c:pt idx="125">
+                  <c:v>64.416044886531949</c:v>
+                </c:pt>
+                <c:pt idx="126">
+                  <c:v>435.38530513352362</c:v>
+                </c:pt>
+                <c:pt idx="127">
+                  <c:v>39.525542041312406</c:v>
+                </c:pt>
+                <c:pt idx="128">
+                  <c:v>86.851307171571079</c:v>
+                </c:pt>
+                <c:pt idx="129">
+                  <c:v>131.11939609943943</c:v>
+                </c:pt>
+              </c:numCache>
+            </c:numRef>
+          </c:yVal>
+          <c:smooth val="0"/>
+          <c:extLst>
+            <c:ext xmlns:c16="http://schemas.microsoft.com/office/drawing/2014/chart" uri="{C3380CC4-5D6E-409C-BE32-E72D297353CC}">
+              <c16:uniqueId val="{00000000-6F00-471F-B0DF-FC6834429BE4}"/>
+            </c:ext>
+          </c:extLst>
+        </c:ser>
+        <c:ser>
+          <c:idx val="1"/>
+          <c:order val="1"/>
+          <c:tx>
+            <c:strRef>
+              <c:f>Scatter_Volume_3!$Z$1</c:f>
+              <c:strCache>
+                <c:ptCount val="1"/>
+                <c:pt idx="0">
+                  <c:v>Calculated E'(KN formula)</c:v>
+                </c:pt>
+              </c:strCache>
+            </c:strRef>
+          </c:tx>
+          <c:spPr>
+            <a:ln w="28575" cap="rnd">
+              <a:noFill/>
+              <a:round/>
+            </a:ln>
+            <a:effectLst/>
+          </c:spPr>
+          <c:marker>
+            <c:symbol val="circle"/>
+            <c:size val="5"/>
+            <c:spPr>
+              <a:solidFill>
+                <a:schemeClr val="accent2"/>
+              </a:solidFill>
+              <a:ln w="9525">
+                <a:solidFill>
+                  <a:schemeClr val="accent2"/>
+                </a:solidFill>
+              </a:ln>
+              <a:effectLst/>
+            </c:spPr>
+          </c:marker>
+          <c:xVal>
+            <c:numRef>
+              <c:f>Scatter_Volume_3!$R$2:$R$131</c:f>
+              <c:numCache>
+                <c:formatCode>General</c:formatCode>
+                <c:ptCount val="130"/>
+                <c:pt idx="0">
+                  <c:v>85.271925041978449</c:v>
+                </c:pt>
+                <c:pt idx="1">
+                  <c:v>40.113801646415872</c:v>
+                </c:pt>
+                <c:pt idx="2">
+                  <c:v>34.510091760395397</c:v>
+                </c:pt>
+                <c:pt idx="3">
+                  <c:v>29.73951499270169</c:v>
+                </c:pt>
+                <c:pt idx="4">
+                  <c:v>25.214725510142941</c:v>
+                </c:pt>
+                <c:pt idx="5">
+                  <c:v>23.038510252414898</c:v>
+                </c:pt>
+                <c:pt idx="6">
+                  <c:v>26.90230281151435</c:v>
+                </c:pt>
+                <c:pt idx="7">
+                  <c:v>25.704911755947698</c:v>
+                </c:pt>
+                <c:pt idx="8">
+                  <c:v>36.319635914666662</c:v>
+                </c:pt>
+                <c:pt idx="9">
+                  <c:v>34.589757190105878</c:v>
+                </c:pt>
+                <c:pt idx="10">
+                  <c:v>37.955047501562717</c:v>
+                </c:pt>
+                <c:pt idx="11">
+                  <c:v>20.803735999154121</c:v>
+                </c:pt>
+                <c:pt idx="12">
+                  <c:v>22.23281636437731</c:v>
+                </c:pt>
+                <c:pt idx="13">
+                  <c:v>19.76997252216254</c:v>
+                </c:pt>
+                <c:pt idx="14">
+                  <c:v>18.679865703706291</c:v>
+                </c:pt>
+                <c:pt idx="15">
+                  <c:v>22.1221353678024</c:v>
+                </c:pt>
+                <c:pt idx="16">
+                  <c:v>24.538279555362131</c:v>
+                </c:pt>
+                <c:pt idx="17">
+                  <c:v>38.19229930694997</c:v>
+                </c:pt>
+                <c:pt idx="18">
+                  <c:v>40.15061130973811</c:v>
+                </c:pt>
+                <c:pt idx="19">
+                  <c:v>26.657481623661329</c:v>
+                </c:pt>
+                <c:pt idx="20">
+                  <c:v>22.280227236310179</c:v>
+                </c:pt>
+                <c:pt idx="21">
+                  <c:v>32.774631231013018</c:v>
+                </c:pt>
+                <c:pt idx="22">
+                  <c:v>19.670277347808341</c:v>
+                </c:pt>
+                <c:pt idx="23">
+                  <c:v>27.686943852388641</c:v>
+                </c:pt>
+                <c:pt idx="24">
+                  <c:v>161.19653891102311</c:v>
+                </c:pt>
+                <c:pt idx="25">
+                  <c:v>18.135795108694172</c:v>
+                </c:pt>
+                <c:pt idx="26">
+                  <c:v>39.157344880337988</c:v>
+                </c:pt>
+                <c:pt idx="27">
+                  <c:v>27.063004459834509</c:v>
+                </c:pt>
+                <c:pt idx="28">
+                  <c:v>27.42341666809434</c:v>
+                </c:pt>
+                <c:pt idx="29">
+                  <c:v>33.005655181510953</c:v>
+                </c:pt>
+                <c:pt idx="30">
+                  <c:v>36.907180475570428</c:v>
+                </c:pt>
+                <c:pt idx="31">
+                  <c:v>29.778588370569281</c:v>
+                </c:pt>
+                <c:pt idx="32">
+                  <c:v>38.756064732300523</c:v>
+                </c:pt>
+                <c:pt idx="33">
+                  <c:v>36.445566699663921</c:v>
+                </c:pt>
+                <c:pt idx="34">
+                  <c:v>33.268451819972597</c:v>
+                </c:pt>
+                <c:pt idx="35">
+                  <c:v>37.656896824645642</c:v>
+                </c:pt>
+                <c:pt idx="36">
+                  <c:v>39.048238581033168</c:v>
+                </c:pt>
+                <c:pt idx="37">
+                  <c:v>27.483703168003021</c:v>
+                </c:pt>
+                <c:pt idx="38">
+                  <c:v>33.625002281693853</c:v>
+                </c:pt>
+                <c:pt idx="39">
+                  <c:v>35.444167918262359</c:v>
+                </c:pt>
+                <c:pt idx="40">
+                  <c:v>34.846434905788747</c:v>
+                </c:pt>
+                <c:pt idx="41">
+                  <c:v>28.519721175301392</c:v>
+                </c:pt>
+                <c:pt idx="42">
+                  <c:v>41.011444199575728</c:v>
+                </c:pt>
+                <c:pt idx="43">
+                  <c:v>33.596924940002069</c:v>
+                </c:pt>
+                <c:pt idx="44">
+                  <c:v>26.609302588432168</c:v>
+                </c:pt>
+                <c:pt idx="45">
+                  <c:v>30.12635164384508</c:v>
+                </c:pt>
+                <c:pt idx="46">
+                  <c:v>28.412048641459091</c:v>
+                </c:pt>
+                <c:pt idx="47">
+                  <c:v>21.368077109398619</c:v>
+                </c:pt>
+                <c:pt idx="48">
+                  <c:v>33.579930200495653</c:v>
+                </c:pt>
+                <c:pt idx="49">
+                  <c:v>25.846882605295601</c:v>
+                </c:pt>
+                <c:pt idx="50">
+                  <c:v>31.03675005453232</c:v>
+                </c:pt>
+                <c:pt idx="51">
+                  <c:v>40.345854075791912</c:v>
+                </c:pt>
+                <c:pt idx="52">
+                  <c:v>26.083067540464292</c:v>
+                </c:pt>
+                <c:pt idx="53">
+                  <c:v>23.595522705782312</c:v>
+                </c:pt>
+                <c:pt idx="54">
+                  <c:v>29.885499263251969</c:v>
+                </c:pt>
+                <c:pt idx="55">
+                  <c:v>34.272756438621897</c:v>
+                </c:pt>
+                <c:pt idx="56">
+                  <c:v>37.860553610543121</c:v>
+                </c:pt>
+                <c:pt idx="57">
+                  <c:v>25.39052981694326</c:v>
+                </c:pt>
+                <c:pt idx="58">
+                  <c:v>25.19329048282659</c:v>
+                </c:pt>
+                <c:pt idx="59">
+                  <c:v>31.13743914566858</c:v>
+                </c:pt>
+                <c:pt idx="60">
+                  <c:v>39.517471399918861</c:v>
+                </c:pt>
+                <c:pt idx="61">
+                  <c:v>28.172670302105541</c:v>
+                </c:pt>
+                <c:pt idx="62">
+                  <c:v>23.509253223739549</c:v>
+                </c:pt>
+                <c:pt idx="63">
+                  <c:v>39.590712229903559</c:v>
+                </c:pt>
+                <c:pt idx="64">
+                  <c:v>34.142328458577481</c:v>
+                </c:pt>
+                <c:pt idx="65">
+                  <c:v>27.63099444532633</c:v>
+                </c:pt>
+                <c:pt idx="66">
+                  <c:v>22.824480006289409</c:v>
+                </c:pt>
+                <c:pt idx="67">
+                  <c:v>39.527846148805217</c:v>
+                </c:pt>
+                <c:pt idx="68">
+                  <c:v>27.65838576169136</c:v>
+                </c:pt>
+                <c:pt idx="69">
+                  <c:v>26.115515152060588</c:v>
+                </c:pt>
+                <c:pt idx="70">
+                  <c:v>26.573229755810289</c:v>
+                </c:pt>
+                <c:pt idx="71">
+                  <c:v>21.498115585860909</c:v>
+                </c:pt>
+                <c:pt idx="72">
+                  <c:v>31.36297747542746</c:v>
+                </c:pt>
+                <c:pt idx="73">
+                  <c:v>32.325348693621883</c:v>
+                </c:pt>
+                <c:pt idx="74">
+                  <c:v>25.50591503832953</c:v>
+                </c:pt>
+                <c:pt idx="75">
+                  <c:v>33.449794901117329</c:v>
+                </c:pt>
+                <c:pt idx="76">
+                  <c:v>26.97537140940435</c:v>
+                </c:pt>
+                <c:pt idx="77">
+                  <c:v>31.45824518663073</c:v>
+                </c:pt>
+                <c:pt idx="78">
+                  <c:v>127.26176888017839</c:v>
+                </c:pt>
+                <c:pt idx="79">
+                  <c:v>29.960227664197419</c:v>
+                </c:pt>
+                <c:pt idx="80">
+                  <c:v>25.804201405217899</c:v>
+                </c:pt>
+                <c:pt idx="81">
+                  <c:v>29.532357193363751</c:v>
+                </c:pt>
+                <c:pt idx="82">
+                  <c:v>37.877317563658828</c:v>
+                </c:pt>
+                <c:pt idx="83">
+                  <c:v>20.288802203686359</c:v>
+                </c:pt>
+                <c:pt idx="84">
+                  <c:v>21.69602997307209</c:v>
+                </c:pt>
+                <c:pt idx="85">
+                  <c:v>32.193966412460803</c:v>
+                </c:pt>
+                <c:pt idx="86">
+                  <c:v>24.485470718059581</c:v>
+                </c:pt>
+                <c:pt idx="87">
+                  <c:v>19.54220962985837</c:v>
+                </c:pt>
+                <c:pt idx="88">
+                  <c:v>40.621998030946372</c:v>
+                </c:pt>
+                <c:pt idx="89">
+                  <c:v>23.04429730110758</c:v>
+                </c:pt>
+                <c:pt idx="90">
+                  <c:v>33.826255036635558</c:v>
+                </c:pt>
+                <c:pt idx="91">
+                  <c:v>26.98949102355423</c:v>
+                </c:pt>
+                <c:pt idx="92">
+                  <c:v>28.95189597293092</c:v>
+                </c:pt>
+                <c:pt idx="93">
+                  <c:v>31.627043775729181</c:v>
+                </c:pt>
+                <c:pt idx="94">
+                  <c:v>24.718886694821709</c:v>
+                </c:pt>
+                <c:pt idx="95">
+                  <c:v>32.143638268890612</c:v>
+                </c:pt>
+                <c:pt idx="96">
+                  <c:v>31.900581479560529</c:v>
+                </c:pt>
+                <c:pt idx="97">
+                  <c:v>24.230919688461238</c:v>
+                </c:pt>
+                <c:pt idx="98">
+                  <c:v>25.271024233694561</c:v>
+                </c:pt>
+                <c:pt idx="99">
+                  <c:v>28.938347705634332</c:v>
+                </c:pt>
+                <c:pt idx="100">
+                  <c:v>26.570474610181542</c:v>
+                </c:pt>
+                <c:pt idx="101">
+                  <c:v>22.372698617138351</c:v>
+                </c:pt>
+                <c:pt idx="102">
+                  <c:v>39.772523313064333</c:v>
+                </c:pt>
+                <c:pt idx="103">
+                  <c:v>32.085712845885261</c:v>
+                </c:pt>
+                <c:pt idx="104">
+                  <c:v>24.62806519368872</c:v>
+                </c:pt>
+                <c:pt idx="105">
+                  <c:v>24.25332070650153</c:v>
+                </c:pt>
+                <c:pt idx="106">
+                  <c:v>18.83519776676382</c:v>
+                </c:pt>
+                <c:pt idx="107">
+                  <c:v>39.057561447114992</c:v>
+                </c:pt>
+                <c:pt idx="108">
+                  <c:v>122.03214876758661</c:v>
+                </c:pt>
+                <c:pt idx="109">
+                  <c:v>30.048941980505251</c:v>
+                </c:pt>
+                <c:pt idx="110">
+                  <c:v>30.898326844651471</c:v>
+                </c:pt>
+                <c:pt idx="111">
+                  <c:v>32.429932298872878</c:v>
+                </c:pt>
+                <c:pt idx="112">
+                  <c:v>43.550184316118951</c:v>
+                </c:pt>
+                <c:pt idx="113">
+                  <c:v>28.13458983622041</c:v>
+                </c:pt>
+                <c:pt idx="114">
+                  <c:v>36.475284509600911</c:v>
+                </c:pt>
+                <c:pt idx="115">
+                  <c:v>23.562781122051881</c:v>
+                </c:pt>
+                <c:pt idx="116">
+                  <c:v>32.048305923728442</c:v>
+                </c:pt>
+                <c:pt idx="117">
+                  <c:v>24.170193118832621</c:v>
+                </c:pt>
+                <c:pt idx="118">
+                  <c:v>32.978762861378961</c:v>
+                </c:pt>
+                <c:pt idx="119">
+                  <c:v>56.773398189593067</c:v>
+                </c:pt>
+                <c:pt idx="120">
+                  <c:v>29.207694211572331</c:v>
+                </c:pt>
+                <c:pt idx="121">
+                  <c:v>26.126045757779419</c:v>
+                </c:pt>
+                <c:pt idx="122">
+                  <c:v>32.608941642894692</c:v>
+                </c:pt>
+                <c:pt idx="123">
+                  <c:v>18.449662959810151</c:v>
+                </c:pt>
+                <c:pt idx="124">
+                  <c:v>19.670512035485238</c:v>
+                </c:pt>
+                <c:pt idx="125">
+                  <c:v>23.538270443896149</c:v>
+                </c:pt>
+                <c:pt idx="126">
+                  <c:v>36.998162786984473</c:v>
+                </c:pt>
+                <c:pt idx="127">
+                  <c:v>18.01303108739264</c:v>
+                </c:pt>
+                <c:pt idx="128">
+                  <c:v>27.94013016601756</c:v>
+                </c:pt>
+                <c:pt idx="129">
+                  <c:v>35.967323676734203</c:v>
+                </c:pt>
+              </c:numCache>
+            </c:numRef>
+          </c:xVal>
+          <c:yVal>
+            <c:numRef>
+              <c:f>Scatter_Volume_3!$Z$2:$Z$131</c:f>
+              <c:numCache>
+                <c:formatCode>General</c:formatCode>
+                <c:ptCount val="130"/>
+                <c:pt idx="0">
+                  <c:v>302.46056015264179</c:v>
+                </c:pt>
+                <c:pt idx="1">
+                  <c:v>507.37878498492626</c:v>
+                </c:pt>
+                <c:pt idx="2">
+                  <c:v>539.09953289364887</c:v>
+                </c:pt>
+                <c:pt idx="3">
+                  <c:v>565.50713046630563</c:v>
+                </c:pt>
+                <c:pt idx="4">
+                  <c:v>589.26246424238877</c:v>
+                </c:pt>
+                <c:pt idx="5">
+                  <c:v>600.00378077446612</c:v>
+                </c:pt>
+                <c:pt idx="6">
+                  <c:v>580.60002056418182</c:v>
+                </c:pt>
+                <c:pt idx="7">
+                  <c:v>586.7739444863571</c:v>
+                </c:pt>
+                <c:pt idx="8">
+                  <c:v>528.88806373671139</c:v>
+                </c:pt>
+                <c:pt idx="9">
+                  <c:v>538.65142641322211</c:v>
+                </c:pt>
+                <c:pt idx="10">
+                  <c:v>519.62061868518947</c:v>
+                </c:pt>
+                <c:pt idx="11">
+                  <c:v>610.44022141041546</c:v>
+                </c:pt>
+                <c:pt idx="12">
+                  <c:v>603.8409721730294</c:v>
+                </c:pt>
+                <c:pt idx="13">
+                  <c:v>615.03638179249003</c:v>
+                </c:pt>
+                <c:pt idx="14">
+                  <c:v>619.70909905217093</c:v>
+                </c:pt>
+                <c:pt idx="15">
+                  <c:v>604.36173411501397</c:v>
+                </c:pt>
+                <c:pt idx="16">
+                  <c:v>592.65663831961376</c:v>
+                </c:pt>
+                <c:pt idx="17">
+                  <c:v>518.2748575063805</c:v>
+                </c:pt>
+                <c:pt idx="18">
+                  <c:v>507.17025747593357</c:v>
+                </c:pt>
+                <c:pt idx="19">
+                  <c:v>581.87284062968968</c:v>
+                </c:pt>
+                <c:pt idx="20">
+                  <c:v>603.61742152633997</c:v>
+                </c:pt>
+                <c:pt idx="21">
+                  <c:v>548.81502893351012</c:v>
+                </c:pt>
+                <c:pt idx="22">
+                  <c:v>615.4713100430447</c:v>
+                </c:pt>
+                <c:pt idx="23">
+                  <c:v>576.48670110018475</c:v>
+                </c:pt>
+                <c:pt idx="24">
+                  <c:v>187.96901803021987</c:v>
+                </c:pt>
+                <c:pt idx="25">
+                  <c:v>621.97088169690767</c:v>
+                </c:pt>
+                <c:pt idx="26">
+                  <c:v>512.80068882035744</c:v>
+                </c:pt>
+                <c:pt idx="27">
+                  <c:v>579.7617352275571</c:v>
+                </c:pt>
+                <c:pt idx="28">
+                  <c:v>577.87381441181947</c:v>
+                </c:pt>
+                <c:pt idx="29">
+                  <c:v>547.52746469384635</c:v>
+                </c:pt>
+                <c:pt idx="30">
+                  <c:v>525.56124317069691</c:v>
+                </c:pt>
+                <c:pt idx="31">
+                  <c:v>565.29537132994494</c:v>
+                </c:pt>
+                <c:pt idx="32">
+                  <c:v>515.07678212176938</c:v>
+                </c:pt>
+                <c:pt idx="33">
+                  <c:v>528.17535412044003</c:v>
+                </c:pt>
+                <c:pt idx="34">
+                  <c:v>546.06047583484599</c:v>
+                </c:pt>
+                <c:pt idx="35">
+                  <c:v>521.3115597870335</c:v>
+                </c:pt>
+                <c:pt idx="36">
+                  <c:v>513.41950177551473</c:v>
+                </c:pt>
+                <c:pt idx="37">
+                  <c:v>577.55697945240195</c:v>
+                </c:pt>
+                <c:pt idx="38">
+                  <c:v>544.06637003244521</c:v>
+                </c:pt>
+                <c:pt idx="39">
+                  <c:v>533.83627555051521</c:v>
+                </c:pt>
+                <c:pt idx="40">
+                  <c:v>537.20659555487248</c:v>
+                </c:pt>
+                <c:pt idx="41">
+                  <c:v>572.06796945697181</c:v>
+                </c:pt>
+                <c:pt idx="42">
+                  <c:v>502.2977918960587</c:v>
+                </c:pt>
+                <c:pt idx="43">
+                  <c:v>544.22355074035227</c:v>
+                </c:pt>
+                <c:pt idx="44">
+                  <c:v>582.12270634310255</c:v>
+                </c:pt>
+                <c:pt idx="45">
+                  <c:v>563.40658746577787</c:v>
+                </c:pt>
+                <c:pt idx="46">
+                  <c:v>572.64218985277012</c:v>
+                </c:pt>
+                <c:pt idx="47">
+                  <c:v>607.86704334462354</c:v>
+                </c:pt>
+                <c:pt idx="48">
+                  <c:v>544.31867734912657</c:v>
+                </c:pt>
+                <c:pt idx="49">
+                  <c:v>586.04883771837558</c:v>
+                </c:pt>
+                <c:pt idx="50">
+                  <c:v>558.42933005806765</c:v>
+                </c:pt>
+                <c:pt idx="51">
+                  <c:v>506.06442121589475</c:v>
+                </c:pt>
+                <c:pt idx="52">
+                  <c:v>584.83830874112346</c:v>
+                </c:pt>
+                <c:pt idx="53">
+                  <c:v>597.30501228180185</c:v>
+                </c:pt>
+                <c:pt idx="54">
+                  <c:v>564.71548755932974</c:v>
+                </c:pt>
+                <c:pt idx="55">
+                  <c:v>540.4335393020549</c:v>
+                </c:pt>
+                <c:pt idx="56">
+                  <c:v>520.15657156601424</c:v>
+                </c:pt>
+                <c:pt idx="57">
+                  <c:v>588.37268776211636</c:v>
+                </c:pt>
+                <c:pt idx="58">
+                  <c:v>589.37073893119259</c:v>
+                </c:pt>
+                <c:pt idx="59">
+                  <c:v>557.87613157405292</c:v>
+                </c:pt>
+                <c:pt idx="60">
+                  <c:v>510.75854539703619</c:v>
+                </c:pt>
+                <c:pt idx="61">
+                  <c:v>573.91576353334619</c:v>
+                </c:pt>
+                <c:pt idx="62">
+                  <c:v>597.7253741020096</c:v>
+                </c:pt>
+                <c:pt idx="63">
+                  <c:v>510.34330921445479</c:v>
+                </c:pt>
+                <c:pt idx="64">
+                  <c:v>541.16600078866031</c:v>
+                </c:pt>
+                <c:pt idx="65">
+                  <c:v>576.78166249632113</c:v>
+                </c:pt>
+                <c:pt idx="66">
+                  <c:v>601.03093310698966</c:v>
+                </c:pt>
+                <c:pt idx="67">
+                  <c:v>510.69972416499638</c:v>
+                </c:pt>
+                <c:pt idx="68">
+                  <c:v>576.63728833886603</c:v>
+                </c:pt>
+                <c:pt idx="69">
+                  <c:v>584.67159604655876</c:v>
+                </c:pt>
+                <c:pt idx="70">
+                  <c:v>582.30965287775552</c:v>
+                </c:pt>
+                <c:pt idx="71">
+                  <c:v>607.26793824019819</c:v>
+                </c:pt>
+                <c:pt idx="72">
+                  <c:v>556.63515055641858</c:v>
+                </c:pt>
+                <c:pt idx="73">
+                  <c:v>551.31312973026331</c:v>
+                </c:pt>
+                <c:pt idx="74">
+                  <c:v>587.78703572671589</c:v>
+                </c:pt>
+                <c:pt idx="75">
+                  <c:v>545.04678931114586</c:v>
+                </c:pt>
+                <c:pt idx="76">
+                  <c:v>580.21913721188753</c:v>
+                </c:pt>
+                <c:pt idx="77">
+                  <c:v>556.11020877746932</c:v>
+                </c:pt>
+                <c:pt idx="78">
+                  <c:v>214.94423547053256</c:v>
+                </c:pt>
+                <c:pt idx="79">
+                  <c:v>564.30975010285351</c:v>
+                </c:pt>
+                <c:pt idx="80">
+                  <c:v>586.26703158819123</c:v>
+                </c:pt>
+                <c:pt idx="81">
+                  <c:v>566.62824196066367</c:v>
+                </c:pt>
+                <c:pt idx="82">
+                  <c:v>520.06149158066785</c:v>
+                </c:pt>
+                <c:pt idx="83">
+                  <c:v>612.74906423104414</c:v>
+                </c:pt>
+                <c:pt idx="84">
+                  <c:v>606.35176551976258</c:v>
+                </c:pt>
+                <c:pt idx="85">
+                  <c:v>552.04209583517843</c:v>
+                </c:pt>
+                <c:pt idx="86">
+                  <c:v>592.91959634691773</c:v>
+                </c:pt>
+                <c:pt idx="87">
+                  <c:v>616.02781224916816</c:v>
+                </c:pt>
+                <c:pt idx="88">
+                  <c:v>504.50105331154123</c:v>
+                </c:pt>
+                <c:pt idx="89">
+                  <c:v>599.97593123367903</c:v>
+                </c:pt>
+                <c:pt idx="90">
+                  <c:v>542.93900807287071</c:v>
+                </c:pt>
+                <c:pt idx="91">
+                  <c:v>580.14548368182557</c:v>
+                </c:pt>
+                <c:pt idx="92">
+                  <c:v>569.75489624691556</c:v>
+                </c:pt>
+                <c:pt idx="93">
+                  <c:v>555.17903403429659</c:v>
+                </c:pt>
+                <c:pt idx="94">
+                  <c:v>591.75507626118781</c:v>
+                </c:pt>
+                <c:pt idx="95">
+                  <c:v>552.32114573786305</c:v>
+                </c:pt>
+                <c:pt idx="96">
+                  <c:v>553.66726086788492</c:v>
+                </c:pt>
+                <c:pt idx="97">
+                  <c:v>594.18289940768295</c:v>
+                </c:pt>
+                <c:pt idx="98">
+                  <c:v>588.97786270431334</c:v>
+                </c:pt>
+                <c:pt idx="99">
+                  <c:v>569.82760584202117</c:v>
+                </c:pt>
+                <c:pt idx="100">
+                  <c:v>582.32392661621952</c:v>
+                </c:pt>
+                <c:pt idx="101">
+                  <c:v>603.18058067640573</c:v>
+                </c:pt>
+                <c:pt idx="102">
+                  <c:v>509.31268888728948</c:v>
+                </c:pt>
+                <c:pt idx="103">
+                  <c:v>552.64218565569001</c:v>
+                </c:pt>
+                <c:pt idx="104">
+                  <c:v>592.20887446725533</c:v>
+                </c:pt>
+                <c:pt idx="105">
+                  <c:v>594.07200861658339</c:v>
+                </c:pt>
+                <c:pt idx="106">
+                  <c:v>619.05461115239507</c:v>
+                </c:pt>
+                <c:pt idx="107">
+                  <c:v>513.3666240941152</c:v>
+                </c:pt>
+                <c:pt idx="108">
+                  <c:v>221.95212059295295</c:v>
+                </c:pt>
+                <c:pt idx="109">
+                  <c:v>563.82764220798026</c:v>
+                </c:pt>
+                <c:pt idx="110">
+                  <c:v>559.18899429837916</c:v>
+                </c:pt>
+                <c:pt idx="111">
+                  <c:v>550.73234366815927</c:v>
+                </c:pt>
+                <c:pt idx="112">
+                  <c:v>487.99953399003397</c:v>
+                </c:pt>
+                <c:pt idx="113">
+                  <c:v>574.11797246639526</c:v>
+                </c:pt>
+                <c:pt idx="114">
+                  <c:v>528.00713587169491</c:v>
+                </c:pt>
+                <c:pt idx="115">
+                  <c:v>597.46465217067509</c:v>
+                </c:pt>
+                <c:pt idx="116">
+                  <c:v>552.84942911438861</c:v>
+                </c:pt>
+                <c:pt idx="117">
+                  <c:v>594.48323490316534</c:v>
+                </c:pt>
+                <c:pt idx="118">
+                  <c:v>547.67744468211913</c:v>
+                </c:pt>
+                <c:pt idx="119">
+                  <c:v>417.5001492765835</c:v>
+                </c:pt>
+                <c:pt idx="120">
+                  <c:v>568.37977519054527</c:v>
+                </c:pt>
+                <c:pt idx="121">
+                  <c:v>584.6174698373369</c:v>
+                </c:pt>
+                <c:pt idx="122">
+                  <c:v>549.73722375201476</c:v>
+                </c:pt>
+                <c:pt idx="123">
+                  <c:v>620.67194657433481</c:v>
+                </c:pt>
+                <c:pt idx="124">
+                  <c:v>615.47028795795006</c:v>
+                </c:pt>
+                <c:pt idx="125">
+                  <c:v>597.58407914744907</c:v>
+                </c:pt>
+                <c:pt idx="126">
+                  <c:v>525.04575296685732</c:v>
+                </c:pt>
+                <c:pt idx="127">
+                  <c:v>622.47453723565593</c:v>
+                </c:pt>
+                <c:pt idx="128">
+                  <c:v>575.1488537833377</c:v>
+                </c:pt>
+                <c:pt idx="129">
+                  <c:v>530.88082819142801</c:v>
+                </c:pt>
+              </c:numCache>
+            </c:numRef>
+          </c:yVal>
+          <c:smooth val="0"/>
+          <c:extLst>
+            <c:ext xmlns:c16="http://schemas.microsoft.com/office/drawing/2014/chart" uri="{C3380CC4-5D6E-409C-BE32-E72D297353CC}">
+              <c16:uniqueId val="{00000001-6F00-471F-B0DF-FC6834429BE4}"/>
+            </c:ext>
+          </c:extLst>
+        </c:ser>
+        <c:dLbls>
+          <c:showLegendKey val="0"/>
+          <c:showVal val="0"/>
+          <c:showCatName val="0"/>
+          <c:showSerName val="0"/>
+          <c:showPercent val="0"/>
+          <c:showBubbleSize val="0"/>
+        </c:dLbls>
+        <c:axId val="1333090288"/>
+        <c:axId val="1327351760"/>
+      </c:scatterChart>
+      <c:valAx>
+        <c:axId val="1333090288"/>
+        <c:scaling>
+          <c:orientation val="minMax"/>
+        </c:scaling>
+        <c:delete val="0"/>
+        <c:axPos val="b"/>
+        <c:majorGridlines>
+          <c:spPr>
+            <a:ln w="9525" cap="flat" cmpd="sng" algn="ctr">
+              <a:solidFill>
+                <a:schemeClr val="tx1">
+                  <a:lumMod val="15000"/>
+                  <a:lumOff val="85000"/>
+                </a:schemeClr>
+              </a:solidFill>
+              <a:round/>
+            </a:ln>
+            <a:effectLst/>
+          </c:spPr>
+        </c:majorGridlines>
+        <c:title>
+          <c:tx>
+            <c:rich>
+              <a:bodyPr rot="0" spcFirstLastPara="1" vertOverflow="ellipsis" vert="horz" wrap="square" anchor="ctr" anchorCtr="1"/>
+              <a:lstStyle/>
+              <a:p>
+                <a:pPr>
+                  <a:defRPr sz="1000" b="0" i="0" u="none" strike="noStrike" kern="1200" baseline="0">
+                    <a:solidFill>
+                      <a:schemeClr val="tx1">
+                        <a:lumMod val="65000"/>
+                        <a:lumOff val="35000"/>
+                      </a:schemeClr>
+                    </a:solidFill>
+                    <a:latin typeface="+mn-lt"/>
+                    <a:ea typeface="+mn-ea"/>
+                    <a:cs typeface="+mn-cs"/>
+                  </a:defRPr>
+                </a:pPr>
+                <a:r>
+                  <a:rPr lang="en-US" sz="1000" b="0" i="0" u="none" strike="noStrike" kern="1200" baseline="0">
+                    <a:solidFill>
+                      <a:sysClr val="windowText" lastClr="000000">
+                        <a:lumMod val="65000"/>
+                        <a:lumOff val="35000"/>
+                      </a:sysClr>
+                    </a:solidFill>
+                  </a:rPr>
+                  <a:t>Compton Angle (θ)</a:t>
+                </a:r>
+                <a:r>
+                  <a:rPr lang="en-US"/>
+                  <a:t> </a:t>
+                </a:r>
+              </a:p>
+            </c:rich>
+          </c:tx>
+          <c:overlay val="0"/>
+          <c:spPr>
+            <a:noFill/>
+            <a:ln>
+              <a:noFill/>
+            </a:ln>
+            <a:effectLst/>
+          </c:spPr>
+          <c:txPr>
+            <a:bodyPr rot="0" spcFirstLastPara="1" vertOverflow="ellipsis" vert="horz" wrap="square" anchor="ctr" anchorCtr="1"/>
+            <a:lstStyle/>
+            <a:p>
+              <a:pPr>
+                <a:defRPr sz="1000" b="0" i="0" u="none" strike="noStrike" kern="1200" baseline="0">
+                  <a:solidFill>
+                    <a:schemeClr val="tx1">
+                      <a:lumMod val="65000"/>
+                      <a:lumOff val="35000"/>
+                    </a:schemeClr>
+                  </a:solidFill>
+                  <a:latin typeface="+mn-lt"/>
+                  <a:ea typeface="+mn-ea"/>
+                  <a:cs typeface="+mn-cs"/>
+                </a:defRPr>
+              </a:pPr>
+              <a:endParaRPr lang="en-US"/>
+            </a:p>
+          </c:txPr>
+        </c:title>
+        <c:numFmt formatCode="General" sourceLinked="1"/>
+        <c:majorTickMark val="none"/>
+        <c:minorTickMark val="none"/>
+        <c:tickLblPos val="nextTo"/>
+        <c:spPr>
+          <a:noFill/>
+          <a:ln w="9525" cap="flat" cmpd="sng" algn="ctr">
+            <a:solidFill>
+              <a:schemeClr val="tx1">
+                <a:lumMod val="25000"/>
+                <a:lumOff val="75000"/>
+              </a:schemeClr>
+            </a:solidFill>
+            <a:round/>
+          </a:ln>
+          <a:effectLst/>
+        </c:spPr>
+        <c:txPr>
+          <a:bodyPr rot="-60000000" spcFirstLastPara="1" vertOverflow="ellipsis" vert="horz" wrap="square" anchor="ctr" anchorCtr="1"/>
+          <a:lstStyle/>
+          <a:p>
+            <a:pPr>
+              <a:defRPr sz="900" b="0" i="0" u="none" strike="noStrike" kern="1200" baseline="0">
+                <a:solidFill>
+                  <a:schemeClr val="tx1">
+                    <a:lumMod val="65000"/>
+                    <a:lumOff val="35000"/>
+                  </a:schemeClr>
+                </a:solidFill>
+                <a:latin typeface="+mn-lt"/>
+                <a:ea typeface="+mn-ea"/>
+                <a:cs typeface="+mn-cs"/>
+              </a:defRPr>
+            </a:pPr>
+            <a:endParaRPr lang="en-US"/>
+          </a:p>
+        </c:txPr>
+        <c:crossAx val="1327351760"/>
+        <c:crosses val="autoZero"/>
+        <c:crossBetween val="midCat"/>
+      </c:valAx>
+      <c:valAx>
+        <c:axId val="1327351760"/>
+        <c:scaling>
+          <c:orientation val="minMax"/>
+        </c:scaling>
+        <c:delete val="0"/>
+        <c:axPos val="l"/>
+        <c:majorGridlines>
+          <c:spPr>
+            <a:ln w="9525" cap="flat" cmpd="sng" algn="ctr">
+              <a:solidFill>
+                <a:schemeClr val="tx1">
+                  <a:lumMod val="15000"/>
+                  <a:lumOff val="85000"/>
+                </a:schemeClr>
+              </a:solidFill>
+              <a:round/>
+            </a:ln>
+            <a:effectLst/>
+          </c:spPr>
+        </c:majorGridlines>
+        <c:title>
+          <c:tx>
+            <c:rich>
+              <a:bodyPr rot="-5400000" spcFirstLastPara="1" vertOverflow="ellipsis" vert="horz" wrap="square" anchor="ctr" anchorCtr="1"/>
+              <a:lstStyle/>
+              <a:p>
+                <a:pPr>
+                  <a:defRPr sz="1000" b="0" i="0" u="none" strike="noStrike" kern="1200" baseline="0">
+                    <a:solidFill>
+                      <a:schemeClr val="tx1">
+                        <a:lumMod val="65000"/>
+                        <a:lumOff val="35000"/>
+                      </a:schemeClr>
+                    </a:solidFill>
+                    <a:latin typeface="+mn-lt"/>
+                    <a:ea typeface="+mn-ea"/>
+                    <a:cs typeface="+mn-cs"/>
+                  </a:defRPr>
+                </a:pPr>
+                <a:r>
+                  <a:rPr lang="en-US"/>
+                  <a:t>E(keV)</a:t>
+                </a:r>
+              </a:p>
+            </c:rich>
+          </c:tx>
+          <c:overlay val="0"/>
+          <c:spPr>
+            <a:noFill/>
+            <a:ln>
+              <a:noFill/>
+            </a:ln>
+            <a:effectLst/>
+          </c:spPr>
+          <c:txPr>
+            <a:bodyPr rot="-5400000" spcFirstLastPara="1" vertOverflow="ellipsis" vert="horz" wrap="square" anchor="ctr" anchorCtr="1"/>
+            <a:lstStyle/>
+            <a:p>
+              <a:pPr>
+                <a:defRPr sz="1000" b="0" i="0" u="none" strike="noStrike" kern="1200" baseline="0">
+                  <a:solidFill>
+                    <a:schemeClr val="tx1">
+                      <a:lumMod val="65000"/>
+                      <a:lumOff val="35000"/>
+                    </a:schemeClr>
+                  </a:solidFill>
+                  <a:latin typeface="+mn-lt"/>
+                  <a:ea typeface="+mn-ea"/>
+                  <a:cs typeface="+mn-cs"/>
+                </a:defRPr>
+              </a:pPr>
+              <a:endParaRPr lang="en-US"/>
+            </a:p>
+          </c:txPr>
+        </c:title>
+        <c:numFmt formatCode="General" sourceLinked="1"/>
+        <c:majorTickMark val="none"/>
+        <c:minorTickMark val="none"/>
+        <c:tickLblPos val="nextTo"/>
+        <c:spPr>
+          <a:noFill/>
+          <a:ln w="9525" cap="flat" cmpd="sng" algn="ctr">
+            <a:solidFill>
+              <a:schemeClr val="tx1">
+                <a:lumMod val="25000"/>
+                <a:lumOff val="75000"/>
+              </a:schemeClr>
+            </a:solidFill>
+            <a:round/>
+          </a:ln>
+          <a:effectLst/>
+        </c:spPr>
+        <c:txPr>
+          <a:bodyPr rot="-60000000" spcFirstLastPara="1" vertOverflow="ellipsis" vert="horz" wrap="square" anchor="ctr" anchorCtr="1"/>
+          <a:lstStyle/>
+          <a:p>
+            <a:pPr>
+              <a:defRPr sz="900" b="0" i="0" u="none" strike="noStrike" kern="1200" baseline="0">
+                <a:solidFill>
+                  <a:schemeClr val="tx1">
+                    <a:lumMod val="65000"/>
+                    <a:lumOff val="35000"/>
+                  </a:schemeClr>
+                </a:solidFill>
+                <a:latin typeface="+mn-lt"/>
+                <a:ea typeface="+mn-ea"/>
+                <a:cs typeface="+mn-cs"/>
+              </a:defRPr>
+            </a:pPr>
+            <a:endParaRPr lang="en-US"/>
+          </a:p>
+        </c:txPr>
+        <c:crossAx val="1333090288"/>
+        <c:crosses val="autoZero"/>
+        <c:crossBetween val="midCat"/>
+      </c:valAx>
+      <c:spPr>
+        <a:noFill/>
+        <a:ln>
+          <a:noFill/>
+        </a:ln>
+        <a:effectLst/>
+      </c:spPr>
+    </c:plotArea>
+    <c:legend>
+      <c:legendPos val="b"/>
+      <c:layout>
+        <c:manualLayout>
+          <c:xMode val="edge"/>
+          <c:yMode val="edge"/>
+          <c:x val="0.3477018810148732"/>
+          <c:y val="5.1504082822980468E-2"/>
+          <c:w val="0.52126268591426073"/>
+          <c:h val="7.8125546806649182E-2"/>
+        </c:manualLayout>
+      </c:layout>
+      <c:overlay val="0"/>
+      <c:spPr>
+        <a:noFill/>
+        <a:ln>
+          <a:noFill/>
+        </a:ln>
+        <a:effectLst/>
+      </c:spPr>
+      <c:txPr>
+        <a:bodyPr rot="0" spcFirstLastPara="1" vertOverflow="ellipsis" vert="horz" wrap="square" anchor="ctr" anchorCtr="1"/>
+        <a:lstStyle/>
+        <a:p>
+          <a:pPr>
+            <a:defRPr sz="900" b="0" i="0" u="none" strike="noStrike" kern="1200" baseline="0">
+              <a:solidFill>
+                <a:schemeClr val="tx1">
+                  <a:lumMod val="65000"/>
+                  <a:lumOff val="35000"/>
+                </a:schemeClr>
+              </a:solidFill>
+              <a:latin typeface="+mn-lt"/>
+              <a:ea typeface="+mn-ea"/>
+              <a:cs typeface="+mn-cs"/>
+            </a:defRPr>
+          </a:pPr>
+          <a:endParaRPr lang="en-US"/>
+        </a:p>
+      </c:txPr>
+    </c:legend>
+    <c:plotVisOnly val="1"/>
+    <c:dispBlanksAs val="gap"/>
+    <c:showDLblsOverMax val="0"/>
+    <c:extLst>
+      <c:ext xmlns:c16r3="http://schemas.microsoft.com/office/drawing/2017/03/chart" uri="{56B9EC1D-385E-4148-901F-78D8002777C0}">
+        <c16r3:dataDisplayOptions16>
+          <c16r3:dispNaAsBlank val="1"/>
+        </c16r3:dataDisplayOptions16>
+      </c:ext>
+    </c:extLst>
+  </c:chart>
+  <c:spPr>
+    <a:noFill/>
+    <a:ln>
+      <a:noFill/>
+    </a:ln>
+    <a:effectLst/>
+  </c:spPr>
+  <c:txPr>
+    <a:bodyPr/>
+    <a:lstStyle/>
+    <a:p>
+      <a:pPr>
+        <a:defRPr/>
+      </a:pPr>
+      <a:endParaRPr lang="en-US"/>
+    </a:p>
+  </c:txPr>
+  <c:externalData r:id="rId3">
+    <c:autoUpdate val="0"/>
+  </c:externalData>
+</c:chartSpace>
+</file>
+
+<file path=ppt/charts/colors1.xml><?xml version="1.0" encoding="utf-8"?>
+<cs:colorStyle xmlns:cs="http://schemas.microsoft.com/office/drawing/2012/chartStyle" xmlns:a="http://schemas.openxmlformats.org/drawingml/2006/main" meth="cycle" id="10">
+  <a:schemeClr val="accent1"/>
+  <a:schemeClr val="accent2"/>
+  <a:schemeClr val="accent3"/>
+  <a:schemeClr val="accent4"/>
+  <a:schemeClr val="accent5"/>
+  <a:schemeClr val="accent6"/>
+  <cs:variation/>
+  <cs:variation>
+    <a:lumMod val="60000"/>
+  </cs:variation>
+  <cs:variation>
+    <a:lumMod val="80000"/>
+    <a:lumOff val="20000"/>
+  </cs:variation>
+  <cs:variation>
+    <a:lumMod val="80000"/>
+  </cs:variation>
+  <cs:variation>
+    <a:lumMod val="60000"/>
+    <a:lumOff val="40000"/>
+  </cs:variation>
+  <cs:variation>
+    <a:lumMod val="50000"/>
+  </cs:variation>
+  <cs:variation>
+    <a:lumMod val="70000"/>
+    <a:lumOff val="30000"/>
+  </cs:variation>
+  <cs:variation>
+    <a:lumMod val="70000"/>
+  </cs:variation>
+  <cs:variation>
+    <a:lumMod val="50000"/>
+    <a:lumOff val="50000"/>
+  </cs:variation>
+</cs:colorStyle>
+</file>
+
+<file path=ppt/charts/colors2.xml><?xml version="1.0" encoding="utf-8"?>
+<cs:colorStyle xmlns:cs="http://schemas.microsoft.com/office/drawing/2012/chartStyle" xmlns:a="http://schemas.openxmlformats.org/drawingml/2006/main" meth="cycle" id="10">
+  <a:schemeClr val="accent1"/>
+  <a:schemeClr val="accent2"/>
+  <a:schemeClr val="accent3"/>
+  <a:schemeClr val="accent4"/>
+  <a:schemeClr val="accent5"/>
+  <a:schemeClr val="accent6"/>
+  <cs:variation/>
+  <cs:variation>
+    <a:lumMod val="60000"/>
+  </cs:variation>
+  <cs:variation>
+    <a:lumMod val="80000"/>
+    <a:lumOff val="20000"/>
+  </cs:variation>
+  <cs:variation>
+    <a:lumMod val="80000"/>
+  </cs:variation>
+  <cs:variation>
+    <a:lumMod val="60000"/>
+    <a:lumOff val="40000"/>
+  </cs:variation>
+  <cs:variation>
+    <a:lumMod val="50000"/>
+  </cs:variation>
+  <cs:variation>
+    <a:lumMod val="70000"/>
+    <a:lumOff val="30000"/>
+  </cs:variation>
+  <cs:variation>
+    <a:lumMod val="70000"/>
+  </cs:variation>
+  <cs:variation>
+    <a:lumMod val="50000"/>
+    <a:lumOff val="50000"/>
+  </cs:variation>
+</cs:colorStyle>
+</file>
+
+<file path=ppt/charts/colors3.xml><?xml version="1.0" encoding="utf-8"?>
+<cs:colorStyle xmlns:cs="http://schemas.microsoft.com/office/drawing/2012/chartStyle" xmlns:a="http://schemas.openxmlformats.org/drawingml/2006/main" meth="cycle" id="10">
+  <a:schemeClr val="accent1"/>
+  <a:schemeClr val="accent2"/>
+  <a:schemeClr val="accent3"/>
+  <a:schemeClr val="accent4"/>
+  <a:schemeClr val="accent5"/>
+  <a:schemeClr val="accent6"/>
+  <cs:variation/>
+  <cs:variation>
+    <a:lumMod val="60000"/>
+  </cs:variation>
+  <cs:variation>
+    <a:lumMod val="80000"/>
+    <a:lumOff val="20000"/>
+  </cs:variation>
+  <cs:variation>
+    <a:lumMod val="80000"/>
+  </cs:variation>
+  <cs:variation>
+    <a:lumMod val="60000"/>
+    <a:lumOff val="40000"/>
+  </cs:variation>
+  <cs:variation>
+    <a:lumMod val="50000"/>
+  </cs:variation>
+  <cs:variation>
+    <a:lumMod val="70000"/>
+    <a:lumOff val="30000"/>
+  </cs:variation>
+  <cs:variation>
+    <a:lumMod val="70000"/>
+  </cs:variation>
+  <cs:variation>
+    <a:lumMod val="50000"/>
+    <a:lumOff val="50000"/>
+  </cs:variation>
+</cs:colorStyle>
+</file>
+
+<file path=ppt/charts/style1.xml><?xml version="1.0" encoding="utf-8"?>
+<cs:chartStyle xmlns:cs="http://schemas.microsoft.com/office/drawing/2012/chartStyle" xmlns:a="http://schemas.openxmlformats.org/drawingml/2006/main" id="240">
+  <cs:axisTitle>
+    <cs:lnRef idx="0"/>
+    <cs:fillRef idx="0"/>
+    <cs:effectRef idx="0"/>
+    <cs:fontRef idx="minor">
+      <a:schemeClr val="tx1">
+        <a:lumMod val="65000"/>
+        <a:lumOff val="35000"/>
+      </a:schemeClr>
+    </cs:fontRef>
+    <cs:defRPr sz="1000" kern="1200"/>
+  </cs:axisTitle>
+  <cs:categoryAxis>
+    <cs:lnRef idx="0"/>
+    <cs:fillRef idx="0"/>
+    <cs:effectRef idx="0"/>
+    <cs:fontRef idx="minor">
+      <a:schemeClr val="tx1">
+        <a:lumMod val="65000"/>
+        <a:lumOff val="35000"/>
+      </a:schemeClr>
+    </cs:fontRef>
+    <cs:spPr>
+      <a:ln w="9525" cap="flat" cmpd="sng" algn="ctr">
+        <a:solidFill>
+          <a:schemeClr val="tx1">
+            <a:lumMod val="25000"/>
+            <a:lumOff val="75000"/>
+          </a:schemeClr>
+        </a:solidFill>
+        <a:round/>
+      </a:ln>
+    </cs:spPr>
+    <cs:defRPr sz="900" kern="1200"/>
+  </cs:categoryAxis>
+  <cs:chartArea mods="allowNoFillOverride allowNoLineOverride">
+    <cs:lnRef idx="0"/>
+    <cs:fillRef idx="0"/>
+    <cs:effectRef idx="0"/>
+    <cs:fontRef idx="minor">
+      <a:schemeClr val="tx1"/>
+    </cs:fontRef>
+    <cs:spPr>
+      <a:solidFill>
+        <a:schemeClr val="bg1"/>
+      </a:solidFill>
+      <a:ln w="9525" cap="flat" cmpd="sng" algn="ctr">
+        <a:solidFill>
+          <a:schemeClr val="tx1">
+            <a:lumMod val="15000"/>
+            <a:lumOff val="85000"/>
+          </a:schemeClr>
+        </a:solidFill>
+        <a:round/>
+      </a:ln>
+    </cs:spPr>
+    <cs:defRPr sz="1000" kern="1200"/>
+  </cs:chartArea>
+  <cs:dataLabel>
+    <cs:lnRef idx="0"/>
+    <cs:fillRef idx="0"/>
+    <cs:effectRef idx="0"/>
+    <cs:fontRef idx="minor">
+      <a:schemeClr val="tx1">
+        <a:lumMod val="75000"/>
+        <a:lumOff val="25000"/>
+      </a:schemeClr>
+    </cs:fontRef>
+    <cs:defRPr sz="900" kern="1200"/>
+  </cs:dataLabel>
+  <cs:dataLabelCallout>
+    <cs:lnRef idx="0"/>
+    <cs:fillRef idx="0"/>
+    <cs:effectRef idx="0"/>
+    <cs:fontRef idx="minor">
+      <a:schemeClr val="dk1">
+        <a:lumMod val="65000"/>
+        <a:lumOff val="35000"/>
+      </a:schemeClr>
+    </cs:fontRef>
+    <cs:spPr>
+      <a:solidFill>
+        <a:schemeClr val="lt1"/>
+      </a:solidFill>
+      <a:ln>
+        <a:solidFill>
+          <a:schemeClr val="dk1">
+            <a:lumMod val="25000"/>
+            <a:lumOff val="75000"/>
+          </a:schemeClr>
+        </a:solidFill>
+      </a:ln>
+    </cs:spPr>
+    <cs:defRPr sz="900" kern="1200"/>
+    <cs:bodyPr rot="0" spcFirstLastPara="1" vertOverflow="clip" horzOverflow="clip" vert="horz" wrap="square" lIns="36576" tIns="18288" rIns="36576" bIns="18288" anchor="ctr" anchorCtr="1">
+      <a:spAutoFit/>
+    </cs:bodyPr>
+  </cs:dataLabelCallout>
+  <cs:dataPoint>
+    <cs:lnRef idx="0"/>
+    <cs:fillRef idx="1">
+      <cs:styleClr val="auto"/>
+    </cs:fillRef>
+    <cs:effectRef idx="0"/>
+    <cs:fontRef idx="minor">
+      <a:schemeClr val="tx1"/>
+    </cs:fontRef>
+  </cs:dataPoint>
+  <cs:dataPoint3D>
+    <cs:lnRef idx="0"/>
+    <cs:fillRef idx="1">
+      <cs:styleClr val="auto"/>
+    </cs:fillRef>
+    <cs:effectRef idx="0"/>
+    <cs:fontRef idx="minor">
+      <a:schemeClr val="tx1"/>
+    </cs:fontRef>
+  </cs:dataPoint3D>
+  <cs:dataPointLine>
+    <cs:lnRef idx="0">
+      <cs:styleClr val="auto"/>
+    </cs:lnRef>
+    <cs:fillRef idx="1"/>
+    <cs:effectRef idx="0"/>
+    <cs:fontRef idx="minor">
+      <a:schemeClr val="tx1"/>
+    </cs:fontRef>
+    <cs:spPr>
+      <a:ln w="19050" cap="rnd">
+        <a:solidFill>
+          <a:schemeClr val="phClr"/>
+        </a:solidFill>
+        <a:round/>
+      </a:ln>
+    </cs:spPr>
+  </cs:dataPointLine>
+  <cs:dataPointMarker>
+    <cs:lnRef idx="0">
+      <cs:styleClr val="auto"/>
+    </cs:lnRef>
+    <cs:fillRef idx="1">
+      <cs:styleClr val="auto"/>
+    </cs:fillRef>
+    <cs:effectRef idx="0"/>
+    <cs:fontRef idx="minor">
+      <a:schemeClr val="tx1"/>
+    </cs:fontRef>
+    <cs:spPr>
+      <a:ln w="9525">
+        <a:solidFill>
+          <a:schemeClr val="phClr"/>
+        </a:solidFill>
+      </a:ln>
+    </cs:spPr>
+  </cs:dataPointMarker>
+  <cs:dataPointMarkerLayout symbol="circle" size="5"/>
+  <cs:dataPointWireframe>
+    <cs:lnRef idx="0">
+      <cs:styleClr val="auto"/>
+    </cs:lnRef>
+    <cs:fillRef idx="0"/>
+    <cs:effectRef idx="0"/>
+    <cs:fontRef idx="minor">
+      <a:schemeClr val="dk1"/>
+    </cs:fontRef>
+    <cs:spPr>
+      <a:ln w="9525" cap="rnd">
+        <a:solidFill>
+          <a:schemeClr val="phClr"/>
+        </a:solidFill>
+        <a:round/>
+      </a:ln>
+    </cs:spPr>
+  </cs:dataPointWireframe>
+  <cs:dataTable>
+    <cs:lnRef idx="0"/>
+    <cs:fillRef idx="0"/>
+    <cs:effectRef idx="0"/>
+    <cs:fontRef idx="minor">
+      <a:schemeClr val="tx1">
+        <a:lumMod val="65000"/>
+        <a:lumOff val="35000"/>
+      </a:schemeClr>
+    </cs:fontRef>
+    <cs:spPr>
+      <a:noFill/>
+      <a:ln w="9525" cap="flat" cmpd="sng" algn="ctr">
+        <a:solidFill>
+          <a:schemeClr val="tx1">
+            <a:lumMod val="15000"/>
+            <a:lumOff val="85000"/>
+          </a:schemeClr>
+        </a:solidFill>
+        <a:round/>
+      </a:ln>
+    </cs:spPr>
+    <cs:defRPr sz="900" kern="1200"/>
+  </cs:dataTable>
+  <cs:downBar>
+    <cs:lnRef idx="0"/>
+    <cs:fillRef idx="0"/>
+    <cs:effectRef idx="0"/>
+    <cs:fontRef idx="minor">
+      <a:schemeClr val="tx1"/>
+    </cs:fontRef>
+    <cs:spPr>
+      <a:solidFill>
+        <a:schemeClr val="dk1">
+          <a:lumMod val="75000"/>
+          <a:lumOff val="25000"/>
+        </a:schemeClr>
+      </a:solidFill>
+      <a:ln w="9525" cap="flat" cmpd="sng" algn="ctr">
+        <a:solidFill>
+          <a:schemeClr val="tx1">
+            <a:lumMod val="65000"/>
+            <a:lumOff val="35000"/>
+          </a:schemeClr>
+        </a:solidFill>
+        <a:round/>
+      </a:ln>
+    </cs:spPr>
+  </cs:downBar>
+  <cs:dropLine>
+    <cs:lnRef idx="0"/>
+    <cs:fillRef idx="0"/>
+    <cs:effectRef idx="0"/>
+    <cs:fontRef idx="minor">
+      <a:schemeClr val="tx1"/>
+    </cs:fontRef>
+    <cs:spPr>
+      <a:ln w="9525" cap="flat" cmpd="sng" algn="ctr">
+        <a:solidFill>
+          <a:schemeClr val="tx1">
+            <a:lumMod val="35000"/>
+            <a:lumOff val="65000"/>
+          </a:schemeClr>
+        </a:solidFill>
+        <a:round/>
+      </a:ln>
+    </cs:spPr>
+  </cs:dropLine>
+  <cs:errorBar>
+    <cs:lnRef idx="0"/>
+    <cs:fillRef idx="0"/>
+    <cs:effectRef idx="0"/>
+    <cs:fontRef idx="minor">
+      <a:schemeClr val="tx1"/>
+    </cs:fontRef>
+    <cs:spPr>
+      <a:ln w="9525" cap="flat" cmpd="sng" algn="ctr">
+        <a:solidFill>
+          <a:schemeClr val="tx1">
+            <a:lumMod val="65000"/>
+            <a:lumOff val="35000"/>
+          </a:schemeClr>
+        </a:solidFill>
+        <a:round/>
+      </a:ln>
+    </cs:spPr>
+  </cs:errorBar>
+  <cs:floor>
+    <cs:lnRef idx="0"/>
+    <cs:fillRef idx="0"/>
+    <cs:effectRef idx="0"/>
+    <cs:fontRef idx="minor">
+      <a:schemeClr val="tx1"/>
+    </cs:fontRef>
+    <cs:spPr>
+      <a:noFill/>
+      <a:ln>
+        <a:noFill/>
+      </a:ln>
+    </cs:spPr>
+  </cs:floor>
+  <cs:gridlineMajor>
+    <cs:lnRef idx="0"/>
+    <cs:fillRef idx="0"/>
+    <cs:effectRef idx="0"/>
+    <cs:fontRef idx="minor">
+      <a:schemeClr val="tx1"/>
+    </cs:fontRef>
+    <cs:spPr>
+      <a:ln w="9525" cap="flat" cmpd="sng" algn="ctr">
+        <a:solidFill>
+          <a:schemeClr val="tx1">
+            <a:lumMod val="15000"/>
+            <a:lumOff val="85000"/>
+          </a:schemeClr>
+        </a:solidFill>
+        <a:round/>
+      </a:ln>
+    </cs:spPr>
+  </cs:gridlineMajor>
+  <cs:gridlineMinor>
+    <cs:lnRef idx="0"/>
+    <cs:fillRef idx="0"/>
+    <cs:effectRef idx="0"/>
+    <cs:fontRef idx="minor">
+      <a:schemeClr val="tx1"/>
+    </cs:fontRef>
+    <cs:spPr>
+      <a:ln w="9525" cap="flat" cmpd="sng" algn="ctr">
+        <a:solidFill>
+          <a:schemeClr val="tx1">
+            <a:lumMod val="5000"/>
+            <a:lumOff val="95000"/>
+          </a:schemeClr>
+        </a:solidFill>
+        <a:round/>
+      </a:ln>
+    </cs:spPr>
+  </cs:gridlineMinor>
+  <cs:hiLoLine>
+    <cs:lnRef idx="0"/>
+    <cs:fillRef idx="0"/>
+    <cs:effectRef idx="0"/>
+    <cs:fontRef idx="minor">
+      <a:schemeClr val="tx1"/>
+    </cs:fontRef>
+    <cs:spPr>
+      <a:ln w="9525" cap="flat" cmpd="sng" algn="ctr">
+        <a:solidFill>
+          <a:schemeClr val="tx1">
+            <a:lumMod val="50000"/>
+            <a:lumOff val="50000"/>
+          </a:schemeClr>
+        </a:solidFill>
+        <a:round/>
+      </a:ln>
+    </cs:spPr>
+  </cs:hiLoLine>
+  <cs:leaderLine>
+    <cs:lnRef idx="0"/>
+    <cs:fillRef idx="0"/>
+    <cs:effectRef idx="0"/>
+    <cs:fontRef idx="minor">
+      <a:schemeClr val="tx1"/>
+    </cs:fontRef>
+    <cs:spPr>
+      <a:ln w="9525" cap="flat" cmpd="sng" algn="ctr">
+        <a:solidFill>
+          <a:schemeClr val="tx1">
+            <a:lumMod val="35000"/>
+            <a:lumOff val="65000"/>
+          </a:schemeClr>
+        </a:solidFill>
+        <a:round/>
+      </a:ln>
+    </cs:spPr>
+  </cs:leaderLine>
+  <cs:legend>
+    <cs:lnRef idx="0"/>
+    <cs:fillRef idx="0"/>
+    <cs:effectRef idx="0"/>
+    <cs:fontRef idx="minor">
+      <a:schemeClr val="tx1">
+        <a:lumMod val="65000"/>
+        <a:lumOff val="35000"/>
+      </a:schemeClr>
+    </cs:fontRef>
+    <cs:defRPr sz="900" kern="1200"/>
+  </cs:legend>
+  <cs:plotArea mods="allowNoFillOverride allowNoLineOverride">
+    <cs:lnRef idx="0"/>
+    <cs:fillRef idx="0"/>
+    <cs:effectRef idx="0"/>
+    <cs:fontRef idx="minor">
+      <a:schemeClr val="tx1"/>
+    </cs:fontRef>
+  </cs:plotArea>
+  <cs:plotArea3D mods="allowNoFillOverride allowNoLineOverride">
+    <cs:lnRef idx="0"/>
+    <cs:fillRef idx="0"/>
+    <cs:effectRef idx="0"/>
+    <cs:fontRef idx="minor">
+      <a:schemeClr val="tx1"/>
+    </cs:fontRef>
+  </cs:plotArea3D>
+  <cs:seriesAxis>
+    <cs:lnRef idx="0"/>
+    <cs:fillRef idx="0"/>
+    <cs:effectRef idx="0"/>
+    <cs:fontRef idx="minor">
+      <a:schemeClr val="tx1">
+        <a:lumMod val="65000"/>
+        <a:lumOff val="35000"/>
+      </a:schemeClr>
+    </cs:fontRef>
+    <cs:defRPr sz="900" kern="1200"/>
+  </cs:seriesAxis>
+  <cs:seriesLine>
+    <cs:lnRef idx="0"/>
+    <cs:fillRef idx="0"/>
+    <cs:effectRef idx="0"/>
+    <cs:fontRef idx="minor">
+      <a:schemeClr val="tx1"/>
+    </cs:fontRef>
+    <cs:spPr>
+      <a:ln w="9525" cap="flat" cmpd="sng" algn="ctr">
+        <a:solidFill>
+          <a:schemeClr val="tx1">
+            <a:lumMod val="35000"/>
+            <a:lumOff val="65000"/>
+          </a:schemeClr>
+        </a:solidFill>
+        <a:round/>
+      </a:ln>
+    </cs:spPr>
+  </cs:seriesLine>
+  <cs:title>
+    <cs:lnRef idx="0"/>
+    <cs:fillRef idx="0"/>
+    <cs:effectRef idx="0"/>
+    <cs:fontRef idx="minor">
+      <a:schemeClr val="tx1">
+        <a:lumMod val="65000"/>
+        <a:lumOff val="35000"/>
+      </a:schemeClr>
+    </cs:fontRef>
+    <cs:defRPr sz="1400" b="0" kern="1200" spc="0" baseline="0"/>
+  </cs:title>
+  <cs:trendline>
+    <cs:lnRef idx="0">
+      <cs:styleClr val="auto"/>
+    </cs:lnRef>
+    <cs:fillRef idx="0"/>
+    <cs:effectRef idx="0"/>
+    <cs:fontRef idx="minor">
+      <a:schemeClr val="tx1"/>
+    </cs:fontRef>
+    <cs:spPr>
+      <a:ln w="19050" cap="rnd">
+        <a:solidFill>
+          <a:schemeClr val="phClr"/>
+        </a:solidFill>
+        <a:prstDash val="sysDot"/>
+      </a:ln>
+    </cs:spPr>
+  </cs:trendline>
+  <cs:trendlineLabel>
+    <cs:lnRef idx="0"/>
+    <cs:fillRef idx="0"/>
+    <cs:effectRef idx="0"/>
+    <cs:fontRef idx="minor">
+      <a:schemeClr val="tx1">
+        <a:lumMod val="65000"/>
+        <a:lumOff val="35000"/>
+      </a:schemeClr>
+    </cs:fontRef>
+    <cs:defRPr sz="900" kern="1200"/>
+  </cs:trendlineLabel>
+  <cs:upBar>
+    <cs:lnRef idx="0"/>
+    <cs:fillRef idx="0"/>
+    <cs:effectRef idx="0"/>
+    <cs:fontRef idx="minor">
+      <a:schemeClr val="tx1"/>
+    </cs:fontRef>
+    <cs:spPr>
+      <a:solidFill>
+        <a:schemeClr val="lt1"/>
+      </a:solidFill>
+      <a:ln w="9525" cap="flat" cmpd="sng" algn="ctr">
+        <a:solidFill>
+          <a:schemeClr val="tx1">
+            <a:lumMod val="65000"/>
+            <a:lumOff val="35000"/>
+          </a:schemeClr>
+        </a:solidFill>
+        <a:round/>
+      </a:ln>
+    </cs:spPr>
+  </cs:upBar>
+  <cs:valueAxis>
+    <cs:lnRef idx="0"/>
+    <cs:fillRef idx="0"/>
+    <cs:effectRef idx="0"/>
+    <cs:fontRef idx="minor">
+      <a:schemeClr val="tx1">
+        <a:lumMod val="65000"/>
+        <a:lumOff val="35000"/>
+      </a:schemeClr>
+    </cs:fontRef>
+    <cs:spPr>
+      <a:ln w="9525" cap="flat" cmpd="sng" algn="ctr">
+        <a:solidFill>
+          <a:schemeClr val="tx1">
+            <a:lumMod val="25000"/>
+            <a:lumOff val="75000"/>
+          </a:schemeClr>
+        </a:solidFill>
+        <a:round/>
+      </a:ln>
+    </cs:spPr>
+    <cs:defRPr sz="900" kern="1200"/>
+  </cs:valueAxis>
+  <cs:wall>
+    <cs:lnRef idx="0"/>
+    <cs:fillRef idx="0"/>
+    <cs:effectRef idx="0"/>
+    <cs:fontRef idx="minor">
+      <a:schemeClr val="tx1"/>
+    </cs:fontRef>
+    <cs:spPr>
+      <a:noFill/>
+      <a:ln>
+        <a:noFill/>
+      </a:ln>
+    </cs:spPr>
+  </cs:wall>
+</cs:chartStyle>
+</file>
+
+<file path=ppt/charts/style2.xml><?xml version="1.0" encoding="utf-8"?>
+<cs:chartStyle xmlns:cs="http://schemas.microsoft.com/office/drawing/2012/chartStyle" xmlns:a="http://schemas.openxmlformats.org/drawingml/2006/main" id="240">
+  <cs:axisTitle>
+    <cs:lnRef idx="0"/>
+    <cs:fillRef idx="0"/>
+    <cs:effectRef idx="0"/>
+    <cs:fontRef idx="minor">
+      <a:schemeClr val="tx1">
+        <a:lumMod val="65000"/>
+        <a:lumOff val="35000"/>
+      </a:schemeClr>
+    </cs:fontRef>
+    <cs:defRPr sz="1000" kern="1200"/>
+  </cs:axisTitle>
+  <cs:categoryAxis>
+    <cs:lnRef idx="0"/>
+    <cs:fillRef idx="0"/>
+    <cs:effectRef idx="0"/>
+    <cs:fontRef idx="minor">
+      <a:schemeClr val="tx1">
+        <a:lumMod val="65000"/>
+        <a:lumOff val="35000"/>
+      </a:schemeClr>
+    </cs:fontRef>
+    <cs:spPr>
+      <a:ln w="9525" cap="flat" cmpd="sng" algn="ctr">
+        <a:solidFill>
+          <a:schemeClr val="tx1">
+            <a:lumMod val="25000"/>
+            <a:lumOff val="75000"/>
+          </a:schemeClr>
+        </a:solidFill>
+        <a:round/>
+      </a:ln>
+    </cs:spPr>
+    <cs:defRPr sz="900" kern="1200"/>
+  </cs:categoryAxis>
+  <cs:chartArea mods="allowNoFillOverride allowNoLineOverride">
+    <cs:lnRef idx="0"/>
+    <cs:fillRef idx="0"/>
+    <cs:effectRef idx="0"/>
+    <cs:fontRef idx="minor">
+      <a:schemeClr val="tx1"/>
+    </cs:fontRef>
+    <cs:spPr>
+      <a:solidFill>
+        <a:schemeClr val="bg1"/>
+      </a:solidFill>
+      <a:ln w="9525" cap="flat" cmpd="sng" algn="ctr">
+        <a:solidFill>
+          <a:schemeClr val="tx1">
+            <a:lumMod val="15000"/>
+            <a:lumOff val="85000"/>
+          </a:schemeClr>
+        </a:solidFill>
+        <a:round/>
+      </a:ln>
+    </cs:spPr>
+    <cs:defRPr sz="1000" kern="1200"/>
+  </cs:chartArea>
+  <cs:dataLabel>
+    <cs:lnRef idx="0"/>
+    <cs:fillRef idx="0"/>
+    <cs:effectRef idx="0"/>
+    <cs:fontRef idx="minor">
+      <a:schemeClr val="tx1">
+        <a:lumMod val="75000"/>
+        <a:lumOff val="25000"/>
+      </a:schemeClr>
+    </cs:fontRef>
+    <cs:defRPr sz="900" kern="1200"/>
+  </cs:dataLabel>
+  <cs:dataLabelCallout>
+    <cs:lnRef idx="0"/>
+    <cs:fillRef idx="0"/>
+    <cs:effectRef idx="0"/>
+    <cs:fontRef idx="minor">
+      <a:schemeClr val="dk1">
+        <a:lumMod val="65000"/>
+        <a:lumOff val="35000"/>
+      </a:schemeClr>
+    </cs:fontRef>
+    <cs:spPr>
+      <a:solidFill>
+        <a:schemeClr val="lt1"/>
+      </a:solidFill>
+      <a:ln>
+        <a:solidFill>
+          <a:schemeClr val="dk1">
+            <a:lumMod val="25000"/>
+            <a:lumOff val="75000"/>
+          </a:schemeClr>
+        </a:solidFill>
+      </a:ln>
+    </cs:spPr>
+    <cs:defRPr sz="900" kern="1200"/>
+    <cs:bodyPr rot="0" spcFirstLastPara="1" vertOverflow="clip" horzOverflow="clip" vert="horz" wrap="square" lIns="36576" tIns="18288" rIns="36576" bIns="18288" anchor="ctr" anchorCtr="1">
+      <a:spAutoFit/>
+    </cs:bodyPr>
+  </cs:dataLabelCallout>
+  <cs:dataPoint>
+    <cs:lnRef idx="0"/>
+    <cs:fillRef idx="1">
+      <cs:styleClr val="auto"/>
+    </cs:fillRef>
+    <cs:effectRef idx="0"/>
+    <cs:fontRef idx="minor">
+      <a:schemeClr val="tx1"/>
+    </cs:fontRef>
+  </cs:dataPoint>
+  <cs:dataPoint3D>
+    <cs:lnRef idx="0"/>
+    <cs:fillRef idx="1">
+      <cs:styleClr val="auto"/>
+    </cs:fillRef>
+    <cs:effectRef idx="0"/>
+    <cs:fontRef idx="minor">
+      <a:schemeClr val="tx1"/>
+    </cs:fontRef>
+  </cs:dataPoint3D>
+  <cs:dataPointLine>
+    <cs:lnRef idx="0">
+      <cs:styleClr val="auto"/>
+    </cs:lnRef>
+    <cs:fillRef idx="1"/>
+    <cs:effectRef idx="0"/>
+    <cs:fontRef idx="minor">
+      <a:schemeClr val="tx1"/>
+    </cs:fontRef>
+    <cs:spPr>
+      <a:ln w="19050" cap="rnd">
+        <a:solidFill>
+          <a:schemeClr val="phClr"/>
+        </a:solidFill>
+        <a:round/>
+      </a:ln>
+    </cs:spPr>
+  </cs:dataPointLine>
+  <cs:dataPointMarker>
+    <cs:lnRef idx="0">
+      <cs:styleClr val="auto"/>
+    </cs:lnRef>
+    <cs:fillRef idx="1">
+      <cs:styleClr val="auto"/>
+    </cs:fillRef>
+    <cs:effectRef idx="0"/>
+    <cs:fontRef idx="minor">
+      <a:schemeClr val="tx1"/>
+    </cs:fontRef>
+    <cs:spPr>
+      <a:ln w="9525">
+        <a:solidFill>
+          <a:schemeClr val="phClr"/>
+        </a:solidFill>
+      </a:ln>
+    </cs:spPr>
+  </cs:dataPointMarker>
+  <cs:dataPointMarkerLayout symbol="circle" size="5"/>
+  <cs:dataPointWireframe>
+    <cs:lnRef idx="0">
+      <cs:styleClr val="auto"/>
+    </cs:lnRef>
+    <cs:fillRef idx="0"/>
+    <cs:effectRef idx="0"/>
+    <cs:fontRef idx="minor">
+      <a:schemeClr val="dk1"/>
+    </cs:fontRef>
+    <cs:spPr>
+      <a:ln w="9525" cap="rnd">
+        <a:solidFill>
+          <a:schemeClr val="phClr"/>
+        </a:solidFill>
+        <a:round/>
+      </a:ln>
+    </cs:spPr>
+  </cs:dataPointWireframe>
+  <cs:dataTable>
+    <cs:lnRef idx="0"/>
+    <cs:fillRef idx="0"/>
+    <cs:effectRef idx="0"/>
+    <cs:fontRef idx="minor">
+      <a:schemeClr val="tx1">
+        <a:lumMod val="65000"/>
+        <a:lumOff val="35000"/>
+      </a:schemeClr>
+    </cs:fontRef>
+    <cs:spPr>
+      <a:noFill/>
+      <a:ln w="9525" cap="flat" cmpd="sng" algn="ctr">
+        <a:solidFill>
+          <a:schemeClr val="tx1">
+            <a:lumMod val="15000"/>
+            <a:lumOff val="85000"/>
+          </a:schemeClr>
+        </a:solidFill>
+        <a:round/>
+      </a:ln>
+    </cs:spPr>
+    <cs:defRPr sz="900" kern="1200"/>
+  </cs:dataTable>
+  <cs:downBar>
+    <cs:lnRef idx="0"/>
+    <cs:fillRef idx="0"/>
+    <cs:effectRef idx="0"/>
+    <cs:fontRef idx="minor">
+      <a:schemeClr val="tx1"/>
+    </cs:fontRef>
+    <cs:spPr>
+      <a:solidFill>
+        <a:schemeClr val="dk1">
+          <a:lumMod val="75000"/>
+          <a:lumOff val="25000"/>
+        </a:schemeClr>
+      </a:solidFill>
+      <a:ln w="9525" cap="flat" cmpd="sng" algn="ctr">
+        <a:solidFill>
+          <a:schemeClr val="tx1">
+            <a:lumMod val="65000"/>
+            <a:lumOff val="35000"/>
+          </a:schemeClr>
+        </a:solidFill>
+        <a:round/>
+      </a:ln>
+    </cs:spPr>
+  </cs:downBar>
+  <cs:dropLine>
+    <cs:lnRef idx="0"/>
+    <cs:fillRef idx="0"/>
+    <cs:effectRef idx="0"/>
+    <cs:fontRef idx="minor">
+      <a:schemeClr val="tx1"/>
+    </cs:fontRef>
+    <cs:spPr>
+      <a:ln w="9525" cap="flat" cmpd="sng" algn="ctr">
+        <a:solidFill>
+          <a:schemeClr val="tx1">
+            <a:lumMod val="35000"/>
+            <a:lumOff val="65000"/>
+          </a:schemeClr>
+        </a:solidFill>
+        <a:round/>
+      </a:ln>
+    </cs:spPr>
+  </cs:dropLine>
+  <cs:errorBar>
+    <cs:lnRef idx="0"/>
+    <cs:fillRef idx="0"/>
+    <cs:effectRef idx="0"/>
+    <cs:fontRef idx="minor">
+      <a:schemeClr val="tx1"/>
+    </cs:fontRef>
+    <cs:spPr>
+      <a:ln w="9525" cap="flat" cmpd="sng" algn="ctr">
+        <a:solidFill>
+          <a:schemeClr val="tx1">
+            <a:lumMod val="65000"/>
+            <a:lumOff val="35000"/>
+          </a:schemeClr>
+        </a:solidFill>
+        <a:round/>
+      </a:ln>
+    </cs:spPr>
+  </cs:errorBar>
+  <cs:floor>
+    <cs:lnRef idx="0"/>
+    <cs:fillRef idx="0"/>
+    <cs:effectRef idx="0"/>
+    <cs:fontRef idx="minor">
+      <a:schemeClr val="tx1"/>
+    </cs:fontRef>
+    <cs:spPr>
+      <a:noFill/>
+      <a:ln>
+        <a:noFill/>
+      </a:ln>
+    </cs:spPr>
+  </cs:floor>
+  <cs:gridlineMajor>
+    <cs:lnRef idx="0"/>
+    <cs:fillRef idx="0"/>
+    <cs:effectRef idx="0"/>
+    <cs:fontRef idx="minor">
+      <a:schemeClr val="tx1"/>
+    </cs:fontRef>
+    <cs:spPr>
+      <a:ln w="9525" cap="flat" cmpd="sng" algn="ctr">
+        <a:solidFill>
+          <a:schemeClr val="tx1">
+            <a:lumMod val="15000"/>
+            <a:lumOff val="85000"/>
+          </a:schemeClr>
+        </a:solidFill>
+        <a:round/>
+      </a:ln>
+    </cs:spPr>
+  </cs:gridlineMajor>
+  <cs:gridlineMinor>
+    <cs:lnRef idx="0"/>
+    <cs:fillRef idx="0"/>
+    <cs:effectRef idx="0"/>
+    <cs:fontRef idx="minor">
+      <a:schemeClr val="tx1"/>
+    </cs:fontRef>
+    <cs:spPr>
+      <a:ln w="9525" cap="flat" cmpd="sng" algn="ctr">
+        <a:solidFill>
+          <a:schemeClr val="tx1">
+            <a:lumMod val="5000"/>
+            <a:lumOff val="95000"/>
+          </a:schemeClr>
+        </a:solidFill>
+        <a:round/>
+      </a:ln>
+    </cs:spPr>
+  </cs:gridlineMinor>
+  <cs:hiLoLine>
+    <cs:lnRef idx="0"/>
+    <cs:fillRef idx="0"/>
+    <cs:effectRef idx="0"/>
+    <cs:fontRef idx="minor">
+      <a:schemeClr val="tx1"/>
+    </cs:fontRef>
+    <cs:spPr>
+      <a:ln w="9525" cap="flat" cmpd="sng" algn="ctr">
+        <a:solidFill>
+          <a:schemeClr val="tx1">
+            <a:lumMod val="50000"/>
+            <a:lumOff val="50000"/>
+          </a:schemeClr>
+        </a:solidFill>
+        <a:round/>
+      </a:ln>
+    </cs:spPr>
+  </cs:hiLoLine>
+  <cs:leaderLine>
+    <cs:lnRef idx="0"/>
+    <cs:fillRef idx="0"/>
+    <cs:effectRef idx="0"/>
+    <cs:fontRef idx="minor">
+      <a:schemeClr val="tx1"/>
+    </cs:fontRef>
+    <cs:spPr>
+      <a:ln w="9525" cap="flat" cmpd="sng" algn="ctr">
+        <a:solidFill>
+          <a:schemeClr val="tx1">
+            <a:lumMod val="35000"/>
+            <a:lumOff val="65000"/>
+          </a:schemeClr>
+        </a:solidFill>
+        <a:round/>
+      </a:ln>
+    </cs:spPr>
+  </cs:leaderLine>
+  <cs:legend>
+    <cs:lnRef idx="0"/>
+    <cs:fillRef idx="0"/>
+    <cs:effectRef idx="0"/>
+    <cs:fontRef idx="minor">
+      <a:schemeClr val="tx1">
+        <a:lumMod val="65000"/>
+        <a:lumOff val="35000"/>
+      </a:schemeClr>
+    </cs:fontRef>
+    <cs:defRPr sz="900" kern="1200"/>
+  </cs:legend>
+  <cs:plotArea mods="allowNoFillOverride allowNoLineOverride">
+    <cs:lnRef idx="0"/>
+    <cs:fillRef idx="0"/>
+    <cs:effectRef idx="0"/>
+    <cs:fontRef idx="minor">
+      <a:schemeClr val="tx1"/>
+    </cs:fontRef>
+  </cs:plotArea>
+  <cs:plotArea3D mods="allowNoFillOverride allowNoLineOverride">
+    <cs:lnRef idx="0"/>
+    <cs:fillRef idx="0"/>
+    <cs:effectRef idx="0"/>
+    <cs:fontRef idx="minor">
+      <a:schemeClr val="tx1"/>
+    </cs:fontRef>
+  </cs:plotArea3D>
+  <cs:seriesAxis>
+    <cs:lnRef idx="0"/>
+    <cs:fillRef idx="0"/>
+    <cs:effectRef idx="0"/>
+    <cs:fontRef idx="minor">
+      <a:schemeClr val="tx1">
+        <a:lumMod val="65000"/>
+        <a:lumOff val="35000"/>
+      </a:schemeClr>
+    </cs:fontRef>
+    <cs:defRPr sz="900" kern="1200"/>
+  </cs:seriesAxis>
+  <cs:seriesLine>
+    <cs:lnRef idx="0"/>
+    <cs:fillRef idx="0"/>
+    <cs:effectRef idx="0"/>
+    <cs:fontRef idx="minor">
+      <a:schemeClr val="tx1"/>
+    </cs:fontRef>
+    <cs:spPr>
+      <a:ln w="9525" cap="flat" cmpd="sng" algn="ctr">
+        <a:solidFill>
+          <a:schemeClr val="tx1">
+            <a:lumMod val="35000"/>
+            <a:lumOff val="65000"/>
+          </a:schemeClr>
+        </a:solidFill>
+        <a:round/>
+      </a:ln>
+    </cs:spPr>
+  </cs:seriesLine>
+  <cs:title>
+    <cs:lnRef idx="0"/>
+    <cs:fillRef idx="0"/>
+    <cs:effectRef idx="0"/>
+    <cs:fontRef idx="minor">
+      <a:schemeClr val="tx1">
+        <a:lumMod val="65000"/>
+        <a:lumOff val="35000"/>
+      </a:schemeClr>
+    </cs:fontRef>
+    <cs:defRPr sz="1400" b="0" kern="1200" spc="0" baseline="0"/>
+  </cs:title>
+  <cs:trendline>
+    <cs:lnRef idx="0">
+      <cs:styleClr val="auto"/>
+    </cs:lnRef>
+    <cs:fillRef idx="0"/>
+    <cs:effectRef idx="0"/>
+    <cs:fontRef idx="minor">
+      <a:schemeClr val="tx1"/>
+    </cs:fontRef>
+    <cs:spPr>
+      <a:ln w="19050" cap="rnd">
+        <a:solidFill>
+          <a:schemeClr val="phClr"/>
+        </a:solidFill>
+        <a:prstDash val="sysDot"/>
+      </a:ln>
+    </cs:spPr>
+  </cs:trendline>
+  <cs:trendlineLabel>
+    <cs:lnRef idx="0"/>
+    <cs:fillRef idx="0"/>
+    <cs:effectRef idx="0"/>
+    <cs:fontRef idx="minor">
+      <a:schemeClr val="tx1">
+        <a:lumMod val="65000"/>
+        <a:lumOff val="35000"/>
+      </a:schemeClr>
+    </cs:fontRef>
+    <cs:defRPr sz="900" kern="1200"/>
+  </cs:trendlineLabel>
+  <cs:upBar>
+    <cs:lnRef idx="0"/>
+    <cs:fillRef idx="0"/>
+    <cs:effectRef idx="0"/>
+    <cs:fontRef idx="minor">
+      <a:schemeClr val="tx1"/>
+    </cs:fontRef>
+    <cs:spPr>
+      <a:solidFill>
+        <a:schemeClr val="lt1"/>
+      </a:solidFill>
+      <a:ln w="9525" cap="flat" cmpd="sng" algn="ctr">
+        <a:solidFill>
+          <a:schemeClr val="tx1">
+            <a:lumMod val="65000"/>
+            <a:lumOff val="35000"/>
+          </a:schemeClr>
+        </a:solidFill>
+        <a:round/>
+      </a:ln>
+    </cs:spPr>
+  </cs:upBar>
+  <cs:valueAxis>
+    <cs:lnRef idx="0"/>
+    <cs:fillRef idx="0"/>
+    <cs:effectRef idx="0"/>
+    <cs:fontRef idx="minor">
+      <a:schemeClr val="tx1">
+        <a:lumMod val="65000"/>
+        <a:lumOff val="35000"/>
+      </a:schemeClr>
+    </cs:fontRef>
+    <cs:spPr>
+      <a:ln w="9525" cap="flat" cmpd="sng" algn="ctr">
+        <a:solidFill>
+          <a:schemeClr val="tx1">
+            <a:lumMod val="25000"/>
+            <a:lumOff val="75000"/>
+          </a:schemeClr>
+        </a:solidFill>
+        <a:round/>
+      </a:ln>
+    </cs:spPr>
+    <cs:defRPr sz="900" kern="1200"/>
+  </cs:valueAxis>
+  <cs:wall>
+    <cs:lnRef idx="0"/>
+    <cs:fillRef idx="0"/>
+    <cs:effectRef idx="0"/>
+    <cs:fontRef idx="minor">
+      <a:schemeClr val="tx1"/>
+    </cs:fontRef>
+    <cs:spPr>
+      <a:noFill/>
+      <a:ln>
+        <a:noFill/>
+      </a:ln>
+    </cs:spPr>
+  </cs:wall>
+</cs:chartStyle>
+</file>
+
+<file path=ppt/charts/style3.xml><?xml version="1.0" encoding="utf-8"?>
+<cs:chartStyle xmlns:cs="http://schemas.microsoft.com/office/drawing/2012/chartStyle" xmlns:a="http://schemas.openxmlformats.org/drawingml/2006/main" id="240">
+  <cs:axisTitle>
+    <cs:lnRef idx="0"/>
+    <cs:fillRef idx="0"/>
+    <cs:effectRef idx="0"/>
+    <cs:fontRef idx="minor">
+      <a:schemeClr val="tx1">
+        <a:lumMod val="65000"/>
+        <a:lumOff val="35000"/>
+      </a:schemeClr>
+    </cs:fontRef>
+    <cs:defRPr sz="1000" kern="1200"/>
+  </cs:axisTitle>
+  <cs:categoryAxis>
+    <cs:lnRef idx="0"/>
+    <cs:fillRef idx="0"/>
+    <cs:effectRef idx="0"/>
+    <cs:fontRef idx="minor">
+      <a:schemeClr val="tx1">
+        <a:lumMod val="65000"/>
+        <a:lumOff val="35000"/>
+      </a:schemeClr>
+    </cs:fontRef>
+    <cs:spPr>
+      <a:ln w="9525" cap="flat" cmpd="sng" algn="ctr">
+        <a:solidFill>
+          <a:schemeClr val="tx1">
+            <a:lumMod val="25000"/>
+            <a:lumOff val="75000"/>
+          </a:schemeClr>
+        </a:solidFill>
+        <a:round/>
+      </a:ln>
+    </cs:spPr>
+    <cs:defRPr sz="900" kern="1200"/>
+  </cs:categoryAxis>
+  <cs:chartArea mods="allowNoFillOverride allowNoLineOverride">
+    <cs:lnRef idx="0"/>
+    <cs:fillRef idx="0"/>
+    <cs:effectRef idx="0"/>
+    <cs:fontRef idx="minor">
+      <a:schemeClr val="tx1"/>
+    </cs:fontRef>
+    <cs:spPr>
+      <a:solidFill>
+        <a:schemeClr val="bg1"/>
+      </a:solidFill>
+      <a:ln w="9525" cap="flat" cmpd="sng" algn="ctr">
+        <a:solidFill>
+          <a:schemeClr val="tx1">
+            <a:lumMod val="15000"/>
+            <a:lumOff val="85000"/>
+          </a:schemeClr>
+        </a:solidFill>
+        <a:round/>
+      </a:ln>
+    </cs:spPr>
+    <cs:defRPr sz="1000" kern="1200"/>
+  </cs:chartArea>
+  <cs:dataLabel>
+    <cs:lnRef idx="0"/>
+    <cs:fillRef idx="0"/>
+    <cs:effectRef idx="0"/>
+    <cs:fontRef idx="minor">
+      <a:schemeClr val="tx1">
+        <a:lumMod val="75000"/>
+        <a:lumOff val="25000"/>
+      </a:schemeClr>
+    </cs:fontRef>
+    <cs:defRPr sz="900" kern="1200"/>
+  </cs:dataLabel>
+  <cs:dataLabelCallout>
+    <cs:lnRef idx="0"/>
+    <cs:fillRef idx="0"/>
+    <cs:effectRef idx="0"/>
+    <cs:fontRef idx="minor">
+      <a:schemeClr val="dk1">
+        <a:lumMod val="65000"/>
+        <a:lumOff val="35000"/>
+      </a:schemeClr>
+    </cs:fontRef>
+    <cs:spPr>
+      <a:solidFill>
+        <a:schemeClr val="lt1"/>
+      </a:solidFill>
+      <a:ln>
+        <a:solidFill>
+          <a:schemeClr val="dk1">
+            <a:lumMod val="25000"/>
+            <a:lumOff val="75000"/>
+          </a:schemeClr>
+        </a:solidFill>
+      </a:ln>
+    </cs:spPr>
+    <cs:defRPr sz="900" kern="1200"/>
+    <cs:bodyPr rot="0" spcFirstLastPara="1" vertOverflow="clip" horzOverflow="clip" vert="horz" wrap="square" lIns="36576" tIns="18288" rIns="36576" bIns="18288" anchor="ctr" anchorCtr="1">
+      <a:spAutoFit/>
+    </cs:bodyPr>
+  </cs:dataLabelCallout>
+  <cs:dataPoint>
+    <cs:lnRef idx="0"/>
+    <cs:fillRef idx="1">
+      <cs:styleClr val="auto"/>
+    </cs:fillRef>
+    <cs:effectRef idx="0"/>
+    <cs:fontRef idx="minor">
+      <a:schemeClr val="tx1"/>
+    </cs:fontRef>
+  </cs:dataPoint>
+  <cs:dataPoint3D>
+    <cs:lnRef idx="0"/>
+    <cs:fillRef idx="1">
+      <cs:styleClr val="auto"/>
+    </cs:fillRef>
+    <cs:effectRef idx="0"/>
+    <cs:fontRef idx="minor">
+      <a:schemeClr val="tx1"/>
+    </cs:fontRef>
+  </cs:dataPoint3D>
+  <cs:dataPointLine>
+    <cs:lnRef idx="0">
+      <cs:styleClr val="auto"/>
+    </cs:lnRef>
+    <cs:fillRef idx="1"/>
+    <cs:effectRef idx="0"/>
+    <cs:fontRef idx="minor">
+      <a:schemeClr val="tx1"/>
+    </cs:fontRef>
+    <cs:spPr>
+      <a:ln w="19050" cap="rnd">
+        <a:solidFill>
+          <a:schemeClr val="phClr"/>
+        </a:solidFill>
+        <a:round/>
+      </a:ln>
+    </cs:spPr>
+  </cs:dataPointLine>
+  <cs:dataPointMarker>
+    <cs:lnRef idx="0">
+      <cs:styleClr val="auto"/>
+    </cs:lnRef>
+    <cs:fillRef idx="1">
+      <cs:styleClr val="auto"/>
+    </cs:fillRef>
+    <cs:effectRef idx="0"/>
+    <cs:fontRef idx="minor">
+      <a:schemeClr val="tx1"/>
+    </cs:fontRef>
+    <cs:spPr>
+      <a:ln w="9525">
+        <a:solidFill>
+          <a:schemeClr val="phClr"/>
+        </a:solidFill>
+      </a:ln>
+    </cs:spPr>
+  </cs:dataPointMarker>
+  <cs:dataPointMarkerLayout symbol="circle" size="5"/>
+  <cs:dataPointWireframe>
+    <cs:lnRef idx="0">
+      <cs:styleClr val="auto"/>
+    </cs:lnRef>
+    <cs:fillRef idx="0"/>
+    <cs:effectRef idx="0"/>
+    <cs:fontRef idx="minor">
+      <a:schemeClr val="dk1"/>
+    </cs:fontRef>
+    <cs:spPr>
+      <a:ln w="9525" cap="rnd">
+        <a:solidFill>
+          <a:schemeClr val="phClr"/>
+        </a:solidFill>
+        <a:round/>
+      </a:ln>
+    </cs:spPr>
+  </cs:dataPointWireframe>
+  <cs:dataTable>
+    <cs:lnRef idx="0"/>
+    <cs:fillRef idx="0"/>
+    <cs:effectRef idx="0"/>
+    <cs:fontRef idx="minor">
+      <a:schemeClr val="tx1">
+        <a:lumMod val="65000"/>
+        <a:lumOff val="35000"/>
+      </a:schemeClr>
+    </cs:fontRef>
+    <cs:spPr>
+      <a:noFill/>
+      <a:ln w="9525" cap="flat" cmpd="sng" algn="ctr">
+        <a:solidFill>
+          <a:schemeClr val="tx1">
+            <a:lumMod val="15000"/>
+            <a:lumOff val="85000"/>
+          </a:schemeClr>
+        </a:solidFill>
+        <a:round/>
+      </a:ln>
+    </cs:spPr>
+    <cs:defRPr sz="900" kern="1200"/>
+  </cs:dataTable>
+  <cs:downBar>
+    <cs:lnRef idx="0"/>
+    <cs:fillRef idx="0"/>
+    <cs:effectRef idx="0"/>
+    <cs:fontRef idx="minor">
+      <a:schemeClr val="tx1"/>
+    </cs:fontRef>
+    <cs:spPr>
+      <a:solidFill>
+        <a:schemeClr val="dk1">
+          <a:lumMod val="75000"/>
+          <a:lumOff val="25000"/>
+        </a:schemeClr>
+      </a:solidFill>
+      <a:ln w="9525" cap="flat" cmpd="sng" algn="ctr">
+        <a:solidFill>
+          <a:schemeClr val="tx1">
+            <a:lumMod val="65000"/>
+            <a:lumOff val="35000"/>
+          </a:schemeClr>
+        </a:solidFill>
+        <a:round/>
+      </a:ln>
+    </cs:spPr>
+  </cs:downBar>
+  <cs:dropLine>
+    <cs:lnRef idx="0"/>
+    <cs:fillRef idx="0"/>
+    <cs:effectRef idx="0"/>
+    <cs:fontRef idx="minor">
+      <a:schemeClr val="tx1"/>
+    </cs:fontRef>
+    <cs:spPr>
+      <a:ln w="9525" cap="flat" cmpd="sng" algn="ctr">
+        <a:solidFill>
+          <a:schemeClr val="tx1">
+            <a:lumMod val="35000"/>
+            <a:lumOff val="65000"/>
+          </a:schemeClr>
+        </a:solidFill>
+        <a:round/>
+      </a:ln>
+    </cs:spPr>
+  </cs:dropLine>
+  <cs:errorBar>
+    <cs:lnRef idx="0"/>
+    <cs:fillRef idx="0"/>
+    <cs:effectRef idx="0"/>
+    <cs:fontRef idx="minor">
+      <a:schemeClr val="tx1"/>
+    </cs:fontRef>
+    <cs:spPr>
+      <a:ln w="9525" cap="flat" cmpd="sng" algn="ctr">
+        <a:solidFill>
+          <a:schemeClr val="tx1">
+            <a:lumMod val="65000"/>
+            <a:lumOff val="35000"/>
+          </a:schemeClr>
+        </a:solidFill>
+        <a:round/>
+      </a:ln>
+    </cs:spPr>
+  </cs:errorBar>
+  <cs:floor>
+    <cs:lnRef idx="0"/>
+    <cs:fillRef idx="0"/>
+    <cs:effectRef idx="0"/>
+    <cs:fontRef idx="minor">
+      <a:schemeClr val="tx1"/>
+    </cs:fontRef>
+    <cs:spPr>
+      <a:noFill/>
+      <a:ln>
+        <a:noFill/>
+      </a:ln>
+    </cs:spPr>
+  </cs:floor>
+  <cs:gridlineMajor>
+    <cs:lnRef idx="0"/>
+    <cs:fillRef idx="0"/>
+    <cs:effectRef idx="0"/>
+    <cs:fontRef idx="minor">
+      <a:schemeClr val="tx1"/>
+    </cs:fontRef>
+    <cs:spPr>
+      <a:ln w="9525" cap="flat" cmpd="sng" algn="ctr">
+        <a:solidFill>
+          <a:schemeClr val="tx1">
+            <a:lumMod val="15000"/>
+            <a:lumOff val="85000"/>
+          </a:schemeClr>
+        </a:solidFill>
+        <a:round/>
+      </a:ln>
+    </cs:spPr>
+  </cs:gridlineMajor>
+  <cs:gridlineMinor>
+    <cs:lnRef idx="0"/>
+    <cs:fillRef idx="0"/>
+    <cs:effectRef idx="0"/>
+    <cs:fontRef idx="minor">
+      <a:schemeClr val="tx1"/>
+    </cs:fontRef>
+    <cs:spPr>
+      <a:ln w="9525" cap="flat" cmpd="sng" algn="ctr">
+        <a:solidFill>
+          <a:schemeClr val="tx1">
+            <a:lumMod val="5000"/>
+            <a:lumOff val="95000"/>
+          </a:schemeClr>
+        </a:solidFill>
+        <a:round/>
+      </a:ln>
+    </cs:spPr>
+  </cs:gridlineMinor>
+  <cs:hiLoLine>
+    <cs:lnRef idx="0"/>
+    <cs:fillRef idx="0"/>
+    <cs:effectRef idx="0"/>
+    <cs:fontRef idx="minor">
+      <a:schemeClr val="tx1"/>
+    </cs:fontRef>
+    <cs:spPr>
+      <a:ln w="9525" cap="flat" cmpd="sng" algn="ctr">
+        <a:solidFill>
+          <a:schemeClr val="tx1">
+            <a:lumMod val="50000"/>
+            <a:lumOff val="50000"/>
+          </a:schemeClr>
+        </a:solidFill>
+        <a:round/>
+      </a:ln>
+    </cs:spPr>
+  </cs:hiLoLine>
+  <cs:leaderLine>
+    <cs:lnRef idx="0"/>
+    <cs:fillRef idx="0"/>
+    <cs:effectRef idx="0"/>
+    <cs:fontRef idx="minor">
+      <a:schemeClr val="tx1"/>
+    </cs:fontRef>
+    <cs:spPr>
+      <a:ln w="9525" cap="flat" cmpd="sng" algn="ctr">
+        <a:solidFill>
+          <a:schemeClr val="tx1">
+            <a:lumMod val="35000"/>
+            <a:lumOff val="65000"/>
+          </a:schemeClr>
+        </a:solidFill>
+        <a:round/>
+      </a:ln>
+    </cs:spPr>
+  </cs:leaderLine>
+  <cs:legend>
+    <cs:lnRef idx="0"/>
+    <cs:fillRef idx="0"/>
+    <cs:effectRef idx="0"/>
+    <cs:fontRef idx="minor">
+      <a:schemeClr val="tx1">
+        <a:lumMod val="65000"/>
+        <a:lumOff val="35000"/>
+      </a:schemeClr>
+    </cs:fontRef>
+    <cs:defRPr sz="900" kern="1200"/>
+  </cs:legend>
+  <cs:plotArea mods="allowNoFillOverride allowNoLineOverride">
+    <cs:lnRef idx="0"/>
+    <cs:fillRef idx="0"/>
+    <cs:effectRef idx="0"/>
+    <cs:fontRef idx="minor">
+      <a:schemeClr val="tx1"/>
+    </cs:fontRef>
+  </cs:plotArea>
+  <cs:plotArea3D mods="allowNoFillOverride allowNoLineOverride">
+    <cs:lnRef idx="0"/>
+    <cs:fillRef idx="0"/>
+    <cs:effectRef idx="0"/>
+    <cs:fontRef idx="minor">
+      <a:schemeClr val="tx1"/>
+    </cs:fontRef>
+  </cs:plotArea3D>
+  <cs:seriesAxis>
+    <cs:lnRef idx="0"/>
+    <cs:fillRef idx="0"/>
+    <cs:effectRef idx="0"/>
+    <cs:fontRef idx="minor">
+      <a:schemeClr val="tx1">
+        <a:lumMod val="65000"/>
+        <a:lumOff val="35000"/>
+      </a:schemeClr>
+    </cs:fontRef>
+    <cs:defRPr sz="900" kern="1200"/>
+  </cs:seriesAxis>
+  <cs:seriesLine>
+    <cs:lnRef idx="0"/>
+    <cs:fillRef idx="0"/>
+    <cs:effectRef idx="0"/>
+    <cs:fontRef idx="minor">
+      <a:schemeClr val="tx1"/>
+    </cs:fontRef>
+    <cs:spPr>
+      <a:ln w="9525" cap="flat" cmpd="sng" algn="ctr">
+        <a:solidFill>
+          <a:schemeClr val="tx1">
+            <a:lumMod val="35000"/>
+            <a:lumOff val="65000"/>
+          </a:schemeClr>
+        </a:solidFill>
+        <a:round/>
+      </a:ln>
+    </cs:spPr>
+  </cs:seriesLine>
+  <cs:title>
+    <cs:lnRef idx="0"/>
+    <cs:fillRef idx="0"/>
+    <cs:effectRef idx="0"/>
+    <cs:fontRef idx="minor">
+      <a:schemeClr val="tx1">
+        <a:lumMod val="65000"/>
+        <a:lumOff val="35000"/>
+      </a:schemeClr>
+    </cs:fontRef>
+    <cs:defRPr sz="1400" b="0" kern="1200" spc="0" baseline="0"/>
+  </cs:title>
+  <cs:trendline>
+    <cs:lnRef idx="0">
+      <cs:styleClr val="auto"/>
+    </cs:lnRef>
+    <cs:fillRef idx="0"/>
+    <cs:effectRef idx="0"/>
+    <cs:fontRef idx="minor">
+      <a:schemeClr val="tx1"/>
+    </cs:fontRef>
+    <cs:spPr>
+      <a:ln w="19050" cap="rnd">
+        <a:solidFill>
+          <a:schemeClr val="phClr"/>
+        </a:solidFill>
+        <a:prstDash val="sysDot"/>
+      </a:ln>
+    </cs:spPr>
+  </cs:trendline>
+  <cs:trendlineLabel>
+    <cs:lnRef idx="0"/>
+    <cs:fillRef idx="0"/>
+    <cs:effectRef idx="0"/>
+    <cs:fontRef idx="minor">
+      <a:schemeClr val="tx1">
+        <a:lumMod val="65000"/>
+        <a:lumOff val="35000"/>
+      </a:schemeClr>
+    </cs:fontRef>
+    <cs:defRPr sz="900" kern="1200"/>
+  </cs:trendlineLabel>
+  <cs:upBar>
+    <cs:lnRef idx="0"/>
+    <cs:fillRef idx="0"/>
+    <cs:effectRef idx="0"/>
+    <cs:fontRef idx="minor">
+      <a:schemeClr val="tx1"/>
+    </cs:fontRef>
+    <cs:spPr>
+      <a:solidFill>
+        <a:schemeClr val="lt1"/>
+      </a:solidFill>
+      <a:ln w="9525" cap="flat" cmpd="sng" algn="ctr">
+        <a:solidFill>
+          <a:schemeClr val="tx1">
+            <a:lumMod val="65000"/>
+            <a:lumOff val="35000"/>
+          </a:schemeClr>
+        </a:solidFill>
+        <a:round/>
+      </a:ln>
+    </cs:spPr>
+  </cs:upBar>
+  <cs:valueAxis>
+    <cs:lnRef idx="0"/>
+    <cs:fillRef idx="0"/>
+    <cs:effectRef idx="0"/>
+    <cs:fontRef idx="minor">
+      <a:schemeClr val="tx1">
+        <a:lumMod val="65000"/>
+        <a:lumOff val="35000"/>
+      </a:schemeClr>
+    </cs:fontRef>
+    <cs:spPr>
+      <a:ln w="9525" cap="flat" cmpd="sng" algn="ctr">
+        <a:solidFill>
+          <a:schemeClr val="tx1">
+            <a:lumMod val="25000"/>
+            <a:lumOff val="75000"/>
+          </a:schemeClr>
+        </a:solidFill>
+        <a:round/>
+      </a:ln>
+    </cs:spPr>
+    <cs:defRPr sz="900" kern="1200"/>
+  </cs:valueAxis>
+  <cs:wall>
+    <cs:lnRef idx="0"/>
+    <cs:fillRef idx="0"/>
+    <cs:effectRef idx="0"/>
+    <cs:fontRef idx="minor">
+      <a:schemeClr val="tx1"/>
+    </cs:fontRef>
+    <cs:spPr>
+      <a:noFill/>
+      <a:ln>
+        <a:noFill/>
+      </a:ln>
+    </cs:spPr>
+  </cs:wall>
+</cs:chartStyle>
 </file>
 
 <file path=ppt/slideLayouts/slideLayout1.xml><?xml version="1.0" encoding="utf-8"?>
@@ -3338,7 +11203,7 @@
           <p:cNvPr id="2" name="Title 1">
             <a:extLst>
               <a:ext uri="{FF2B5EF4-FFF2-40B4-BE49-F238E27FC236}">
-                <a16:creationId xmlns:a16="http://schemas.microsoft.com/office/drawing/2014/main" id="{B0B36832-9282-DB0A-15CC-12051863D3A1}"/>
+                <a16:creationId xmlns:a16="http://schemas.microsoft.com/office/drawing/2014/main" id="{53E14163-77C7-8E36-95BA-9038AD2B4515}"/>
               </a:ext>
             </a:extLst>
           </p:cNvPr>
@@ -3354,7 +11219,10 @@
           <a:bodyPr/>
           <a:lstStyle/>
           <a:p>
-            <a:endParaRPr lang="en-US"/>
+            <a:r>
+              <a:rPr lang="en-US" dirty="0"/>
+              <a:t>Geant4 Simulation: Compton Profile Mapping</a:t>
+            </a:r>
           </a:p>
         </p:txBody>
       </p:sp>
@@ -3363,7 +11231,7 @@
           <p:cNvPr id="3" name="Subtitle 2">
             <a:extLst>
               <a:ext uri="{FF2B5EF4-FFF2-40B4-BE49-F238E27FC236}">
-                <a16:creationId xmlns:a16="http://schemas.microsoft.com/office/drawing/2014/main" id="{26D46960-6359-D0F9-7013-3D503AF4786A}"/>
+                <a16:creationId xmlns:a16="http://schemas.microsoft.com/office/drawing/2014/main" id="{5E38BDC4-9A79-8183-7CF1-67E0662F5C9B}"/>
               </a:ext>
             </a:extLst>
           </p:cNvPr>
@@ -3379,14 +11247,33 @@
           <a:bodyPr/>
           <a:lstStyle/>
           <a:p>
-            <a:endParaRPr lang="en-US" dirty="0"/>
+            <a:r>
+              <a:rPr lang="en-US" dirty="0">
+                <a:latin typeface="Monotype Corsiva" panose="03010101010201010101" pitchFamily="66" charset="0"/>
+              </a:rPr>
+              <a:t>Md Rahman</a:t>
+            </a:r>
+          </a:p>
+          <a:p>
+            <a:r>
+              <a:rPr lang="en-US" sz="1600" dirty="0"/>
+              <a:t>Advisor</a:t>
+            </a:r>
+          </a:p>
+          <a:p>
+            <a:r>
+              <a:rPr lang="en-US" dirty="0">
+                <a:latin typeface="Monotype Corsiva" panose="03010101010201010101" pitchFamily="66" charset="0"/>
+              </a:rPr>
+              <a:t>Professor Dongming Mei</a:t>
+            </a:r>
           </a:p>
         </p:txBody>
       </p:sp>
     </p:spTree>
     <p:extLst>
       <p:ext uri="{BB962C8B-B14F-4D97-AF65-F5344CB8AC3E}">
-        <p14:creationId xmlns:p14="http://schemas.microsoft.com/office/powerpoint/2010/main" val="3297089672"/>
+        <p14:creationId xmlns:p14="http://schemas.microsoft.com/office/powerpoint/2010/main" val="3360838445"/>
       </p:ext>
     </p:extLst>
   </p:cSld>
@@ -5352,6 +13239,761 @@
           <p:cNvPr id="2" name="Title 1">
             <a:extLst>
               <a:ext uri="{FF2B5EF4-FFF2-40B4-BE49-F238E27FC236}">
+                <a16:creationId xmlns:a16="http://schemas.microsoft.com/office/drawing/2014/main" id="{5AD22608-B33E-6895-4F23-0F2195525BDC}"/>
+              </a:ext>
+            </a:extLst>
+          </p:cNvPr>
+          <p:cNvSpPr>
+            <a:spLocks noGrp="1"/>
+          </p:cNvSpPr>
+          <p:nvPr>
+            <p:ph type="title"/>
+          </p:nvPr>
+        </p:nvSpPr>
+        <p:spPr/>
+        <p:txBody>
+          <a:bodyPr/>
+          <a:lstStyle/>
+          <a:p>
+            <a:pPr algn="ctr"/>
+            <a:r>
+              <a:rPr lang="en-US" dirty="0"/>
+              <a:t>Scattering Events</a:t>
+            </a:r>
+          </a:p>
+        </p:txBody>
+      </p:sp>
+      <p:pic>
+        <p:nvPicPr>
+          <p:cNvPr id="5" name="Content Placeholder 4">
+            <a:extLst>
+              <a:ext uri="{FF2B5EF4-FFF2-40B4-BE49-F238E27FC236}">
+                <a16:creationId xmlns:a16="http://schemas.microsoft.com/office/drawing/2014/main" id="{CE4604E5-C873-2B66-8FE3-A9C5CB47A3E9}"/>
+              </a:ext>
+            </a:extLst>
+          </p:cNvPr>
+          <p:cNvPicPr>
+            <a:picLocks noGrp="1" noChangeAspect="1"/>
+          </p:cNvPicPr>
+          <p:nvPr>
+            <p:ph idx="1"/>
+          </p:nvPr>
+        </p:nvPicPr>
+        <p:blipFill>
+          <a:blip r:embed="rId2"/>
+          <a:stretch>
+            <a:fillRect/>
+          </a:stretch>
+        </p:blipFill>
+        <p:spPr>
+          <a:xfrm>
+            <a:off x="0" y="1887318"/>
+            <a:ext cx="5811673" cy="2774510"/>
+          </a:xfrm>
+          <a:prstGeom prst="rect">
+            <a:avLst/>
+          </a:prstGeom>
+        </p:spPr>
+      </p:pic>
+      <p:pic>
+        <p:nvPicPr>
+          <p:cNvPr id="7" name="Picture 6">
+            <a:extLst>
+              <a:ext uri="{FF2B5EF4-FFF2-40B4-BE49-F238E27FC236}">
+                <a16:creationId xmlns:a16="http://schemas.microsoft.com/office/drawing/2014/main" id="{74823F31-1DED-7C82-8A04-984E8A9A340D}"/>
+              </a:ext>
+            </a:extLst>
+          </p:cNvPr>
+          <p:cNvPicPr>
+            <a:picLocks noChangeAspect="1"/>
+          </p:cNvPicPr>
+          <p:nvPr/>
+        </p:nvPicPr>
+        <p:blipFill>
+          <a:blip r:embed="rId3"/>
+          <a:stretch>
+            <a:fillRect/>
+          </a:stretch>
+        </p:blipFill>
+        <p:spPr>
+          <a:xfrm>
+            <a:off x="6380329" y="1690688"/>
+            <a:ext cx="5459248" cy="2788643"/>
+          </a:xfrm>
+          <a:prstGeom prst="rect">
+            <a:avLst/>
+          </a:prstGeom>
+        </p:spPr>
+      </p:pic>
+      <p:pic>
+        <p:nvPicPr>
+          <p:cNvPr id="9" name="Picture 8">
+            <a:extLst>
+              <a:ext uri="{FF2B5EF4-FFF2-40B4-BE49-F238E27FC236}">
+                <a16:creationId xmlns:a16="http://schemas.microsoft.com/office/drawing/2014/main" id="{D07A40C7-1821-4D74-2808-39182CF124C3}"/>
+              </a:ext>
+            </a:extLst>
+          </p:cNvPr>
+          <p:cNvPicPr>
+            <a:picLocks noChangeAspect="1"/>
+          </p:cNvPicPr>
+          <p:nvPr/>
+        </p:nvPicPr>
+        <p:blipFill>
+          <a:blip r:embed="rId4"/>
+          <a:stretch>
+            <a:fillRect/>
+          </a:stretch>
+        </p:blipFill>
+        <p:spPr>
+          <a:xfrm>
+            <a:off x="3687096" y="3429000"/>
+            <a:ext cx="6096000" cy="2976065"/>
+          </a:xfrm>
+          <a:prstGeom prst="rect">
+            <a:avLst/>
+          </a:prstGeom>
+        </p:spPr>
+      </p:pic>
+    </p:spTree>
+    <p:extLst>
+      <p:ext uri="{BB962C8B-B14F-4D97-AF65-F5344CB8AC3E}">
+        <p14:creationId xmlns:p14="http://schemas.microsoft.com/office/powerpoint/2010/main" val="4290061342"/>
+      </p:ext>
+    </p:extLst>
+  </p:cSld>
+  <p:clrMapOvr>
+    <a:masterClrMapping/>
+  </p:clrMapOvr>
+</p:sld>
+</file>
+
+<file path=ppt/slides/slide5.xml><?xml version="1.0" encoding="utf-8"?>
+<p:sld xmlns:a="http://schemas.openxmlformats.org/drawingml/2006/main" xmlns:r="http://schemas.openxmlformats.org/officeDocument/2006/relationships" xmlns:p="http://schemas.openxmlformats.org/presentationml/2006/main">
+  <p:cSld>
+    <p:spTree>
+      <p:nvGrpSpPr>
+        <p:cNvPr id="1" name=""/>
+        <p:cNvGrpSpPr/>
+        <p:nvPr/>
+      </p:nvGrpSpPr>
+      <p:grpSpPr>
+        <a:xfrm>
+          <a:off x="0" y="0"/>
+          <a:ext cx="0" cy="0"/>
+          <a:chOff x="0" y="0"/>
+          <a:chExt cx="0" cy="0"/>
+        </a:xfrm>
+      </p:grpSpPr>
+      <p:sp>
+        <p:nvSpPr>
+          <p:cNvPr id="2" name="Title 1">
+            <a:extLst>
+              <a:ext uri="{FF2B5EF4-FFF2-40B4-BE49-F238E27FC236}">
+                <a16:creationId xmlns:a16="http://schemas.microsoft.com/office/drawing/2014/main" id="{FB488899-B3DD-3C11-F6EA-F27E6F96CFBB}"/>
+              </a:ext>
+            </a:extLst>
+          </p:cNvPr>
+          <p:cNvSpPr>
+            <a:spLocks noGrp="1"/>
+          </p:cNvSpPr>
+          <p:nvPr>
+            <p:ph type="title"/>
+          </p:nvPr>
+        </p:nvSpPr>
+        <p:spPr>
+          <a:xfrm>
+            <a:off x="838200" y="365126"/>
+            <a:ext cx="10515600" cy="774358"/>
+          </a:xfrm>
+        </p:spPr>
+        <p:txBody>
+          <a:bodyPr>
+            <a:normAutofit/>
+          </a:bodyPr>
+          <a:lstStyle/>
+          <a:p>
+            <a:pPr algn="ctr"/>
+            <a:r>
+              <a:rPr lang="en-US" sz="3200" dirty="0"/>
+              <a:t>Compton Scattering from Tumor</a:t>
+            </a:r>
+          </a:p>
+        </p:txBody>
+      </p:sp>
+      <p:pic>
+        <p:nvPicPr>
+          <p:cNvPr id="7" name="Picture 6">
+            <a:extLst>
+              <a:ext uri="{FF2B5EF4-FFF2-40B4-BE49-F238E27FC236}">
+                <a16:creationId xmlns:a16="http://schemas.microsoft.com/office/drawing/2014/main" id="{82E873C9-2E17-11FB-61ED-912CC897058E}"/>
+              </a:ext>
+            </a:extLst>
+          </p:cNvPr>
+          <p:cNvPicPr>
+            <a:picLocks noChangeAspect="1"/>
+          </p:cNvPicPr>
+          <p:nvPr/>
+        </p:nvPicPr>
+        <p:blipFill>
+          <a:blip r:embed="rId2"/>
+          <a:stretch>
+            <a:fillRect/>
+          </a:stretch>
+        </p:blipFill>
+        <p:spPr>
+          <a:xfrm>
+            <a:off x="6884508" y="365126"/>
+            <a:ext cx="4980936" cy="4530431"/>
+          </a:xfrm>
+          <a:prstGeom prst="rect">
+            <a:avLst/>
+          </a:prstGeom>
+        </p:spPr>
+      </p:pic>
+      <p:graphicFrame>
+        <p:nvGraphicFramePr>
+          <p:cNvPr id="5" name="Content Placeholder 4">
+            <a:extLst>
+              <a:ext uri="{FF2B5EF4-FFF2-40B4-BE49-F238E27FC236}">
+                <a16:creationId xmlns:a16="http://schemas.microsoft.com/office/drawing/2014/main" id="{C5D9672F-5ABD-9F20-6E15-928E2147E3FD}"/>
+              </a:ext>
+            </a:extLst>
+          </p:cNvPr>
+          <p:cNvGraphicFramePr>
+            <a:graphicFrameLocks noGrp="1"/>
+          </p:cNvGraphicFramePr>
+          <p:nvPr>
+            <p:ph idx="1"/>
+            <p:extLst>
+              <p:ext uri="{D42A27DB-BD31-4B8C-83A1-F6EECF244321}">
+                <p14:modId xmlns:p14="http://schemas.microsoft.com/office/powerpoint/2010/main" val="3262726632"/>
+              </p:ext>
+            </p:extLst>
+          </p:nvPr>
+        </p:nvGraphicFramePr>
+        <p:xfrm>
+          <a:off x="838199" y="1902543"/>
+          <a:ext cx="5928361" cy="3091488"/>
+        </p:xfrm>
+        <a:graphic>
+          <a:graphicData uri="http://schemas.openxmlformats.org/drawingml/2006/chart">
+            <c:chart xmlns:c="http://schemas.openxmlformats.org/drawingml/2006/chart" xmlns:r="http://schemas.openxmlformats.org/officeDocument/2006/relationships" r:id="rId3"/>
+          </a:graphicData>
+        </a:graphic>
+      </p:graphicFrame>
+      <mc:AlternateContent xmlns:mc="http://schemas.openxmlformats.org/markup-compatibility/2006">
+        <mc:Choice xmlns:a14="http://schemas.microsoft.com/office/drawing/2010/main" Requires="a14">
+          <p:sp>
+            <p:nvSpPr>
+              <p:cNvPr id="8" name="Title 1">
+                <a:extLst>
+                  <a:ext uri="{FF2B5EF4-FFF2-40B4-BE49-F238E27FC236}">
+                    <a16:creationId xmlns:a16="http://schemas.microsoft.com/office/drawing/2014/main" id="{F5CE621C-A5EB-90C9-D926-5AAADB9CB597}"/>
+                  </a:ext>
+                </a:extLst>
+              </p:cNvPr>
+              <p:cNvSpPr txBox="1">
+                <a:spLocks/>
+              </p:cNvSpPr>
+              <p:nvPr/>
+            </p:nvSpPr>
+            <p:spPr>
+              <a:xfrm>
+                <a:off x="990600" y="5103595"/>
+                <a:ext cx="10515600" cy="1240934"/>
+              </a:xfrm>
+              <a:prstGeom prst="rect">
+                <a:avLst/>
+              </a:prstGeom>
+            </p:spPr>
+            <p:txBody>
+              <a:bodyPr vert="horz" lIns="91440" tIns="45720" rIns="91440" bIns="45720" rtlCol="0" anchor="ctr">
+                <a:normAutofit fontScale="77500" lnSpcReduction="20000"/>
+              </a:bodyPr>
+              <a:lstStyle>
+                <a:lvl1pPr algn="l" defTabSz="914400" rtl="0" eaLnBrk="1" latinLnBrk="0" hangingPunct="1">
+                  <a:lnSpc>
+                    <a:spcPct val="90000"/>
+                  </a:lnSpc>
+                  <a:spcBef>
+                    <a:spcPct val="0"/>
+                  </a:spcBef>
+                  <a:buNone/>
+                  <a:defRPr sz="4400" kern="1200">
+                    <a:solidFill>
+                      <a:schemeClr val="tx1"/>
+                    </a:solidFill>
+                    <a:latin typeface="+mj-lt"/>
+                    <a:ea typeface="+mj-ea"/>
+                    <a:cs typeface="+mj-cs"/>
+                  </a:defRPr>
+                </a:lvl1pPr>
+              </a:lstStyle>
+              <a:p>
+                <a:pPr algn="ctr"/>
+                <a:endParaRPr lang="en-US" sz="3200" dirty="0"/>
+              </a:p>
+              <a:p>
+                <a:pPr algn="ctr"/>
+                <a:r>
+                  <a:rPr lang="en-US" sz="3200" dirty="0"/>
+                  <a:t>Most of the incident gammas scattered at </a:t>
+                </a:r>
+                <a14:m>
+                  <m:oMath xmlns:m="http://schemas.openxmlformats.org/officeDocument/2006/math">
+                    <m:r>
+                      <a:rPr lang="en-US" sz="3200" i="1">
+                        <a:latin typeface="Cambria Math" panose="02040503050406030204" pitchFamily="18" charset="0"/>
+                      </a:rPr>
+                      <m:t>14.36~45.64</m:t>
+                    </m:r>
+                  </m:oMath>
+                </a14:m>
+                <a:r>
+                  <a:rPr lang="en-US" sz="3200" dirty="0"/>
+                  <a:t> since we are navigating toward the detector(30deg). </a:t>
+                </a:r>
+                <a:r>
+                  <a:rPr lang="en-US" sz="3200" dirty="0">
+                    <a:solidFill>
+                      <a:srgbClr val="FF0000"/>
+                    </a:solidFill>
+                  </a:rPr>
+                  <a:t>Scattered gammas from tumor is 3</a:t>
+                </a:r>
+                <a:r>
+                  <a:rPr lang="en-US" sz="3200" baseline="30000" dirty="0">
+                    <a:solidFill>
+                      <a:srgbClr val="FF0000"/>
+                    </a:solidFill>
+                  </a:rPr>
+                  <a:t>rd</a:t>
+                </a:r>
+                <a:r>
+                  <a:rPr lang="en-US" sz="3200" dirty="0">
+                    <a:solidFill>
+                      <a:srgbClr val="FF0000"/>
+                    </a:solidFill>
+                  </a:rPr>
+                  <a:t> steps.</a:t>
+                </a:r>
+              </a:p>
+              <a:p>
+                <a:pPr algn="ctr"/>
+                <a:endParaRPr lang="en-US" sz="3200" dirty="0"/>
+              </a:p>
+            </p:txBody>
+          </p:sp>
+        </mc:Choice>
+        <mc:Fallback>
+          <p:sp>
+            <p:nvSpPr>
+              <p:cNvPr id="8" name="Title 1">
+                <a:extLst>
+                  <a:ext uri="{FF2B5EF4-FFF2-40B4-BE49-F238E27FC236}">
+                    <a16:creationId xmlns:a16="http://schemas.microsoft.com/office/drawing/2014/main" id="{F5CE621C-A5EB-90C9-D926-5AAADB9CB597}"/>
+                  </a:ext>
+                </a:extLst>
+              </p:cNvPr>
+              <p:cNvSpPr txBox="1">
+                <a:spLocks noRot="1" noChangeAspect="1" noMove="1" noResize="1" noEditPoints="1" noAdjustHandles="1" noChangeArrowheads="1" noChangeShapeType="1" noTextEdit="1"/>
+              </p:cNvSpPr>
+              <p:nvPr/>
+            </p:nvSpPr>
+            <p:spPr>
+              <a:xfrm>
+                <a:off x="990600" y="5103595"/>
+                <a:ext cx="10515600" cy="1240934"/>
+              </a:xfrm>
+              <a:prstGeom prst="rect">
+                <a:avLst/>
+              </a:prstGeom>
+              <a:blipFill>
+                <a:blip r:embed="rId4"/>
+                <a:stretch>
+                  <a:fillRect r="-580"/>
+                </a:stretch>
+              </a:blipFill>
+            </p:spPr>
+            <p:txBody>
+              <a:bodyPr/>
+              <a:lstStyle/>
+              <a:p>
+                <a:r>
+                  <a:rPr lang="en-US">
+                    <a:noFill/>
+                  </a:rPr>
+                  <a:t> </a:t>
+                </a:r>
+              </a:p>
+            </p:txBody>
+          </p:sp>
+        </mc:Fallback>
+      </mc:AlternateContent>
+    </p:spTree>
+    <p:extLst>
+      <p:ext uri="{BB962C8B-B14F-4D97-AF65-F5344CB8AC3E}">
+        <p14:creationId xmlns:p14="http://schemas.microsoft.com/office/powerpoint/2010/main" val="3678289055"/>
+      </p:ext>
+    </p:extLst>
+  </p:cSld>
+  <p:clrMapOvr>
+    <a:masterClrMapping/>
+  </p:clrMapOvr>
+</p:sld>
+</file>
+
+<file path=ppt/slides/slide6.xml><?xml version="1.0" encoding="utf-8"?>
+<p:sld xmlns:a="http://schemas.openxmlformats.org/drawingml/2006/main" xmlns:r="http://schemas.openxmlformats.org/officeDocument/2006/relationships" xmlns:p="http://schemas.openxmlformats.org/presentationml/2006/main">
+  <p:cSld>
+    <p:spTree>
+      <p:nvGrpSpPr>
+        <p:cNvPr id="1" name=""/>
+        <p:cNvGrpSpPr/>
+        <p:nvPr/>
+      </p:nvGrpSpPr>
+      <p:grpSpPr>
+        <a:xfrm>
+          <a:off x="0" y="0"/>
+          <a:ext cx="0" cy="0"/>
+          <a:chOff x="0" y="0"/>
+          <a:chExt cx="0" cy="0"/>
+        </a:xfrm>
+      </p:grpSpPr>
+      <p:sp>
+        <p:nvSpPr>
+          <p:cNvPr id="2" name="Title 1">
+            <a:extLst>
+              <a:ext uri="{FF2B5EF4-FFF2-40B4-BE49-F238E27FC236}">
+                <a16:creationId xmlns:a16="http://schemas.microsoft.com/office/drawing/2014/main" id="{D478AEDB-C832-14BC-F052-FA59046BF962}"/>
+              </a:ext>
+            </a:extLst>
+          </p:cNvPr>
+          <p:cNvSpPr>
+            <a:spLocks noGrp="1"/>
+          </p:cNvSpPr>
+          <p:nvPr>
+            <p:ph type="title"/>
+          </p:nvPr>
+        </p:nvSpPr>
+        <p:spPr>
+          <a:xfrm>
+            <a:off x="838200" y="365126"/>
+            <a:ext cx="10515600" cy="591478"/>
+          </a:xfrm>
+        </p:spPr>
+        <p:txBody>
+          <a:bodyPr>
+            <a:normAutofit fontScale="90000"/>
+          </a:bodyPr>
+          <a:lstStyle/>
+          <a:p>
+            <a:endParaRPr lang="en-US" dirty="0"/>
+          </a:p>
+        </p:txBody>
+      </p:sp>
+      <p:graphicFrame>
+        <p:nvGraphicFramePr>
+          <p:cNvPr id="4" name="Content Placeholder 3">
+            <a:extLst>
+              <a:ext uri="{FF2B5EF4-FFF2-40B4-BE49-F238E27FC236}">
+                <a16:creationId xmlns:a16="http://schemas.microsoft.com/office/drawing/2014/main" id="{BC9E245A-1275-879F-AB4D-8E80E2BB154B}"/>
+              </a:ext>
+            </a:extLst>
+          </p:cNvPr>
+          <p:cNvGraphicFramePr>
+            <a:graphicFrameLocks noGrp="1"/>
+          </p:cNvGraphicFramePr>
+          <p:nvPr>
+            <p:ph idx="1"/>
+            <p:extLst>
+              <p:ext uri="{D42A27DB-BD31-4B8C-83A1-F6EECF244321}">
+                <p14:modId xmlns:p14="http://schemas.microsoft.com/office/powerpoint/2010/main" val="3778137421"/>
+              </p:ext>
+            </p:extLst>
+          </p:nvPr>
+        </p:nvGraphicFramePr>
+        <p:xfrm>
+          <a:off x="607142" y="1248849"/>
+          <a:ext cx="5488858" cy="2466156"/>
+        </p:xfrm>
+        <a:graphic>
+          <a:graphicData uri="http://schemas.openxmlformats.org/drawingml/2006/chart">
+            <c:chart xmlns:c="http://schemas.openxmlformats.org/drawingml/2006/chart" xmlns:r="http://schemas.openxmlformats.org/officeDocument/2006/relationships" r:id="rId2"/>
+          </a:graphicData>
+        </a:graphic>
+      </p:graphicFrame>
+      <p:graphicFrame>
+        <p:nvGraphicFramePr>
+          <p:cNvPr id="5" name="Chart 4">
+            <a:extLst>
+              <a:ext uri="{FF2B5EF4-FFF2-40B4-BE49-F238E27FC236}">
+                <a16:creationId xmlns:a16="http://schemas.microsoft.com/office/drawing/2014/main" id="{84E52DC4-584A-B785-4653-18C7376EA60B}"/>
+              </a:ext>
+            </a:extLst>
+          </p:cNvPr>
+          <p:cNvGraphicFramePr>
+            <a:graphicFrameLocks/>
+          </p:cNvGraphicFramePr>
+          <p:nvPr>
+            <p:extLst>
+              <p:ext uri="{D42A27DB-BD31-4B8C-83A1-F6EECF244321}">
+                <p14:modId xmlns:p14="http://schemas.microsoft.com/office/powerpoint/2010/main" val="1239449985"/>
+              </p:ext>
+            </p:extLst>
+          </p:nvPr>
+        </p:nvGraphicFramePr>
+        <p:xfrm>
+          <a:off x="6411464" y="1110327"/>
+          <a:ext cx="4572000" cy="2743200"/>
+        </p:xfrm>
+        <a:graphic>
+          <a:graphicData uri="http://schemas.openxmlformats.org/drawingml/2006/chart">
+            <c:chart xmlns:c="http://schemas.openxmlformats.org/drawingml/2006/chart" xmlns:r="http://schemas.openxmlformats.org/officeDocument/2006/relationships" r:id="rId3"/>
+          </a:graphicData>
+        </a:graphic>
+      </p:graphicFrame>
+      <p:pic>
+        <p:nvPicPr>
+          <p:cNvPr id="7" name="Picture 6">
+            <a:extLst>
+              <a:ext uri="{FF2B5EF4-FFF2-40B4-BE49-F238E27FC236}">
+                <a16:creationId xmlns:a16="http://schemas.microsoft.com/office/drawing/2014/main" id="{91ED60C8-8705-588F-88BC-39FB8300D7BA}"/>
+              </a:ext>
+            </a:extLst>
+          </p:cNvPr>
+          <p:cNvPicPr>
+            <a:picLocks noChangeAspect="1"/>
+          </p:cNvPicPr>
+          <p:nvPr/>
+        </p:nvPicPr>
+        <p:blipFill>
+          <a:blip r:embed="rId4"/>
+          <a:stretch>
+            <a:fillRect/>
+          </a:stretch>
+        </p:blipFill>
+        <p:spPr>
+          <a:xfrm>
+            <a:off x="607142" y="3429000"/>
+            <a:ext cx="3628094" cy="3195112"/>
+          </a:xfrm>
+          <a:prstGeom prst="rect">
+            <a:avLst/>
+          </a:prstGeom>
+        </p:spPr>
+      </p:pic>
+      <mc:AlternateContent xmlns:mc="http://schemas.openxmlformats.org/markup-compatibility/2006">
+        <mc:Choice xmlns:a14="http://schemas.microsoft.com/office/drawing/2010/main" Requires="a14">
+          <p:sp>
+            <p:nvSpPr>
+              <p:cNvPr id="9" name="Title 1">
+                <a:extLst>
+                  <a:ext uri="{FF2B5EF4-FFF2-40B4-BE49-F238E27FC236}">
+                    <a16:creationId xmlns:a16="http://schemas.microsoft.com/office/drawing/2014/main" id="{9BC5688F-294D-0DA8-1CFD-F6935CE0C764}"/>
+                  </a:ext>
+                </a:extLst>
+              </p:cNvPr>
+              <p:cNvSpPr txBox="1">
+                <a:spLocks/>
+              </p:cNvSpPr>
+              <p:nvPr/>
+            </p:nvSpPr>
+            <p:spPr>
+              <a:xfrm>
+                <a:off x="4712676" y="4145772"/>
+                <a:ext cx="6793523" cy="2198757"/>
+              </a:xfrm>
+              <a:prstGeom prst="rect">
+                <a:avLst/>
+              </a:prstGeom>
+            </p:spPr>
+            <p:txBody>
+              <a:bodyPr vert="horz" lIns="91440" tIns="45720" rIns="91440" bIns="45720" rtlCol="0" anchor="ctr">
+                <a:normAutofit fontScale="92500" lnSpcReduction="20000"/>
+              </a:bodyPr>
+              <a:lstStyle>
+                <a:lvl1pPr algn="l" defTabSz="914400" rtl="0" eaLnBrk="1" latinLnBrk="0" hangingPunct="1">
+                  <a:lnSpc>
+                    <a:spcPct val="90000"/>
+                  </a:lnSpc>
+                  <a:spcBef>
+                    <a:spcPct val="0"/>
+                  </a:spcBef>
+                  <a:buNone/>
+                  <a:defRPr sz="4400" kern="1200">
+                    <a:solidFill>
+                      <a:schemeClr val="tx1"/>
+                    </a:solidFill>
+                    <a:latin typeface="+mj-lt"/>
+                    <a:ea typeface="+mj-ea"/>
+                    <a:cs typeface="+mj-cs"/>
+                  </a:defRPr>
+                </a:lvl1pPr>
+              </a:lstStyle>
+              <a:p>
+                <a:pPr algn="ctr"/>
+                <a:endParaRPr lang="en-US" sz="3200" dirty="0"/>
+              </a:p>
+              <a:p>
+                <a:pPr algn="ctr"/>
+                <a:r>
+                  <a:rPr lang="en-US" sz="3200" dirty="0"/>
+                  <a:t>Most of the incident gammas scattered at </a:t>
+                </a:r>
+                <a14:m>
+                  <m:oMath xmlns:m="http://schemas.openxmlformats.org/officeDocument/2006/math">
+                    <m:r>
+                      <a:rPr lang="en-US" sz="3200" i="1">
+                        <a:latin typeface="Cambria Math" panose="02040503050406030204" pitchFamily="18" charset="0"/>
+                      </a:rPr>
+                      <m:t>14.36~45.64</m:t>
+                    </m:r>
+                  </m:oMath>
+                </a14:m>
+                <a:r>
+                  <a:rPr lang="en-US" sz="3200" dirty="0"/>
+                  <a:t> since the detector cover this ranges.</a:t>
+                </a:r>
+              </a:p>
+              <a:p>
+                <a:pPr algn="ctr"/>
+                <a:r>
+                  <a:rPr lang="en-US" sz="3200" dirty="0">
+                    <a:solidFill>
+                      <a:srgbClr val="FF0000"/>
+                    </a:solidFill>
+                  </a:rPr>
+                  <a:t>Scattered gammas from tumor is 3</a:t>
+                </a:r>
+                <a:r>
+                  <a:rPr lang="en-US" sz="3200" baseline="30000" dirty="0">
+                    <a:solidFill>
+                      <a:srgbClr val="FF0000"/>
+                    </a:solidFill>
+                  </a:rPr>
+                  <a:t>rd</a:t>
+                </a:r>
+                <a:r>
+                  <a:rPr lang="en-US" sz="3200" dirty="0">
+                    <a:solidFill>
+                      <a:srgbClr val="FF0000"/>
+                    </a:solidFill>
+                  </a:rPr>
+                  <a:t> steps. </a:t>
+                </a:r>
+              </a:p>
+              <a:p>
+                <a:pPr algn="ctr"/>
+                <a:r>
+                  <a:rPr lang="en-US" sz="3200" dirty="0"/>
+                  <a:t>Gammas in detectors are 7</a:t>
+                </a:r>
+                <a:r>
+                  <a:rPr lang="en-US" sz="3200" baseline="30000" dirty="0"/>
+                  <a:t>th</a:t>
+                </a:r>
+                <a:r>
+                  <a:rPr lang="en-US" sz="3200" dirty="0"/>
+                  <a:t>/8</a:t>
+                </a:r>
+                <a:r>
+                  <a:rPr lang="en-US" sz="3200" baseline="30000" dirty="0"/>
+                  <a:t>th</a:t>
+                </a:r>
+                <a:r>
+                  <a:rPr lang="en-US" sz="3200" dirty="0"/>
+                  <a:t> steps.</a:t>
+                </a:r>
+              </a:p>
+              <a:p>
+                <a:pPr algn="ctr"/>
+                <a:endParaRPr lang="en-US" sz="3200" dirty="0"/>
+              </a:p>
+            </p:txBody>
+          </p:sp>
+        </mc:Choice>
+        <mc:Fallback>
+          <p:sp>
+            <p:nvSpPr>
+              <p:cNvPr id="9" name="Title 1">
+                <a:extLst>
+                  <a:ext uri="{FF2B5EF4-FFF2-40B4-BE49-F238E27FC236}">
+                    <a16:creationId xmlns:a16="http://schemas.microsoft.com/office/drawing/2014/main" id="{9BC5688F-294D-0DA8-1CFD-F6935CE0C764}"/>
+                  </a:ext>
+                </a:extLst>
+              </p:cNvPr>
+              <p:cNvSpPr txBox="1">
+                <a:spLocks noRot="1" noChangeAspect="1" noMove="1" noResize="1" noEditPoints="1" noAdjustHandles="1" noChangeArrowheads="1" noChangeShapeType="1" noTextEdit="1"/>
+              </p:cNvSpPr>
+              <p:nvPr/>
+            </p:nvSpPr>
+            <p:spPr>
+              <a:xfrm>
+                <a:off x="4712676" y="4145772"/>
+                <a:ext cx="6793523" cy="2198757"/>
+              </a:xfrm>
+              <a:prstGeom prst="rect">
+                <a:avLst/>
+              </a:prstGeom>
+              <a:blipFill>
+                <a:blip r:embed="rId5"/>
+                <a:stretch>
+                  <a:fillRect l="-1346" r="-2513"/>
+                </a:stretch>
+              </a:blipFill>
+            </p:spPr>
+            <p:txBody>
+              <a:bodyPr/>
+              <a:lstStyle/>
+              <a:p>
+                <a:r>
+                  <a:rPr lang="en-US">
+                    <a:noFill/>
+                  </a:rPr>
+                  <a:t> </a:t>
+                </a:r>
+              </a:p>
+            </p:txBody>
+          </p:sp>
+        </mc:Fallback>
+      </mc:AlternateContent>
+    </p:spTree>
+    <p:extLst>
+      <p:ext uri="{BB962C8B-B14F-4D97-AF65-F5344CB8AC3E}">
+        <p14:creationId xmlns:p14="http://schemas.microsoft.com/office/powerpoint/2010/main" val="742065886"/>
+      </p:ext>
+    </p:extLst>
+  </p:cSld>
+  <p:clrMapOvr>
+    <a:masterClrMapping/>
+  </p:clrMapOvr>
+</p:sld>
+</file>
+
+<file path=ppt/slides/slide7.xml><?xml version="1.0" encoding="utf-8"?>
+<p:sld xmlns:a="http://schemas.openxmlformats.org/drawingml/2006/main" xmlns:r="http://schemas.openxmlformats.org/officeDocument/2006/relationships" xmlns:p="http://schemas.openxmlformats.org/presentationml/2006/main">
+  <p:cSld>
+    <p:spTree>
+      <p:nvGrpSpPr>
+        <p:cNvPr id="1" name=""/>
+        <p:cNvGrpSpPr/>
+        <p:nvPr/>
+      </p:nvGrpSpPr>
+      <p:grpSpPr>
+        <a:xfrm>
+          <a:off x="0" y="0"/>
+          <a:ext cx="0" cy="0"/>
+          <a:chOff x="0" y="0"/>
+          <a:chExt cx="0" cy="0"/>
+        </a:xfrm>
+      </p:grpSpPr>
+      <p:sp>
+        <p:nvSpPr>
+          <p:cNvPr id="2" name="Title 1">
+            <a:extLst>
+              <a:ext uri="{FF2B5EF4-FFF2-40B4-BE49-F238E27FC236}">
                 <a16:creationId xmlns:a16="http://schemas.microsoft.com/office/drawing/2014/main" id="{7C8EAC55-160D-A0AE-C6F6-6CD61A3F0ACC}"/>
               </a:ext>
             </a:extLst>
@@ -5368,7 +14010,10 @@
           <a:bodyPr/>
           <a:lstStyle/>
           <a:p>
-            <a:endParaRPr lang="en-US"/>
+            <a:r>
+              <a:rPr lang="en-US" dirty="0"/>
+              <a:t>Is KN Formula Break down?</a:t>
+            </a:r>
           </a:p>
         </p:txBody>
       </p:sp>
@@ -5448,10 +14093,10 @@
       </p:sp>
       <p:pic>
         <p:nvPicPr>
-          <p:cNvPr id="4" name="Content Placeholder 11">
+          <p:cNvPr id="6" name="Picture 5">
             <a:extLst>
               <a:ext uri="{FF2B5EF4-FFF2-40B4-BE49-F238E27FC236}">
-                <a16:creationId xmlns:a16="http://schemas.microsoft.com/office/drawing/2014/main" id="{AFCC467B-AF50-DCFF-6072-6E9BEC806D52}"/>
+                <a16:creationId xmlns:a16="http://schemas.microsoft.com/office/drawing/2014/main" id="{EDBD8350-BC47-9D91-339E-9987C6D0690B}"/>
               </a:ext>
             </a:extLst>
           </p:cNvPr>
@@ -5468,8 +14113,38 @@
         </p:blipFill>
         <p:spPr>
           <a:xfrm>
-            <a:off x="6915147" y="2505075"/>
-            <a:ext cx="3697293" cy="3684588"/>
+            <a:off x="8798418" y="1690688"/>
+            <a:ext cx="2784420" cy="2692698"/>
+          </a:xfrm>
+          <a:prstGeom prst="rect">
+            <a:avLst/>
+          </a:prstGeom>
+        </p:spPr>
+      </p:pic>
+      <p:pic>
+        <p:nvPicPr>
+          <p:cNvPr id="4" name="Content Placeholder 11">
+            <a:extLst>
+              <a:ext uri="{FF2B5EF4-FFF2-40B4-BE49-F238E27FC236}">
+                <a16:creationId xmlns:a16="http://schemas.microsoft.com/office/drawing/2014/main" id="{AFCC467B-AF50-DCFF-6072-6E9BEC806D52}"/>
+              </a:ext>
+            </a:extLst>
+          </p:cNvPr>
+          <p:cNvPicPr>
+            <a:picLocks noChangeAspect="1"/>
+          </p:cNvPicPr>
+          <p:nvPr/>
+        </p:nvPicPr>
+        <p:blipFill>
+          <a:blip r:embed="rId3"/>
+          <a:stretch>
+            <a:fillRect/>
+          </a:stretch>
+        </p:blipFill>
+        <p:spPr>
+          <a:xfrm>
+            <a:off x="6505655" y="2505074"/>
+            <a:ext cx="4106785" cy="4092673"/>
           </a:xfrm>
           <a:prstGeom prst="rect">
             <a:avLst/>
@@ -5480,290 +14155,6 @@
     <p:extLst>
       <p:ext uri="{BB962C8B-B14F-4D97-AF65-F5344CB8AC3E}">
         <p14:creationId xmlns:p14="http://schemas.microsoft.com/office/powerpoint/2010/main" val="1722430630"/>
-      </p:ext>
-    </p:extLst>
-  </p:cSld>
-  <p:clrMapOvr>
-    <a:masterClrMapping/>
-  </p:clrMapOvr>
-</p:sld>
-</file>
-
-<file path=ppt/slides/slide5.xml><?xml version="1.0" encoding="utf-8"?>
-<p:sld xmlns:a="http://schemas.openxmlformats.org/drawingml/2006/main" xmlns:r="http://schemas.openxmlformats.org/officeDocument/2006/relationships" xmlns:p="http://schemas.openxmlformats.org/presentationml/2006/main">
-  <p:cSld>
-    <p:spTree>
-      <p:nvGrpSpPr>
-        <p:cNvPr id="1" name=""/>
-        <p:cNvGrpSpPr/>
-        <p:nvPr/>
-      </p:nvGrpSpPr>
-      <p:grpSpPr>
-        <a:xfrm>
-          <a:off x="0" y="0"/>
-          <a:ext cx="0" cy="0"/>
-          <a:chOff x="0" y="0"/>
-          <a:chExt cx="0" cy="0"/>
-        </a:xfrm>
-      </p:grpSpPr>
-      <p:sp>
-        <p:nvSpPr>
-          <p:cNvPr id="2" name="Title 1">
-            <a:extLst>
-              <a:ext uri="{FF2B5EF4-FFF2-40B4-BE49-F238E27FC236}">
-                <a16:creationId xmlns:a16="http://schemas.microsoft.com/office/drawing/2014/main" id="{4874B8FC-CE53-92A9-0D3E-25B7AD14CB43}"/>
-              </a:ext>
-            </a:extLst>
-          </p:cNvPr>
-          <p:cNvSpPr>
-            <a:spLocks noGrp="1"/>
-          </p:cNvSpPr>
-          <p:nvPr>
-            <p:ph type="title"/>
-          </p:nvPr>
-        </p:nvSpPr>
-        <p:spPr/>
-        <p:txBody>
-          <a:bodyPr/>
-          <a:lstStyle/>
-          <a:p>
-            <a:endParaRPr lang="en-US"/>
-          </a:p>
-        </p:txBody>
-      </p:sp>
-      <p:pic>
-        <p:nvPicPr>
-          <p:cNvPr id="5" name="Content Placeholder 4">
-            <a:extLst>
-              <a:ext uri="{FF2B5EF4-FFF2-40B4-BE49-F238E27FC236}">
-                <a16:creationId xmlns:a16="http://schemas.microsoft.com/office/drawing/2014/main" id="{05BC87E4-18B4-5F71-E8E6-BB09B31A041E}"/>
-              </a:ext>
-            </a:extLst>
-          </p:cNvPr>
-          <p:cNvPicPr>
-            <a:picLocks noGrp="1" noChangeAspect="1"/>
-          </p:cNvPicPr>
-          <p:nvPr>
-            <p:ph idx="1"/>
-          </p:nvPr>
-        </p:nvPicPr>
-        <p:blipFill>
-          <a:blip r:embed="rId2"/>
-          <a:stretch>
-            <a:fillRect/>
-          </a:stretch>
-        </p:blipFill>
-        <p:spPr>
-          <a:xfrm>
-            <a:off x="1398070" y="1825625"/>
-            <a:ext cx="9395860" cy="4351338"/>
-          </a:xfrm>
-          <a:prstGeom prst="rect">
-            <a:avLst/>
-          </a:prstGeom>
-        </p:spPr>
-      </p:pic>
-    </p:spTree>
-    <p:extLst>
-      <p:ext uri="{BB962C8B-B14F-4D97-AF65-F5344CB8AC3E}">
-        <p14:creationId xmlns:p14="http://schemas.microsoft.com/office/powerpoint/2010/main" val="490354352"/>
-      </p:ext>
-    </p:extLst>
-  </p:cSld>
-  <p:clrMapOvr>
-    <a:masterClrMapping/>
-  </p:clrMapOvr>
-</p:sld>
-</file>
-
-<file path=ppt/slides/slide6.xml><?xml version="1.0" encoding="utf-8"?>
-<p:sld xmlns:a="http://schemas.openxmlformats.org/drawingml/2006/main" xmlns:r="http://schemas.openxmlformats.org/officeDocument/2006/relationships" xmlns:p="http://schemas.openxmlformats.org/presentationml/2006/main">
-  <p:cSld>
-    <p:spTree>
-      <p:nvGrpSpPr>
-        <p:cNvPr id="1" name=""/>
-        <p:cNvGrpSpPr/>
-        <p:nvPr/>
-      </p:nvGrpSpPr>
-      <p:grpSpPr>
-        <a:xfrm>
-          <a:off x="0" y="0"/>
-          <a:ext cx="0" cy="0"/>
-          <a:chOff x="0" y="0"/>
-          <a:chExt cx="0" cy="0"/>
-        </a:xfrm>
-      </p:grpSpPr>
-      <p:sp>
-        <p:nvSpPr>
-          <p:cNvPr id="2" name="Title 1">
-            <a:extLst>
-              <a:ext uri="{FF2B5EF4-FFF2-40B4-BE49-F238E27FC236}">
-                <a16:creationId xmlns:a16="http://schemas.microsoft.com/office/drawing/2014/main" id="{1155E3C7-90A3-B879-9FB7-789B23C4BF12}"/>
-              </a:ext>
-            </a:extLst>
-          </p:cNvPr>
-          <p:cNvSpPr>
-            <a:spLocks noGrp="1"/>
-          </p:cNvSpPr>
-          <p:nvPr>
-            <p:ph type="title"/>
-          </p:nvPr>
-        </p:nvSpPr>
-        <p:spPr/>
-        <p:txBody>
-          <a:bodyPr/>
-          <a:lstStyle/>
-          <a:p>
-            <a:endParaRPr lang="en-US"/>
-          </a:p>
-        </p:txBody>
-      </p:sp>
-      <p:sp>
-        <p:nvSpPr>
-          <p:cNvPr id="3" name="Content Placeholder 2">
-            <a:extLst>
-              <a:ext uri="{FF2B5EF4-FFF2-40B4-BE49-F238E27FC236}">
-                <a16:creationId xmlns:a16="http://schemas.microsoft.com/office/drawing/2014/main" id="{97913CEE-33A0-48E7-A44B-C88572EC1A9E}"/>
-              </a:ext>
-            </a:extLst>
-          </p:cNvPr>
-          <p:cNvSpPr>
-            <a:spLocks noGrp="1"/>
-          </p:cNvSpPr>
-          <p:nvPr>
-            <p:ph idx="1"/>
-          </p:nvPr>
-        </p:nvSpPr>
-        <p:spPr/>
-        <p:txBody>
-          <a:bodyPr/>
-          <a:lstStyle/>
-          <a:p>
-            <a:endParaRPr lang="en-US"/>
-          </a:p>
-        </p:txBody>
-      </p:sp>
-      <p:pic>
-        <p:nvPicPr>
-          <p:cNvPr id="5" name="Picture 4">
-            <a:extLst>
-              <a:ext uri="{FF2B5EF4-FFF2-40B4-BE49-F238E27FC236}">
-                <a16:creationId xmlns:a16="http://schemas.microsoft.com/office/drawing/2014/main" id="{352ABCC4-BBE4-2CA4-E30E-618F05E9BC2C}"/>
-              </a:ext>
-            </a:extLst>
-          </p:cNvPr>
-          <p:cNvPicPr>
-            <a:picLocks noChangeAspect="1"/>
-          </p:cNvPicPr>
-          <p:nvPr/>
-        </p:nvPicPr>
-        <p:blipFill>
-          <a:blip r:embed="rId2"/>
-          <a:stretch>
-            <a:fillRect/>
-          </a:stretch>
-        </p:blipFill>
-        <p:spPr>
-          <a:xfrm>
-            <a:off x="0" y="382815"/>
-            <a:ext cx="12192000" cy="6092369"/>
-          </a:xfrm>
-          <a:prstGeom prst="rect">
-            <a:avLst/>
-          </a:prstGeom>
-        </p:spPr>
-      </p:pic>
-    </p:spTree>
-    <p:extLst>
-      <p:ext uri="{BB962C8B-B14F-4D97-AF65-F5344CB8AC3E}">
-        <p14:creationId xmlns:p14="http://schemas.microsoft.com/office/powerpoint/2010/main" val="1944887596"/>
-      </p:ext>
-    </p:extLst>
-  </p:cSld>
-  <p:clrMapOvr>
-    <a:masterClrMapping/>
-  </p:clrMapOvr>
-</p:sld>
-</file>
-
-<file path=ppt/slides/slide7.xml><?xml version="1.0" encoding="utf-8"?>
-<p:sld xmlns:a="http://schemas.openxmlformats.org/drawingml/2006/main" xmlns:r="http://schemas.openxmlformats.org/officeDocument/2006/relationships" xmlns:p="http://schemas.openxmlformats.org/presentationml/2006/main">
-  <p:cSld>
-    <p:spTree>
-      <p:nvGrpSpPr>
-        <p:cNvPr id="1" name=""/>
-        <p:cNvGrpSpPr/>
-        <p:nvPr/>
-      </p:nvGrpSpPr>
-      <p:grpSpPr>
-        <a:xfrm>
-          <a:off x="0" y="0"/>
-          <a:ext cx="0" cy="0"/>
-          <a:chOff x="0" y="0"/>
-          <a:chExt cx="0" cy="0"/>
-        </a:xfrm>
-      </p:grpSpPr>
-      <p:sp>
-        <p:nvSpPr>
-          <p:cNvPr id="2" name="Title 1">
-            <a:extLst>
-              <a:ext uri="{FF2B5EF4-FFF2-40B4-BE49-F238E27FC236}">
-                <a16:creationId xmlns:a16="http://schemas.microsoft.com/office/drawing/2014/main" id="{7A3A92C2-DA26-2608-44D7-6C92627ED791}"/>
-              </a:ext>
-            </a:extLst>
-          </p:cNvPr>
-          <p:cNvSpPr>
-            <a:spLocks noGrp="1"/>
-          </p:cNvSpPr>
-          <p:nvPr>
-            <p:ph type="title"/>
-          </p:nvPr>
-        </p:nvSpPr>
-        <p:spPr/>
-        <p:txBody>
-          <a:bodyPr/>
-          <a:lstStyle/>
-          <a:p>
-            <a:endParaRPr lang="en-US"/>
-          </a:p>
-        </p:txBody>
-      </p:sp>
-      <p:pic>
-        <p:nvPicPr>
-          <p:cNvPr id="5" name="Content Placeholder 4">
-            <a:extLst>
-              <a:ext uri="{FF2B5EF4-FFF2-40B4-BE49-F238E27FC236}">
-                <a16:creationId xmlns:a16="http://schemas.microsoft.com/office/drawing/2014/main" id="{CE9334C0-C1EA-7D15-170F-9501482757A4}"/>
-              </a:ext>
-            </a:extLst>
-          </p:cNvPr>
-          <p:cNvPicPr>
-            <a:picLocks noGrp="1" noChangeAspect="1"/>
-          </p:cNvPicPr>
-          <p:nvPr>
-            <p:ph idx="1"/>
-          </p:nvPr>
-        </p:nvPicPr>
-        <p:blipFill>
-          <a:blip r:embed="rId2"/>
-          <a:stretch>
-            <a:fillRect/>
-          </a:stretch>
-        </p:blipFill>
-        <p:spPr>
-          <a:xfrm>
-            <a:off x="1400671" y="1825625"/>
-            <a:ext cx="9390657" cy="4351338"/>
-          </a:xfrm>
-          <a:prstGeom prst="rect">
-            <a:avLst/>
-          </a:prstGeom>
-        </p:spPr>
-      </p:pic>
-    </p:spTree>
-    <p:extLst>
-      <p:ext uri="{BB962C8B-B14F-4D97-AF65-F5344CB8AC3E}">
-        <p14:creationId xmlns:p14="http://schemas.microsoft.com/office/powerpoint/2010/main" val="3609811973"/>
       </p:ext>
     </p:extLst>
   </p:cSld>
@@ -5795,7 +14186,7 @@
           <p:cNvPr id="2" name="Title 1">
             <a:extLst>
               <a:ext uri="{FF2B5EF4-FFF2-40B4-BE49-F238E27FC236}">
-                <a16:creationId xmlns:a16="http://schemas.microsoft.com/office/drawing/2014/main" id="{2A9FFA44-42D4-0E52-F624-917640140A91}"/>
+                <a16:creationId xmlns:a16="http://schemas.microsoft.com/office/drawing/2014/main" id="{EDDB1E1A-A872-FFC1-FB92-65A7D5F72ED4}"/>
               </a:ext>
             </a:extLst>
           </p:cNvPr>
@@ -5811,16 +14202,578 @@
           <a:bodyPr/>
           <a:lstStyle/>
           <a:p>
-            <a:endParaRPr lang="en-US"/>
+            <a:r>
+              <a:rPr lang="en-US" dirty="0"/>
+              <a:t>Is KN Formula Break down(con.)</a:t>
+            </a:r>
+          </a:p>
+        </p:txBody>
+      </p:sp>
+      <mc:AlternateContent xmlns:mc="http://schemas.openxmlformats.org/markup-compatibility/2006">
+        <mc:Choice xmlns:a14="http://schemas.microsoft.com/office/drawing/2010/main" Requires="a14">
+          <p:sp>
+            <p:nvSpPr>
+              <p:cNvPr id="3" name="Content Placeholder 2">
+                <a:extLst>
+                  <a:ext uri="{FF2B5EF4-FFF2-40B4-BE49-F238E27FC236}">
+                    <a16:creationId xmlns:a16="http://schemas.microsoft.com/office/drawing/2014/main" id="{3171E958-FF9B-6F25-0379-49521F2CFC78}"/>
+                  </a:ext>
+                </a:extLst>
+              </p:cNvPr>
+              <p:cNvSpPr>
+                <a:spLocks noGrp="1"/>
+              </p:cNvSpPr>
+              <p:nvPr>
+                <p:ph idx="1"/>
+              </p:nvPr>
+            </p:nvSpPr>
+            <p:spPr/>
+            <p:txBody>
+              <a:bodyPr>
+                <a:normAutofit fontScale="92500" lnSpcReduction="10000"/>
+              </a:bodyPr>
+              <a:lstStyle/>
+              <a:p>
+                <a:pPr>
+                  <a:buFont typeface="Wingdings" panose="05000000000000000000" pitchFamily="2" charset="2"/>
+                  <a:buChar char="Ø"/>
+                </a:pPr>
+                <a:r>
+                  <a:rPr lang="en-US" dirty="0"/>
+                  <a:t>We are matching a Compton interaction in volume 2/3 to a subsequent record in detector. </a:t>
+                </a:r>
+                <a14:m>
+                  <m:oMath xmlns:m="http://schemas.openxmlformats.org/officeDocument/2006/math">
+                    <m:borderBox>
+                      <m:borderBoxPr>
+                        <m:ctrlPr>
+                          <a:rPr lang="en-US" b="0" i="0"/>
+                        </m:ctrlPr>
+                      </m:borderBoxPr>
+                      <m:e>
+                        <m:r>
+                          <m:rPr>
+                            <m:nor/>
+                          </m:rPr>
+                          <a:rPr lang="en-US" b="0" i="0"/>
+                          <m:t>tumor/tissue Compton record</m:t>
+                        </m:r>
+                      </m:e>
+                    </m:borderBox>
+                    <m:r>
+                      <a:rPr lang="en-US"/>
+                      <m:t> ⟶ </m:t>
+                    </m:r>
+                    <m:borderBox>
+                      <m:borderBoxPr>
+                        <m:ctrlPr>
+                          <a:rPr lang="en-US"/>
+                        </m:ctrlPr>
+                      </m:borderBoxPr>
+                      <m:e>
+                        <m:r>
+                          <m:rPr>
+                            <m:nor/>
+                          </m:rPr>
+                          <a:rPr lang="en-US"/>
+                          <m:t>detector record</m:t>
+                        </m:r>
+                      </m:e>
+                    </m:borderBox>
+                    <m:r>
+                      <a:rPr lang="en-US"/>
+                      <m:t>.</m:t>
+                    </m:r>
+                  </m:oMath>
+                </a14:m>
+                <a:endParaRPr lang="en-US" b="0" dirty="0"/>
+              </a:p>
+              <a:p>
+                <a:pPr>
+                  <a:buFont typeface="Wingdings" panose="05000000000000000000" pitchFamily="2" charset="2"/>
+                  <a:buChar char="Ø"/>
+                </a:pPr>
+                <a:r>
+                  <a:rPr lang="en-US" dirty="0"/>
+                  <a:t>The KN formula  is applicable for single event (at the </a:t>
+                </a:r>
+                <a:r>
+                  <a:rPr lang="en-US" b="1" dirty="0"/>
+                  <a:t>first box)</a:t>
+                </a:r>
+                <a:r>
+                  <a:rPr lang="en-US" dirty="0"/>
+                  <a:t>, not for one recorded later in the detector.</a:t>
+                </a:r>
+              </a:p>
+              <a:p>
+                <a:pPr>
+                  <a:buFont typeface="Wingdings" panose="05000000000000000000" pitchFamily="2" charset="2"/>
+                  <a:buChar char="Ø"/>
+                </a:pPr>
+                <a:r>
+                  <a:rPr lang="en-US" b="1" dirty="0"/>
+                  <a:t>Multiple scattering occurred before reaching the detector</a:t>
+                </a:r>
+                <a:r>
+                  <a:rPr lang="en-US" dirty="0"/>
+                  <a:t>. </a:t>
+                </a:r>
+                <a:r>
+                  <a:rPr lang="en-US" dirty="0" err="1"/>
+                  <a:t>e,.g</a:t>
+                </a:r>
+                <a:r>
+                  <a:rPr lang="en-US" dirty="0"/>
+                  <a:t>.  example,</a:t>
+                </a:r>
+              </a:p>
+              <a:p>
+                <a:pPr>
+                  <a:buFont typeface="Wingdings" panose="05000000000000000000" pitchFamily="2" charset="2"/>
+                  <a:buChar char="Ø"/>
+                </a:pPr>
+                <a14:m>
+                  <m:oMath xmlns:m="http://schemas.openxmlformats.org/officeDocument/2006/math">
+                    <m:r>
+                      <a:rPr lang="en-US"/>
+                      <m:t>662</m:t>
+                    </m:r>
+                    <m:limUpp>
+                      <m:limUppPr>
+                        <m:ctrlPr>
+                          <a:rPr lang="en-US" i="1"/>
+                        </m:ctrlPr>
+                      </m:limUppPr>
+                      <m:e>
+                        <m:limLow>
+                          <m:limLowPr>
+                            <m:ctrlPr>
+                              <a:rPr lang="en-US"/>
+                            </m:ctrlPr>
+                          </m:limLowPr>
+                          <m:e>
+                            <m:r>
+                              <a:rPr lang="en-US"/>
+                              <m:t>→</m:t>
+                            </m:r>
+                          </m:e>
+                          <m:lim>
+                            <m:box>
+                              <m:boxPr>
+                                <m:ctrlPr>
+                                  <a:rPr lang="en-US"/>
+                                </m:ctrlPr>
+                              </m:boxPr>
+                              <m:e>
+                                <m:r>
+                                  <m:rPr>
+                                    <m:nor/>
+                                  </m:rPr>
+                                  <a:rPr lang="en-US"/>
+                                  <m:t>tumor</m:t>
+                                </m:r>
+                              </m:e>
+                            </m:box>
+                          </m:lim>
+                        </m:limLow>
+                      </m:e>
+                      <m:lim>
+                        <m:box>
+                          <m:boxPr>
+                            <m:ctrlPr>
+                              <a:rPr lang="en-US" i="1"/>
+                            </m:ctrlPr>
+                          </m:boxPr>
+                          <m:e>
+                            <m:sSup>
+                              <m:sSupPr>
+                                <m:ctrlPr>
+                                  <a:rPr lang="en-US"/>
+                                </m:ctrlPr>
+                              </m:sSupPr>
+                              <m:e>
+                                <m:r>
+                                  <a:rPr lang="en-US"/>
+                                  <m:t>30</m:t>
+                                </m:r>
+                              </m:e>
+                              <m:sup>
+                                <m:r>
+                                  <a:rPr lang="en-US"/>
+                                  <m:t>∘</m:t>
+                                </m:r>
+                              </m:sup>
+                            </m:sSup>
+                          </m:e>
+                        </m:box>
+                      </m:lim>
+                    </m:limUpp>
+                    <m:r>
+                      <a:rPr lang="en-US"/>
+                      <m:t>564</m:t>
+                    </m:r>
+                    <m:limUpp>
+                      <m:limUppPr>
+                        <m:ctrlPr>
+                          <a:rPr lang="en-US" i="1"/>
+                        </m:ctrlPr>
+                      </m:limUppPr>
+                      <m:e>
+                        <m:limLow>
+                          <m:limLowPr>
+                            <m:ctrlPr>
+                              <a:rPr lang="en-US"/>
+                            </m:ctrlPr>
+                          </m:limLowPr>
+                          <m:e>
+                            <m:r>
+                              <a:rPr lang="en-US"/>
+                              <m:t>→</m:t>
+                            </m:r>
+                          </m:e>
+                          <m:lim>
+                            <m:box>
+                              <m:boxPr>
+                                <m:ctrlPr>
+                                  <a:rPr lang="en-US"/>
+                                </m:ctrlPr>
+                              </m:boxPr>
+                              <m:e>
+                                <m:r>
+                                  <m:rPr>
+                                    <m:nor/>
+                                  </m:rPr>
+                                  <a:rPr lang="en-US"/>
+                                  <m:t>phantom/other volume</m:t>
+                                </m:r>
+                              </m:e>
+                            </m:box>
+                          </m:lim>
+                        </m:limLow>
+                      </m:e>
+                      <m:lim>
+                        <m:box>
+                          <m:boxPr>
+                            <m:ctrlPr>
+                              <a:rPr lang="en-US"/>
+                            </m:ctrlPr>
+                          </m:boxPr>
+                          <m:e>
+                            <m:r>
+                              <m:rPr>
+                                <m:nor/>
+                              </m:rPr>
+                              <a:rPr lang="en-US"/>
+                              <m:t>Compton</m:t>
+                            </m:r>
+                          </m:e>
+                        </m:box>
+                      </m:lim>
+                    </m:limUpp>
+                    <m:r>
+                      <a:rPr lang="en-US"/>
+                      <m:t>400→</m:t>
+                    </m:r>
+                    <m:r>
+                      <m:rPr>
+                        <m:nor/>
+                      </m:rPr>
+                      <a:rPr lang="en-US"/>
+                      <m:t>detector</m:t>
+                    </m:r>
+                    <m:r>
+                      <a:rPr lang="en-US"/>
+                      <m:t>.</m:t>
+                    </m:r>
+                  </m:oMath>
+                </a14:m>
+                <a:endParaRPr lang="en-US" b="0" dirty="0"/>
+              </a:p>
+              <a:p>
+                <a:pPr>
+                  <a:buFont typeface="Wingdings" panose="05000000000000000000" pitchFamily="2" charset="2"/>
+                  <a:buChar char="Ø"/>
+                </a:pPr>
+                <a:r>
+                  <a:rPr lang="en-US" dirty="0"/>
+                  <a:t>We are keeping original angle like </a:t>
+                </a:r>
+                <a14:m>
+                  <m:oMath xmlns:m="http://schemas.openxmlformats.org/officeDocument/2006/math">
+                    <m:sSup>
+                      <m:sSupPr>
+                        <m:ctrlPr>
+                          <a:rPr lang="en-US"/>
+                        </m:ctrlPr>
+                      </m:sSupPr>
+                      <m:e>
+                        <m:r>
+                          <a:rPr lang="en-US"/>
+                          <m:t>30</m:t>
+                        </m:r>
+                      </m:e>
+                      <m:sup>
+                        <m:r>
+                          <a:rPr lang="en-US"/>
+                          <m:t>∘</m:t>
+                        </m:r>
+                      </m:sup>
+                    </m:sSup>
+                  </m:oMath>
+                </a14:m>
+                <a:r>
+                  <a:rPr lang="en-US" dirty="0"/>
+                  <a:t>, but detector entry energy is no longer same. So,  we need to impose constrain to count the event.</a:t>
+                </a:r>
+              </a:p>
+            </p:txBody>
+          </p:sp>
+        </mc:Choice>
+        <mc:Fallback>
+          <p:sp>
+            <p:nvSpPr>
+              <p:cNvPr id="3" name="Content Placeholder 2">
+                <a:extLst>
+                  <a:ext uri="{FF2B5EF4-FFF2-40B4-BE49-F238E27FC236}">
+                    <a16:creationId xmlns:a16="http://schemas.microsoft.com/office/drawing/2014/main" id="{3171E958-FF9B-6F25-0379-49521F2CFC78}"/>
+                  </a:ext>
+                </a:extLst>
+              </p:cNvPr>
+              <p:cNvSpPr>
+                <a:spLocks noGrp="1" noRot="1" noChangeAspect="1" noMove="1" noResize="1" noEditPoints="1" noAdjustHandles="1" noChangeArrowheads="1" noChangeShapeType="1" noTextEdit="1"/>
+              </p:cNvSpPr>
+              <p:nvPr>
+                <p:ph idx="1"/>
+              </p:nvPr>
+            </p:nvSpPr>
+            <p:spPr>
+              <a:blipFill>
+                <a:blip r:embed="rId2"/>
+                <a:stretch>
+                  <a:fillRect l="-928" t="-2801" r="-928" b="-840"/>
+                </a:stretch>
+              </a:blipFill>
+            </p:spPr>
+            <p:txBody>
+              <a:bodyPr/>
+              <a:lstStyle/>
+              <a:p>
+                <a:r>
+                  <a:rPr lang="en-US">
+                    <a:noFill/>
+                  </a:rPr>
+                  <a:t> </a:t>
+                </a:r>
+              </a:p>
+            </p:txBody>
+          </p:sp>
+        </mc:Fallback>
+      </mc:AlternateContent>
+    </p:spTree>
+    <p:extLst>
+      <p:ext uri="{BB962C8B-B14F-4D97-AF65-F5344CB8AC3E}">
+        <p14:creationId xmlns:p14="http://schemas.microsoft.com/office/powerpoint/2010/main" val="1966807392"/>
+      </p:ext>
+    </p:extLst>
+  </p:cSld>
+  <p:clrMapOvr>
+    <a:masterClrMapping/>
+  </p:clrMapOvr>
+</p:sld>
+</file>
+
+<file path=ppt/slides/slide9.xml><?xml version="1.0" encoding="utf-8"?>
+<p:sld xmlns:a="http://schemas.openxmlformats.org/drawingml/2006/main" xmlns:r="http://schemas.openxmlformats.org/officeDocument/2006/relationships" xmlns:p="http://schemas.openxmlformats.org/presentationml/2006/main">
+  <p:cSld>
+    <p:spTree>
+      <p:nvGrpSpPr>
+        <p:cNvPr id="1" name=""/>
+        <p:cNvGrpSpPr/>
+        <p:nvPr/>
+      </p:nvGrpSpPr>
+      <p:grpSpPr>
+        <a:xfrm>
+          <a:off x="0" y="0"/>
+          <a:ext cx="0" cy="0"/>
+          <a:chOff x="0" y="0"/>
+          <a:chExt cx="0" cy="0"/>
+        </a:xfrm>
+      </p:grpSpPr>
+      <p:sp>
+        <p:nvSpPr>
+          <p:cNvPr id="2" name="Title 1">
+            <a:extLst>
+              <a:ext uri="{FF2B5EF4-FFF2-40B4-BE49-F238E27FC236}">
+                <a16:creationId xmlns:a16="http://schemas.microsoft.com/office/drawing/2014/main" id="{26E9E6FD-561B-B751-1088-0CC7B4584ADE}"/>
+              </a:ext>
+            </a:extLst>
+          </p:cNvPr>
+          <p:cNvSpPr>
+            <a:spLocks noGrp="1"/>
+          </p:cNvSpPr>
+          <p:nvPr>
+            <p:ph type="title"/>
+          </p:nvPr>
+        </p:nvSpPr>
+        <p:spPr>
+          <a:xfrm>
+            <a:off x="838200" y="365125"/>
+            <a:ext cx="10515600" cy="662781"/>
+          </a:xfrm>
+        </p:spPr>
+        <p:txBody>
+          <a:bodyPr>
+            <a:normAutofit fontScale="90000"/>
+          </a:bodyPr>
+          <a:lstStyle/>
+          <a:p>
+            <a:pPr algn="ctr"/>
+            <a:r>
+              <a:rPr lang="en-US" dirty="0"/>
+              <a:t>Overview </a:t>
+            </a:r>
           </a:p>
         </p:txBody>
       </p:sp>
       <p:pic>
         <p:nvPicPr>
-          <p:cNvPr id="5" name="Content Placeholder 4">
+          <p:cNvPr id="7" name="Picture 6">
             <a:extLst>
               <a:ext uri="{FF2B5EF4-FFF2-40B4-BE49-F238E27FC236}">
-                <a16:creationId xmlns:a16="http://schemas.microsoft.com/office/drawing/2014/main" id="{F439F914-0BD9-3509-6D21-47442B127D47}"/>
+                <a16:creationId xmlns:a16="http://schemas.microsoft.com/office/drawing/2014/main" id="{DA20FD56-7CF8-0B00-6820-616B9770C83F}"/>
+              </a:ext>
+            </a:extLst>
+          </p:cNvPr>
+          <p:cNvPicPr>
+            <a:picLocks noChangeAspect="1"/>
+          </p:cNvPicPr>
+          <p:nvPr/>
+        </p:nvPicPr>
+        <p:blipFill>
+          <a:blip r:embed="rId2"/>
+          <a:stretch>
+            <a:fillRect/>
+          </a:stretch>
+        </p:blipFill>
+        <p:spPr>
+          <a:xfrm>
+            <a:off x="7805506" y="1789162"/>
+            <a:ext cx="4386494" cy="3641513"/>
+          </a:xfrm>
+          <a:prstGeom prst="rect">
+            <a:avLst/>
+          </a:prstGeom>
+        </p:spPr>
+      </p:pic>
+      <p:pic>
+        <p:nvPicPr>
+          <p:cNvPr id="9" name="Picture 8">
+            <a:extLst>
+              <a:ext uri="{FF2B5EF4-FFF2-40B4-BE49-F238E27FC236}">
+                <a16:creationId xmlns:a16="http://schemas.microsoft.com/office/drawing/2014/main" id="{CB696C07-EB2B-082E-62FA-B024EDE029EA}"/>
+              </a:ext>
+            </a:extLst>
+          </p:cNvPr>
+          <p:cNvPicPr>
+            <a:picLocks noChangeAspect="1"/>
+          </p:cNvPicPr>
+          <p:nvPr/>
+        </p:nvPicPr>
+        <p:blipFill>
+          <a:blip r:embed="rId3"/>
+          <a:stretch>
+            <a:fillRect/>
+          </a:stretch>
+        </p:blipFill>
+        <p:spPr>
+          <a:xfrm>
+            <a:off x="216675" y="1240527"/>
+            <a:ext cx="4386495" cy="3263612"/>
+          </a:xfrm>
+          <a:prstGeom prst="rect">
+            <a:avLst/>
+          </a:prstGeom>
+        </p:spPr>
+      </p:pic>
+      <p:sp>
+        <p:nvSpPr>
+          <p:cNvPr id="10" name="Title 1">
+            <a:extLst>
+              <a:ext uri="{FF2B5EF4-FFF2-40B4-BE49-F238E27FC236}">
+                <a16:creationId xmlns:a16="http://schemas.microsoft.com/office/drawing/2014/main" id="{ABD9FEAA-DBE7-88FF-78A2-DB5DC2F19719}"/>
+              </a:ext>
+            </a:extLst>
+          </p:cNvPr>
+          <p:cNvSpPr txBox="1">
+            <a:spLocks/>
+          </p:cNvSpPr>
+          <p:nvPr/>
+        </p:nvSpPr>
+        <p:spPr>
+          <a:xfrm>
+            <a:off x="-205153" y="5223197"/>
+            <a:ext cx="5832231" cy="1330969"/>
+          </a:xfrm>
+          <a:prstGeom prst="rect">
+            <a:avLst/>
+          </a:prstGeom>
+        </p:spPr>
+        <p:txBody>
+          <a:bodyPr vert="horz" lIns="91440" tIns="45720" rIns="91440" bIns="45720" rtlCol="0" anchor="ctr">
+            <a:normAutofit fontScale="82500" lnSpcReduction="20000"/>
+          </a:bodyPr>
+          <a:lstStyle>
+            <a:lvl1pPr algn="l" defTabSz="914400" rtl="0" eaLnBrk="1" latinLnBrk="0" hangingPunct="1">
+              <a:lnSpc>
+                <a:spcPct val="90000"/>
+              </a:lnSpc>
+              <a:spcBef>
+                <a:spcPct val="0"/>
+              </a:spcBef>
+              <a:buNone/>
+              <a:defRPr sz="4400" kern="1200">
+                <a:solidFill>
+                  <a:schemeClr val="tx1"/>
+                </a:solidFill>
+                <a:latin typeface="+mj-lt"/>
+                <a:ea typeface="+mj-ea"/>
+                <a:cs typeface="+mj-cs"/>
+              </a:defRPr>
+            </a:lvl1pPr>
+          </a:lstStyle>
+          <a:p>
+            <a:pPr algn="ctr"/>
+            <a:r>
+              <a:rPr lang="en-US" dirty="0">
+                <a:hlinkClick r:id="rId4" action="ppaction://hlinkfile"/>
+              </a:rPr>
+              <a:t>Geant4-ROOT- Excel</a:t>
+            </a:r>
+            <a:endParaRPr lang="en-US" dirty="0"/>
+          </a:p>
+          <a:p>
+            <a:pPr algn="ctr"/>
+            <a:r>
+              <a:rPr lang="en-US" dirty="0"/>
+              <a:t>Compton profile mapping</a:t>
+            </a:r>
+          </a:p>
+          <a:p>
+            <a:pPr algn="ctr"/>
+            <a:r>
+              <a:rPr lang="en-US" dirty="0"/>
+              <a:t> </a:t>
+            </a:r>
+          </a:p>
+        </p:txBody>
+      </p:sp>
+      <p:pic>
+        <p:nvPicPr>
+          <p:cNvPr id="14" name="Content Placeholder 11">
+            <a:extLst>
+              <a:ext uri="{FF2B5EF4-FFF2-40B4-BE49-F238E27FC236}">
+                <a16:creationId xmlns:a16="http://schemas.microsoft.com/office/drawing/2014/main" id="{1D9BACC7-544D-7802-23DB-DC016D300C11}"/>
               </a:ext>
             </a:extLst>
           </p:cNvPr>
@@ -5832,15 +14785,15 @@
           </p:nvPr>
         </p:nvPicPr>
         <p:blipFill>
-          <a:blip r:embed="rId2"/>
+          <a:blip r:embed="rId5"/>
           <a:stretch>
             <a:fillRect/>
           </a:stretch>
         </p:blipFill>
         <p:spPr>
           <a:xfrm>
-            <a:off x="1391373" y="1825625"/>
-            <a:ext cx="9409253" cy="4351338"/>
+            <a:off x="4123325" y="1536056"/>
+            <a:ext cx="4162026" cy="4147724"/>
           </a:xfrm>
           <a:prstGeom prst="rect">
             <a:avLst/>
@@ -5850,7 +14803,7 @@
     </p:spTree>
     <p:extLst>
       <p:ext uri="{BB962C8B-B14F-4D97-AF65-F5344CB8AC3E}">
-        <p14:creationId xmlns:p14="http://schemas.microsoft.com/office/powerpoint/2010/main" val="787742962"/>
+        <p14:creationId xmlns:p14="http://schemas.microsoft.com/office/powerpoint/2010/main" val="2532300883"/>
       </p:ext>
     </p:extLst>
   </p:cSld>
